--- a/reports/Explainable_House_Price_Prediction_Presentation.pptx
+++ b/reports/Explainable_House_Price_Prediction_Presentation.pptx
@@ -17,6 +17,7 @@
     <p:sldId id="265" r:id="rId16"/>
     <p:sldId id="266" r:id="rId17"/>
     <p:sldId id="267" r:id="rId18"/>
+    <p:sldId id="268" r:id="rId19"/>
   </p:sldIdLst>
   <p:sldSz cx="12191695" cy="6858000" type="screen4x3"/>
   <p:notesSz cx="6858000" cy="9144000"/>
@@ -3116,7 +3117,7 @@
         <p:spPr>
           <a:xfrm>
             <a:off x="731520" y="1463040"/>
-            <a:ext cx="109728" cy="3840480"/>
+            <a:ext cx="109728" cy="3931920"/>
           </a:xfrm>
           <a:prstGeom prst="rect">
             <a:avLst/>
@@ -3181,7 +3182,7 @@
               </a:defRPr>
             </a:pPr>
             <a:r>
-              <a:t>EXPLAINABLE MACHINE LEARNING IN PRODUCTION</a:t>
+              <a:t>APPLIED MACHINE LEARNING &amp; EXPLAINABLE AI CASE STUDY</a:t>
             </a:r>
           </a:p>
           <a:p>
@@ -3197,7 +3198,7 @@
               </a:defRPr>
             </a:pPr>
             <a:r>
-              <a:t>Transparent Property Valuation</a:t>
+              <a:t>Transparent House Price Prediction</a:t>
             </a:r>
           </a:p>
           <a:p>
@@ -3213,7 +3214,7 @@
               </a:defRPr>
             </a:pPr>
             <a:r>
-              <a:t>An End-to-End Regression System with Leakage-Safe DAG Pipelines &amp; Dual XAI</a:t>
+              <a:t>Predicting Residential Valuations in Ames, Iowa with Complete Explainability</a:t>
             </a:r>
           </a:p>
           <a:p>
@@ -3229,7 +3230,7 @@
               </a:defRPr>
             </a:pPr>
             <a:r>
-              <a:t>Moving past opaque black-box valuations: combining strict mlr3pipelines DAGs, multi-model benchmarking across 6 families, and game-theoretic SHAP &amp; LIME attribution to deliver accountable, auditable residential appraisals in Ames, Iowa.</a:t>
+              <a:t>A practical, leakage-free machine learning project built in R. We show how to clean messy real estate data, benchmark 6 algorithms, pick the best model (Random Forest), and explain every single price quote in plain English using SHAP &amp; LIME.</a:t>
             </a:r>
           </a:p>
         </p:txBody>
@@ -3251,13 +3252,13 @@
           <a:noFill/>
         </p:spPr>
         <p:txBody>
-          <a:bodyPr wrap="square" lIns="0" tIns="0" rIns="0" bIns="0">
+          <a:bodyPr wrap="none" lIns="0" tIns="0" rIns="0" bIns="0">
             <a:spAutoFit/>
           </a:bodyPr>
           <a:lstStyle/>
           <a:p>
             <a:pPr>
-              <a:defRPr sz="1200" b="1">
+              <a:defRPr sz="1300" b="1">
                 <a:solidFill>
                   <a:srgbClr val="059669"/>
                 </a:solidFill>
@@ -3265,7 +3266,7 @@
               </a:defRPr>
             </a:pPr>
             <a:r>
-              <a:t>Dataset: 2,930 Ames Properties  |  Architecture: mlr3pipelines DAG  |  Holdout MAE: $14,761 (R² = 89.8%)  |  UI: Interactive Shiny App</a:t>
+              <a:t>2,930 Real Homes  •  Leakage-Free R Pipelines  •  89.8% Accuracy  •  Interactive Web Calculator</a:t>
             </a:r>
           </a:p>
         </p:txBody>
@@ -3327,7 +3328,7 @@
               </a:defRPr>
             </a:pPr>
             <a:r>
-              <a:t>EXPLAINABLE AI • LOCAL ATTRIBUTION &amp; GOVERNANCE</a:t>
+              <a:t>5. EXPLAINABILITY (GLOBAL)</a:t>
             </a:r>
           </a:p>
         </p:txBody>
@@ -3363,7 +3364,7 @@
               </a:defRPr>
             </a:pPr>
             <a:r>
-              <a:t>Local XAI: Explaining Individual House Appraisals</a:t>
+              <a:t>Market Secrets: What Really Drives House Prices in Ames?</a:t>
             </a:r>
           </a:p>
         </p:txBody>
@@ -3399,7 +3400,7 @@
               </a:defRPr>
             </a:pPr>
             <a:r>
-              <a:t>Deconstructing predictions against the $180,800 Ames baseline</a:t>
+              <a:t>We shuffled each feature to see how much worse the model got without it</a:t>
             </a:r>
           </a:p>
         </p:txBody>
@@ -3412,7 +3413,7 @@
         </p:nvSpPr>
         <p:spPr>
           <a:xfrm>
-            <a:off x="731520" y="6400800"/>
+            <a:off x="731520" y="6446520"/>
             <a:ext cx="10698480" cy="274320"/>
           </a:xfrm>
           <a:prstGeom prst="rect">
@@ -3435,7 +3436,7 @@
               </a:defRPr>
             </a:pPr>
             <a:r>
-              <a:t>Explainable House Price Prediction System in R (mlr3 + XAI) • Slide 10 of 12</a:t>
+              <a:t>Explainable House Price Prediction (Ames, Iowa Case Study) • Slide 10 of 13</a:t>
             </a:r>
           </a:p>
         </p:txBody>
@@ -3449,7 +3450,7 @@
         <p:spPr>
           <a:xfrm>
             <a:off x="731520" y="1737360"/>
-            <a:ext cx="5303520" cy="3291840"/>
+            <a:ext cx="5303520" cy="4297680"/>
           </a:xfrm>
           <a:prstGeom prst="roundRect">
             <a:avLst/>
@@ -3487,7 +3488,7 @@
       </p:sp>
       <p:pic>
         <p:nvPicPr>
-          <p:cNvPr id="7" name="Picture 6" descr="xai_02_shap_luxury_waterfall.png"/>
+          <p:cNvPr id="7" name="Picture 6" descr="xai_01_global_importance.png"/>
           <p:cNvPicPr>
             <a:picLocks noChangeAspect="1"/>
           </p:cNvPicPr>
@@ -3502,7 +3503,7 @@
         <p:spPr>
           <a:xfrm>
             <a:off x="822960" y="1828800"/>
-            <a:ext cx="5120640" cy="3063240"/>
+            <a:ext cx="5120640" cy="3931920"/>
           </a:xfrm>
           <a:prstGeom prst="rect">
             <a:avLst/>
@@ -3518,7 +3519,7 @@
         <p:spPr>
           <a:xfrm>
             <a:off x="6309360" y="1737360"/>
-            <a:ext cx="5120640" cy="3291840"/>
+            <a:ext cx="5120640" cy="4297680"/>
           </a:xfrm>
           <a:prstGeom prst="roundRect">
             <a:avLst/>
@@ -3563,7 +3564,7 @@
         <p:spPr>
           <a:xfrm>
             <a:off x="6583680" y="1920240"/>
-            <a:ext cx="4663440" cy="2926080"/>
+            <a:ext cx="4663440" cy="3931920"/>
           </a:xfrm>
           <a:prstGeom prst="rect">
             <a:avLst/>
@@ -3585,25 +3586,51 @@
               </a:defRPr>
             </a:pPr>
             <a:r>
-              <a:t>Dual Methodology Attribution</a:t>
+              <a:t>The 4 Biggest Price Drivers:</a:t>
             </a:r>
           </a:p>
           <a:p>
             <a:pPr>
               <a:spcBef>
-                <a:spcPts val="600"/>
+                <a:spcPts val="800"/>
               </a:spcBef>
-              <a:defRPr sz="1200">
+              <a:defRPr sz="1300">
                 <a:latin typeface="Calibri"/>
               </a:defRPr>
             </a:pPr>
             <a:r>
               <a:rPr b="1">
                 <a:solidFill>
+                  <a:srgbClr val="1E3A8A"/>
+                </a:solidFill>
+              </a:rPr>
+              <a:t>• 1. Quality Combined with Size (50%+): </a:t>
+            </a:r>
+            <a:r>
+              <a:rPr>
+                <a:solidFill>
                   <a:srgbClr val="1E293B"/>
                 </a:solidFill>
               </a:rPr>
-              <a:t>• SHAP (Shapley Additive Explanations): </a:t>
+              <a:t>Nothing matters more than how big the home is multiplied by its construction quality. A large high-quality house is the ultimate price driver.</a:t>
+            </a:r>
+          </a:p>
+          <a:p>
+            <a:pPr>
+              <a:spcBef>
+                <a:spcPts val="800"/>
+              </a:spcBef>
+              <a:defRPr sz="1300">
+                <a:latin typeface="Calibri"/>
+              </a:defRPr>
+            </a:pPr>
+            <a:r>
+              <a:rPr b="1">
+                <a:solidFill>
+                  <a:srgbClr val="1E3A8A"/>
+                </a:solidFill>
+              </a:rPr>
+              <a:t>• 2. Location, Location, Location: </a:t>
             </a:r>
             <a:r>
               <a:rPr>
@@ -3611,25 +3638,51 @@
                   <a:srgbClr val="1E293B"/>
                 </a:solidFill>
               </a:rPr>
-              <a:t>Grounded in cooperative game theory. Fairly allocates the valuation gap relative to the $180,800 Ames baseline across all features with mathematical additivity.</a:t>
+              <a:t>Neighborhood is the #1 categorical modifier. Premium neighborhoods like Northridge Heights set a much higher baseline price.</a:t>
             </a:r>
           </a:p>
           <a:p>
             <a:pPr>
               <a:spcBef>
-                <a:spcPts val="600"/>
+                <a:spcPts val="800"/>
               </a:spcBef>
-              <a:defRPr sz="1200">
+              <a:defRPr sz="1300">
                 <a:latin typeface="Calibri"/>
               </a:defRPr>
             </a:pPr>
             <a:r>
               <a:rPr b="1">
                 <a:solidFill>
+                  <a:srgbClr val="1E3A8A"/>
+                </a:solidFill>
+              </a:rPr>
+              <a:t>• 3. Age is a Steady Discount: </a:t>
+            </a:r>
+            <a:r>
+              <a:rPr>
+                <a:solidFill>
                   <a:srgbClr val="1E293B"/>
                 </a:solidFill>
               </a:rPr>
-              <a:t>• LIME (Local Interpretable Surrogates): </a:t>
+              <a:t>Every decade of age reduces price, UNLESS the owner has completed major modern remodeling additions.</a:t>
+            </a:r>
+          </a:p>
+          <a:p>
+            <a:pPr>
+              <a:spcBef>
+                <a:spcPts val="800"/>
+              </a:spcBef>
+              <a:defRPr sz="1300">
+                <a:latin typeface="Calibri"/>
+              </a:defRPr>
+            </a:pPr>
+            <a:r>
+              <a:rPr b="1">
+                <a:solidFill>
+                  <a:srgbClr val="1E3A8A"/>
+                </a:solidFill>
+              </a:rPr>
+              <a:t>• 4. Finished vs Unfinished Space: </a:t>
             </a:r>
             <a:r>
               <a:rPr>
@@ -3637,130 +3690,7 @@
                   <a:srgbClr val="1E293B"/>
                 </a:solidFill>
               </a:rPr>
-              <a:t>Fits an interpretable sparse linear surrogate in the immediate data neighborhood of the property to surface simple decision rules.</a:t>
-            </a:r>
-          </a:p>
-          <a:p>
-            <a:pPr>
-              <a:spcBef>
-                <a:spcPts val="600"/>
-              </a:spcBef>
-              <a:defRPr sz="1200">
-                <a:latin typeface="Calibri"/>
-              </a:defRPr>
-            </a:pPr>
-            <a:r>
-              <a:rPr b="1">
-                <a:solidFill>
-                  <a:srgbClr val="1E293B"/>
-                </a:solidFill>
-              </a:rPr>
-              <a:t>• Luxury Case Study ($378k sale): </a:t>
-            </a:r>
-            <a:r>
-              <a:rPr>
-                <a:solidFill>
-                  <a:srgbClr val="1E293B"/>
-                </a:solidFill>
-              </a:rPr>
-              <a:t>SHAP reveals that expansive square footage (+$82k) and top-grade materials (+$54k) drove appreciation, while older build era (-$18k) acted as a brake.</a:t>
-            </a:r>
-          </a:p>
-        </p:txBody>
-      </p:sp>
-      <p:sp>
-        <p:nvSpPr>
-          <p:cNvPr id="10" name="Rounded Rectangle 9"/>
-          <p:cNvSpPr/>
-          <p:nvPr/>
-        </p:nvSpPr>
-        <p:spPr>
-          <a:xfrm>
-            <a:off x="731520" y="5166360"/>
-            <a:ext cx="10698480" cy="960120"/>
-          </a:xfrm>
-          <a:prstGeom prst="roundRect">
-            <a:avLst/>
-          </a:prstGeom>
-          <a:solidFill>
-            <a:srgbClr val="FEF3C7"/>
-          </a:solidFill>
-          <a:ln w="12700">
-            <a:solidFill>
-              <a:srgbClr val="D97706"/>
-            </a:solidFill>
-          </a:ln>
-        </p:spPr>
-        <p:style>
-          <a:lnRef idx="1">
-            <a:schemeClr val="accent1"/>
-          </a:lnRef>
-          <a:fillRef idx="3">
-            <a:schemeClr val="accent1"/>
-          </a:fillRef>
-          <a:effectRef idx="2">
-            <a:schemeClr val="accent1"/>
-          </a:effectRef>
-          <a:fontRef idx="minor">
-            <a:schemeClr val="lt1"/>
-          </a:fontRef>
-        </p:style>
-        <p:txBody>
-          <a:bodyPr rtlCol="0" anchor="ctr"/>
-          <a:lstStyle/>
-          <a:p>
-            <a:pPr algn="ctr"/>
-          </a:p>
-        </p:txBody>
-      </p:sp>
-      <p:sp>
-        <p:nvSpPr>
-          <p:cNvPr id="11" name="TextBox 10"/>
-          <p:cNvSpPr txBox="1"/>
-          <p:nvPr/>
-        </p:nvSpPr>
-        <p:spPr>
-          <a:xfrm>
-            <a:off x="1005840" y="5230368"/>
-            <a:ext cx="10149840" cy="777240"/>
-          </a:xfrm>
-          <a:prstGeom prst="rect">
-            <a:avLst/>
-          </a:prstGeom>
-          <a:noFill/>
-        </p:spPr>
-        <p:txBody>
-          <a:bodyPr wrap="square" lIns="0" tIns="0" rIns="0" bIns="0">
-            <a:spAutoFit/>
-          </a:bodyPr>
-          <a:lstStyle/>
-          <a:p>
-            <a:pPr>
-              <a:defRPr sz="1300" b="1">
-                <a:solidFill>
-                  <a:srgbClr val="D97706"/>
-                </a:solidFill>
-                <a:latin typeface="Calibri"/>
-              </a:defRPr>
-            </a:pPr>
-            <a:r>
-              <a:t>Critical Non-Causal Regulatory Governance Boundary (PRD §12.4):</a:t>
-            </a:r>
-          </a:p>
-          <a:p>
-            <a:pPr>
-              <a:spcBef>
-                <a:spcPts val="200"/>
-              </a:spcBef>
-              <a:defRPr sz="1200">
-                <a:solidFill>
-                  <a:srgbClr val="1E293B"/>
-                </a:solidFill>
-                <a:latin typeface="Calibri"/>
-              </a:defRPr>
-            </a:pPr>
-            <a:r>
-              <a:t>SHAP and LIME values quantify statistical model attribution within the fitted learner—they describe which mathematical patterns produced the prediction. They DO NOT establish real-world causality, structural guarantees, or substitute for a licensed physical appraisal.</a:t>
+              <a:t>Finished basement space adds about $50/sq ft. Unfinished basement storage space adds almost nothing to valuation.</a:t>
             </a:r>
           </a:p>
         </p:txBody>
@@ -3822,7 +3752,7 @@
               </a:defRPr>
             </a:pPr>
             <a:r>
-              <a:t>PRODUCTION APPLICATION DEPLOYMENT</a:t>
+              <a:t>5. EXPLAINABILITY (LOCAL SHAP)</a:t>
             </a:r>
           </a:p>
         </p:txBody>
@@ -3858,7 +3788,7 @@
               </a:defRPr>
             </a:pPr>
             <a:r>
-              <a:t>The Interactive Valuation Platform (Shiny UI)</a:t>
+              <a:t>Explaining Any Single House Like an Itemized Receipt</a:t>
             </a:r>
           </a:p>
         </p:txBody>
@@ -3894,7 +3824,7 @@
               </a:defRPr>
             </a:pPr>
             <a:r>
-              <a:t>A responsive, 5-tab web application enabling intuitive exploration and scenario testing</a:t>
+              <a:t>How SHAP breaks down a $378,000 luxury home compared to the $180,800 Ames average</a:t>
             </a:r>
           </a:p>
         </p:txBody>
@@ -3907,7 +3837,7 @@
         </p:nvSpPr>
         <p:spPr>
           <a:xfrm>
-            <a:off x="731520" y="6400800"/>
+            <a:off x="731520" y="6446520"/>
             <a:ext cx="10698480" cy="274320"/>
           </a:xfrm>
           <a:prstGeom prst="rect">
@@ -3930,7 +3860,7 @@
               </a:defRPr>
             </a:pPr>
             <a:r>
-              <a:t>Explainable House Price Prediction System in R (mlr3 + XAI) • Slide 11 of 12</a:t>
+              <a:t>Explainable House Price Prediction (Ames, Iowa Case Study) • Slide 11 of 13</a:t>
             </a:r>
           </a:p>
         </p:txBody>
@@ -3944,7 +3874,7 @@
         <p:spPr>
           <a:xfrm>
             <a:off x="731520" y="1737360"/>
-            <a:ext cx="3383280" cy="3108960"/>
+            <a:ext cx="5303520" cy="3291840"/>
           </a:xfrm>
           <a:prstGeom prst="roundRect">
             <a:avLst/>
@@ -3980,127 +3910,40 @@
           </a:p>
         </p:txBody>
       </p:sp>
-      <p:sp>
-        <p:nvSpPr>
-          <p:cNvPr id="7" name="Rectangle 6"/>
+      <p:pic>
+        <p:nvPicPr>
+          <p:cNvPr id="7" name="Picture 6" descr="xai_02_shap_luxury_waterfall.png"/>
+          <p:cNvPicPr>
+            <a:picLocks noChangeAspect="1"/>
+          </p:cNvPicPr>
+          <p:nvPr/>
+        </p:nvPicPr>
+        <p:blipFill>
+          <a:blip r:embed="rId2"/>
+          <a:stretch>
+            <a:fillRect/>
+          </a:stretch>
+        </p:blipFill>
+        <p:spPr>
+          <a:xfrm>
+            <a:off x="822960" y="1828800"/>
+            <a:ext cx="5120640" cy="3063240"/>
+          </a:xfrm>
+          <a:prstGeom prst="rect">
+            <a:avLst/>
+          </a:prstGeom>
+        </p:spPr>
+      </p:pic>
+      <p:sp>
+        <p:nvSpPr>
+          <p:cNvPr id="8" name="Rounded Rectangle 7"/>
           <p:cNvSpPr/>
           <p:nvPr/>
         </p:nvSpPr>
         <p:spPr>
           <a:xfrm>
-            <a:off x="731520" y="1737360"/>
-            <a:ext cx="3383280" cy="91440"/>
-          </a:xfrm>
-          <a:prstGeom prst="rect">
-            <a:avLst/>
-          </a:prstGeom>
-          <a:solidFill>
-            <a:srgbClr val="1E3A8A"/>
-          </a:solidFill>
-          <a:ln>
-            <a:noFill/>
-          </a:ln>
-        </p:spPr>
-        <p:style>
-          <a:lnRef idx="1">
-            <a:schemeClr val="accent1"/>
-          </a:lnRef>
-          <a:fillRef idx="3">
-            <a:schemeClr val="accent1"/>
-          </a:fillRef>
-          <a:effectRef idx="2">
-            <a:schemeClr val="accent1"/>
-          </a:effectRef>
-          <a:fontRef idx="minor">
-            <a:schemeClr val="lt1"/>
-          </a:fontRef>
-        </p:style>
-        <p:txBody>
-          <a:bodyPr rtlCol="0" anchor="ctr"/>
-          <a:lstStyle/>
-          <a:p>
-            <a:pPr algn="ctr"/>
-          </a:p>
-        </p:txBody>
-      </p:sp>
-      <p:sp>
-        <p:nvSpPr>
-          <p:cNvPr id="8" name="TextBox 7"/>
-          <p:cNvSpPr txBox="1"/>
-          <p:nvPr/>
-        </p:nvSpPr>
-        <p:spPr>
-          <a:xfrm>
-            <a:off x="914400" y="1965960"/>
-            <a:ext cx="3017520" cy="2743200"/>
-          </a:xfrm>
-          <a:prstGeom prst="rect">
-            <a:avLst/>
-          </a:prstGeom>
-          <a:noFill/>
-        </p:spPr>
-        <p:txBody>
-          <a:bodyPr wrap="square" lIns="0" tIns="0" rIns="0" bIns="0">
-            <a:spAutoFit/>
-          </a:bodyPr>
-          <a:lstStyle/>
-          <a:p>
-            <a:pPr>
-              <a:defRPr sz="1600" b="1">
-                <a:solidFill>
-                  <a:srgbClr val="1E3A8A"/>
-                </a:solidFill>
-                <a:latin typeface="Calibri"/>
-              </a:defRPr>
-            </a:pPr>
-            <a:r>
-              <a:t>1-Click Archetype Presets</a:t>
-            </a:r>
-          </a:p>
-          <a:p>
-            <a:pPr>
-              <a:spcBef>
-                <a:spcPts val="800"/>
-              </a:spcBef>
-              <a:defRPr sz="1300">
-                <a:solidFill>
-                  <a:srgbClr val="1E293B"/>
-                </a:solidFill>
-                <a:latin typeface="Calibri"/>
-              </a:defRPr>
-            </a:pPr>
-            <a:r>
-              <a:t>Enables immediate valuation testing across standard market profiles:</a:t>
-            </a:r>
-            <a:br/>
-            <a:r>
-              <a:t>• Starter Home: $129,746 (1,050 sq ft, 1 bath)</a:t>
-            </a:r>
-            <a:br/>
-            <a:r>
-              <a:t>• Median Family Home: $179,418 (1,600 sq ft, 2.5 baths)</a:t>
-            </a:r>
-            <a:br/>
-            <a:r>
-              <a:t>• Luxury Estate: $328,090 (2,800 sq ft, 3.5 baths)</a:t>
-            </a:r>
-            <a:br/>
-            <a:r>
-              <a:t>Guarantees instant sanity checks without tedious form entry.</a:t>
-            </a:r>
-          </a:p>
-        </p:txBody>
-      </p:sp>
-      <p:sp>
-        <p:nvSpPr>
-          <p:cNvPr id="9" name="Rounded Rectangle 8"/>
-          <p:cNvSpPr/>
-          <p:nvPr/>
-        </p:nvSpPr>
-        <p:spPr>
-          <a:xfrm>
-            <a:off x="4343400" y="1737360"/>
-            <a:ext cx="3383280" cy="3108960"/>
+            <a:off x="6309360" y="1737360"/>
+            <a:ext cx="5120640" cy="3291840"/>
           </a:xfrm>
           <a:prstGeom prst="roundRect">
             <a:avLst/>
@@ -4138,23 +3981,243 @@
       </p:sp>
       <p:sp>
         <p:nvSpPr>
-          <p:cNvPr id="10" name="Rectangle 9"/>
+          <p:cNvPr id="9" name="TextBox 8"/>
+          <p:cNvSpPr txBox="1"/>
+          <p:nvPr/>
+        </p:nvSpPr>
+        <p:spPr>
+          <a:xfrm>
+            <a:off x="6583680" y="1920240"/>
+            <a:ext cx="4663440" cy="2926080"/>
+          </a:xfrm>
+          <a:prstGeom prst="rect">
+            <a:avLst/>
+          </a:prstGeom>
+          <a:noFill/>
+        </p:spPr>
+        <p:txBody>
+          <a:bodyPr wrap="square" lIns="0" tIns="0" rIns="0" bIns="0">
+            <a:spAutoFit/>
+          </a:bodyPr>
+          <a:lstStyle/>
+          <a:p>
+            <a:pPr>
+              <a:defRPr sz="1600" b="1">
+                <a:solidFill>
+                  <a:srgbClr val="1E3A8A"/>
+                </a:solidFill>
+                <a:latin typeface="Calibri"/>
+              </a:defRPr>
+            </a:pPr>
+            <a:r>
+              <a:t>How SHAP Explains This $378k House:</a:t>
+            </a:r>
+          </a:p>
+          <a:p>
+            <a:pPr>
+              <a:spcBef>
+                <a:spcPts val="300"/>
+              </a:spcBef>
+              <a:defRPr sz="1200">
+                <a:latin typeface="Calibri"/>
+              </a:defRPr>
+            </a:pPr>
+            <a:r>
+              <a:rPr b="1">
+                <a:solidFill>
+                  <a:srgbClr val="1E3A8A"/>
+                </a:solidFill>
+              </a:rPr>
+              <a:t>Starting Baseline: </a:t>
+            </a:r>
+            <a:r>
+              <a:rPr>
+                <a:solidFill>
+                  <a:srgbClr val="1E293B"/>
+                </a:solidFill>
+              </a:rPr>
+              <a:t>Average Ames Home = $180,800</a:t>
+            </a:r>
+          </a:p>
+          <a:p>
+            <a:pPr>
+              <a:spcBef>
+                <a:spcPts val="300"/>
+              </a:spcBef>
+              <a:defRPr sz="1200">
+                <a:latin typeface="Calibri"/>
+              </a:defRPr>
+            </a:pPr>
+            <a:r>
+              <a:rPr b="1">
+                <a:solidFill>
+                  <a:srgbClr val="059669"/>
+                </a:solidFill>
+              </a:rPr>
+              <a:t>+ Huge Living Space (4,200 sq ft): </a:t>
+            </a:r>
+            <a:r>
+              <a:rPr>
+                <a:solidFill>
+                  <a:srgbClr val="1E293B"/>
+                </a:solidFill>
+              </a:rPr>
+              <a:t>+$82,400 enhancement</a:t>
+            </a:r>
+          </a:p>
+          <a:p>
+            <a:pPr>
+              <a:spcBef>
+                <a:spcPts val="300"/>
+              </a:spcBef>
+              <a:defRPr sz="1200">
+                <a:latin typeface="Calibri"/>
+              </a:defRPr>
+            </a:pPr>
+            <a:r>
+              <a:rPr b="1">
+                <a:solidFill>
+                  <a:srgbClr val="059669"/>
+                </a:solidFill>
+              </a:rPr>
+              <a:t>+ Top Quality Materials (Grade 9/10): </a:t>
+            </a:r>
+            <a:r>
+              <a:rPr>
+                <a:solidFill>
+                  <a:srgbClr val="1E293B"/>
+                </a:solidFill>
+              </a:rPr>
+              <a:t>+$54,200 enhancement</a:t>
+            </a:r>
+          </a:p>
+          <a:p>
+            <a:pPr>
+              <a:spcBef>
+                <a:spcPts val="300"/>
+              </a:spcBef>
+              <a:defRPr sz="1200">
+                <a:latin typeface="Calibri"/>
+              </a:defRPr>
+            </a:pPr>
+            <a:r>
+              <a:rPr b="1">
+                <a:solidFill>
+                  <a:srgbClr val="059669"/>
+                </a:solidFill>
+              </a:rPr>
+              <a:t>+ Great Neighborhood (Northridge Hts): </a:t>
+            </a:r>
+            <a:r>
+              <a:rPr>
+                <a:solidFill>
+                  <a:srgbClr val="1E293B"/>
+                </a:solidFill>
+              </a:rPr>
+              <a:t>+$22,100 enhancement</a:t>
+            </a:r>
+          </a:p>
+          <a:p>
+            <a:pPr>
+              <a:spcBef>
+                <a:spcPts val="300"/>
+              </a:spcBef>
+              <a:defRPr sz="1200">
+                <a:latin typeface="Calibri"/>
+              </a:defRPr>
+            </a:pPr>
+            <a:r>
+              <a:rPr b="1">
+                <a:solidFill>
+                  <a:srgbClr val="DC2626"/>
+                </a:solidFill>
+              </a:rPr>
+              <a:t>- Older Construction Era: </a:t>
+            </a:r>
+            <a:r>
+              <a:rPr>
+                <a:solidFill>
+                  <a:srgbClr val="1E293B"/>
+                </a:solidFill>
+              </a:rPr>
+              <a:t>-$18,400 age discount</a:t>
+            </a:r>
+          </a:p>
+          <a:p>
+            <a:pPr>
+              <a:spcBef>
+                <a:spcPts val="300"/>
+              </a:spcBef>
+              <a:defRPr sz="1200">
+                <a:latin typeface="Calibri"/>
+              </a:defRPr>
+            </a:pPr>
+            <a:r>
+              <a:rPr b="1">
+                <a:solidFill>
+                  <a:srgbClr val="DC2626"/>
+                </a:solidFill>
+              </a:rPr>
+              <a:t>- Partial Unfinished Basement: </a:t>
+            </a:r>
+            <a:r>
+              <a:rPr>
+                <a:solidFill>
+                  <a:srgbClr val="1E293B"/>
+                </a:solidFill>
+              </a:rPr>
+              <a:t>-$11,300 layout discount</a:t>
+            </a:r>
+          </a:p>
+          <a:p>
+            <a:pPr>
+              <a:spcBef>
+                <a:spcPts val="300"/>
+              </a:spcBef>
+              <a:defRPr sz="1200">
+                <a:latin typeface="Calibri"/>
+              </a:defRPr>
+            </a:pPr>
+            <a:r>
+              <a:rPr b="1">
+                <a:solidFill>
+                  <a:srgbClr val="1E3A8A"/>
+                </a:solidFill>
+              </a:rPr>
+              <a:t>= Final Model Valuation: </a:t>
+            </a:r>
+            <a:r>
+              <a:rPr>
+                <a:solidFill>
+                  <a:srgbClr val="1E293B"/>
+                </a:solidFill>
+              </a:rPr>
+              <a:t>$352,858 (Closed at $378,000; 6.6% error)</a:t>
+            </a:r>
+          </a:p>
+        </p:txBody>
+      </p:sp>
+      <p:sp>
+        <p:nvSpPr>
+          <p:cNvPr id="10" name="Rounded Rectangle 9"/>
           <p:cNvSpPr/>
           <p:nvPr/>
         </p:nvSpPr>
         <p:spPr>
           <a:xfrm>
-            <a:off x="4343400" y="1737360"/>
-            <a:ext cx="3383280" cy="91440"/>
-          </a:xfrm>
-          <a:prstGeom prst="rect">
+            <a:off x="731520" y="5166360"/>
+            <a:ext cx="10698480" cy="960120"/>
+          </a:xfrm>
+          <a:prstGeom prst="roundRect">
             <a:avLst/>
           </a:prstGeom>
           <a:solidFill>
-            <a:srgbClr val="2563EB"/>
+            <a:srgbClr val="FEF3C7"/>
           </a:solidFill>
-          <a:ln>
-            <a:noFill/>
+          <a:ln w="12700">
+            <a:solidFill>
+              <a:srgbClr val="D97706"/>
+            </a:solidFill>
           </a:ln>
         </p:spPr>
         <p:style>
@@ -4187,8 +4250,8 @@
         </p:nvSpPr>
         <p:spPr>
           <a:xfrm>
-            <a:off x="4526280" y="1965960"/>
-            <a:ext cx="3017520" cy="2743200"/>
+            <a:off x="1005840" y="5230368"/>
+            <a:ext cx="10149840" cy="777240"/>
           </a:xfrm>
           <a:prstGeom prst="rect">
             <a:avLst/>
@@ -4202,280 +4265,15 @@
           <a:lstStyle/>
           <a:p>
             <a:pPr>
-              <a:defRPr sz="1600" b="1">
-                <a:solidFill>
-                  <a:srgbClr val="2563EB"/>
-                </a:solidFill>
-                <a:latin typeface="Calibri"/>
-              </a:defRPr>
-            </a:pPr>
-            <a:r>
-              <a:t>Real-Time Sensitivity Trajectory</a:t>
-            </a:r>
-          </a:p>
-          <a:p>
-            <a:pPr>
-              <a:spcBef>
-                <a:spcPts val="800"/>
-              </a:spcBef>
-              <a:defRPr sz="1300">
-                <a:solidFill>
-                  <a:srgbClr val="1E293B"/>
-                </a:solidFill>
-                <a:latin typeface="Calibri"/>
-              </a:defRPr>
-            </a:pPr>
-            <a:r>
-              <a:t>Interactive What-If living area curve:</a:t>
-            </a:r>
-            <a:br/>
-            <a:r>
-              <a:t>• Simulates property across 800 to 3,600 sq ft in real time.</a:t>
-            </a:r>
-            <a:br/>
-            <a:r>
-              <a:t>• Plots predicted trajectory with marker on current house.</a:t>
-            </a:r>
-            <a:br/>
-            <a:r>
-              <a:t>• Lets homeowners see exactly how an expansion or finished addition impacts value.</a:t>
-            </a:r>
-          </a:p>
-        </p:txBody>
-      </p:sp>
-      <p:sp>
-        <p:nvSpPr>
-          <p:cNvPr id="12" name="Rounded Rectangle 11"/>
-          <p:cNvSpPr/>
-          <p:nvPr/>
-        </p:nvSpPr>
-        <p:spPr>
-          <a:xfrm>
-            <a:off x="7955279" y="1737360"/>
-            <a:ext cx="3383280" cy="3108960"/>
-          </a:xfrm>
-          <a:prstGeom prst="roundRect">
-            <a:avLst/>
-          </a:prstGeom>
-          <a:solidFill>
-            <a:srgbClr val="FFFFFF"/>
-          </a:solidFill>
-          <a:ln w="12700">
-            <a:solidFill>
-              <a:srgbClr val="E2E8F0"/>
-            </a:solidFill>
-          </a:ln>
-        </p:spPr>
-        <p:style>
-          <a:lnRef idx="1">
-            <a:schemeClr val="accent1"/>
-          </a:lnRef>
-          <a:fillRef idx="3">
-            <a:schemeClr val="accent1"/>
-          </a:fillRef>
-          <a:effectRef idx="2">
-            <a:schemeClr val="accent1"/>
-          </a:effectRef>
-          <a:fontRef idx="minor">
-            <a:schemeClr val="lt1"/>
-          </a:fontRef>
-        </p:style>
-        <p:txBody>
-          <a:bodyPr rtlCol="0" anchor="ctr"/>
-          <a:lstStyle/>
-          <a:p>
-            <a:pPr algn="ctr"/>
-          </a:p>
-        </p:txBody>
-      </p:sp>
-      <p:sp>
-        <p:nvSpPr>
-          <p:cNvPr id="13" name="Rectangle 12"/>
-          <p:cNvSpPr/>
-          <p:nvPr/>
-        </p:nvSpPr>
-        <p:spPr>
-          <a:xfrm>
-            <a:off x="7955279" y="1737360"/>
-            <a:ext cx="3383280" cy="91440"/>
-          </a:xfrm>
-          <a:prstGeom prst="rect">
-            <a:avLst/>
-          </a:prstGeom>
-          <a:solidFill>
-            <a:srgbClr val="059669"/>
-          </a:solidFill>
-          <a:ln>
-            <a:noFill/>
-          </a:ln>
-        </p:spPr>
-        <p:style>
-          <a:lnRef idx="1">
-            <a:schemeClr val="accent1"/>
-          </a:lnRef>
-          <a:fillRef idx="3">
-            <a:schemeClr val="accent1"/>
-          </a:fillRef>
-          <a:effectRef idx="2">
-            <a:schemeClr val="accent1"/>
-          </a:effectRef>
-          <a:fontRef idx="minor">
-            <a:schemeClr val="lt1"/>
-          </a:fontRef>
-        </p:style>
-        <p:txBody>
-          <a:bodyPr rtlCol="0" anchor="ctr"/>
-          <a:lstStyle/>
-          <a:p>
-            <a:pPr algn="ctr"/>
-          </a:p>
-        </p:txBody>
-      </p:sp>
-      <p:sp>
-        <p:nvSpPr>
-          <p:cNvPr id="14" name="TextBox 13"/>
-          <p:cNvSpPr txBox="1"/>
-          <p:nvPr/>
-        </p:nvSpPr>
-        <p:spPr>
-          <a:xfrm>
-            <a:off x="8138159" y="1965960"/>
-            <a:ext cx="3017520" cy="2743200"/>
-          </a:xfrm>
-          <a:prstGeom prst="rect">
-            <a:avLst/>
-          </a:prstGeom>
-          <a:noFill/>
-        </p:spPr>
-        <p:txBody>
-          <a:bodyPr wrap="square" lIns="0" tIns="0" rIns="0" bIns="0">
-            <a:spAutoFit/>
-          </a:bodyPr>
-          <a:lstStyle/>
-          <a:p>
-            <a:pPr>
-              <a:defRPr sz="1600" b="1">
-                <a:solidFill>
-                  <a:srgbClr val="059669"/>
-                </a:solidFill>
-                <a:latin typeface="Calibri"/>
-              </a:defRPr>
-            </a:pPr>
-            <a:r>
-              <a:t>Live Marginal Value Badges</a:t>
-            </a:r>
-          </a:p>
-          <a:p>
-            <a:pPr>
-              <a:spcBef>
-                <a:spcPts val="800"/>
-              </a:spcBef>
-              <a:defRPr sz="1300">
-                <a:solidFill>
-                  <a:srgbClr val="1E293B"/>
-                </a:solidFill>
-                <a:latin typeface="Calibri"/>
-              </a:defRPr>
-            </a:pPr>
-            <a:r>
-              <a:t>Dynamic marginal dollar impact calculated live:</a:t>
-            </a:r>
-            <a:br/>
-            <a:r>
-              <a:t>• +200 sq ft Living Space: +$16,000 estimated lift</a:t>
-            </a:r>
-            <a:br/>
-            <a:r>
-              <a:t>• +1 Full Bathroom: +$9,500 estimated lift</a:t>
-            </a:r>
-            <a:br/>
-            <a:r>
-              <a:t>• Complete Modern Remodel: +$12,000 estimated lift</a:t>
-            </a:r>
-            <a:br/>
-            <a:r>
-              <a:t>Every adjustment evaluated on-the-fly by the pipeline.</a:t>
-            </a:r>
-          </a:p>
-        </p:txBody>
-      </p:sp>
-      <p:sp>
-        <p:nvSpPr>
-          <p:cNvPr id="15" name="Rounded Rectangle 14"/>
-          <p:cNvSpPr/>
-          <p:nvPr/>
-        </p:nvSpPr>
-        <p:spPr>
-          <a:xfrm>
-            <a:off x="731520" y="5029200"/>
-            <a:ext cx="10698480" cy="1097280"/>
-          </a:xfrm>
-          <a:prstGeom prst="roundRect">
-            <a:avLst/>
-          </a:prstGeom>
-          <a:solidFill>
-            <a:srgbClr val="FFFFFF"/>
-          </a:solidFill>
-          <a:ln w="12700">
-            <a:solidFill>
-              <a:srgbClr val="E2E8F0"/>
-            </a:solidFill>
-          </a:ln>
-        </p:spPr>
-        <p:style>
-          <a:lnRef idx="1">
-            <a:schemeClr val="accent1"/>
-          </a:lnRef>
-          <a:fillRef idx="3">
-            <a:schemeClr val="accent1"/>
-          </a:fillRef>
-          <a:effectRef idx="2">
-            <a:schemeClr val="accent1"/>
-          </a:effectRef>
-          <a:fontRef idx="minor">
-            <a:schemeClr val="lt1"/>
-          </a:fontRef>
-        </p:style>
-        <p:txBody>
-          <a:bodyPr rtlCol="0" anchor="ctr"/>
-          <a:lstStyle/>
-          <a:p>
-            <a:pPr algn="ctr"/>
-          </a:p>
-        </p:txBody>
-      </p:sp>
-      <p:sp>
-        <p:nvSpPr>
-          <p:cNvPr id="16" name="TextBox 15"/>
-          <p:cNvSpPr txBox="1"/>
-          <p:nvPr/>
-        </p:nvSpPr>
-        <p:spPr>
-          <a:xfrm>
-            <a:off x="1005840" y="5120640"/>
-            <a:ext cx="10149840" cy="914400"/>
-          </a:xfrm>
-          <a:prstGeom prst="rect">
-            <a:avLst/>
-          </a:prstGeom>
-          <a:noFill/>
-        </p:spPr>
-        <p:txBody>
-          <a:bodyPr wrap="square" lIns="0" tIns="0" rIns="0" bIns="0">
-            <a:spAutoFit/>
-          </a:bodyPr>
-          <a:lstStyle/>
-          <a:p>
-            <a:pPr>
-              <a:defRPr sz="1400" b="1">
-                <a:solidFill>
-                  <a:srgbClr val="1E3A8A"/>
-                </a:solidFill>
-                <a:latin typeface="Calibri"/>
-              </a:defRPr>
-            </a:pPr>
-            <a:r>
-              <a:t>Transparent Assumption Auditing (PRD §13.3):</a:t>
+              <a:defRPr sz="1300" b="1">
+                <a:solidFill>
+                  <a:srgbClr val="D97706"/>
+                </a:solidFill>
+                <a:latin typeface="Calibri"/>
+              </a:defRPr>
+            </a:pPr>
+            <a:r>
+              <a:t>A Common-Sense Legal Rule to Remember (Non-Causal Warning):</a:t>
             </a:r>
           </a:p>
           <a:p>
@@ -4491,7 +4289,7 @@
               </a:defRPr>
             </a:pPr>
             <a:r>
-              <a:t>Per PRD compliance, all 60+ unexposed structural parameters (utilities, foundation type, electrical panels, heating) are explicitly documented and defaulted to audited dataset medians and modal archetypes to eliminate hidden assumptions.</a:t>
+              <a:t>SHAP tells us how the model arrived at its prediction. It DOES NOT guarantee that if a homeowner spends $10,000 adding a bathroom, their house will automatically sell for $10,000 more. Correlation is not a physical warranty.</a:t>
             </a:r>
           </a:p>
         </p:txBody>
@@ -4553,7 +4351,7 @@
               </a:defRPr>
             </a:pPr>
             <a:r>
-              <a:t>CONCLUSIONS &amp; ENTERPRISE LESSONS LEARNED</a:t>
+              <a:t>6. PRACTICAL DEPLOYMENT</a:t>
             </a:r>
           </a:p>
         </p:txBody>
@@ -4589,7 +4387,7 @@
               </a:defRPr>
             </a:pPr>
             <a:r>
-              <a:t>Key Takeaways: Building Accountable Machine Learning</a:t>
+              <a:t>The Interactive Valuation Tool: A Live Web App</a:t>
             </a:r>
           </a:p>
         </p:txBody>
@@ -4625,7 +4423,7 @@
               </a:defRPr>
             </a:pPr>
             <a:r>
-              <a:t>Core principles learned from designing, tuning, and explaining production valuation models</a:t>
+              <a:t>We deployed our model into an easy-to-use Shiny web app with 1-click buttons and sensitivity curves</a:t>
             </a:r>
           </a:p>
         </p:txBody>
@@ -4638,7 +4436,7 @@
         </p:nvSpPr>
         <p:spPr>
           <a:xfrm>
-            <a:off x="731520" y="6400800"/>
+            <a:off x="731520" y="6446520"/>
             <a:ext cx="10698480" cy="274320"/>
           </a:xfrm>
           <a:prstGeom prst="rect">
@@ -4661,7 +4459,7 @@
               </a:defRPr>
             </a:pPr>
             <a:r>
-              <a:t>Explainable House Price Prediction System in R (mlr3 + XAI) • Slide 12 of 12</a:t>
+              <a:t>Explainable House Price Prediction (Ames, Iowa Case Study) • Slide 12 of 13</a:t>
             </a:r>
           </a:p>
         </p:txBody>
@@ -4675,7 +4473,7 @@
         <p:spPr>
           <a:xfrm>
             <a:off x="731520" y="1737360"/>
-            <a:ext cx="5120640" cy="1965960"/>
+            <a:ext cx="3383280" cy="3108960"/>
           </a:xfrm>
           <a:prstGeom prst="roundRect">
             <a:avLst/>
@@ -4720,7 +4518,7 @@
         <p:spPr>
           <a:xfrm>
             <a:off x="731520" y="1737360"/>
-            <a:ext cx="91440" cy="1965960"/>
+            <a:ext cx="3383280" cy="91440"/>
           </a:xfrm>
           <a:prstGeom prst="rect">
             <a:avLst/>
@@ -4762,8 +4560,8 @@
         </p:nvSpPr>
         <p:spPr>
           <a:xfrm>
-            <a:off x="960120" y="1874519"/>
-            <a:ext cx="4663440" cy="1691640"/>
+            <a:off x="914400" y="1965960"/>
+            <a:ext cx="3017520" cy="2743200"/>
           </a:xfrm>
           <a:prstGeom prst="rect">
             <a:avLst/>
@@ -4785,13 +4583,13 @@
               </a:defRPr>
             </a:pPr>
             <a:r>
-              <a:t>1. Preprocessing Belongs in the Model</a:t>
+              <a:t>1-Click Preset Buttons</a:t>
             </a:r>
           </a:p>
           <a:p>
             <a:pPr>
               <a:spcBef>
-                <a:spcPts val="600"/>
+                <a:spcPts val="800"/>
               </a:spcBef>
               <a:defRPr sz="1300">
                 <a:solidFill>
@@ -4801,7 +4599,34 @@
               </a:defRPr>
             </a:pPr>
             <a:r>
-              <a:t>Writing standalone data-cleaning scripts almost inevitably introduces silent validation leakage. Composing preprocessing inside an immutable DAG guarantees that test and production instances are transformed strictly as unseen data.</a:t>
+              <a:t>No need to type 80 numbers by hand:</a:t>
+            </a:r>
+            <a:br/>
+            <a:br/>
+            <a:r>
+              <a:t>• Starter Home: $129,746</a:t>
+            </a:r>
+            <a:br/>
+            <a:r>
+              <a:t>  (1,050 sq ft, 1 bath, average quality)</a:t>
+            </a:r>
+            <a:br/>
+            <a:br/>
+            <a:r>
+              <a:t>• Median Family Home: $179,418</a:t>
+            </a:r>
+            <a:br/>
+            <a:r>
+              <a:t>  (1,600 sq ft, 2.5 baths, good quality)</a:t>
+            </a:r>
+            <a:br/>
+            <a:br/>
+            <a:r>
+              <a:t>• Luxury Estate: $328,090</a:t>
+            </a:r>
+            <a:br/>
+            <a:r>
+              <a:t>  (2,800 sq ft, 3.5 baths, excellent quality)</a:t>
             </a:r>
           </a:p>
         </p:txBody>
@@ -4814,8 +4639,8 @@
         </p:nvSpPr>
         <p:spPr>
           <a:xfrm>
-            <a:off x="6172200" y="1737360"/>
-            <a:ext cx="5120640" cy="1965960"/>
+            <a:off x="4343400" y="1737360"/>
+            <a:ext cx="3383280" cy="3108960"/>
           </a:xfrm>
           <a:prstGeom prst="roundRect">
             <a:avLst/>
@@ -4859,8 +4684,8 @@
         </p:nvSpPr>
         <p:spPr>
           <a:xfrm>
-            <a:off x="6172200" y="1737360"/>
-            <a:ext cx="91440" cy="1965960"/>
+            <a:off x="4343400" y="1737360"/>
+            <a:ext cx="3383280" cy="91440"/>
           </a:xfrm>
           <a:prstGeom prst="rect">
             <a:avLst/>
@@ -4902,8 +4727,8 @@
         </p:nvSpPr>
         <p:spPr>
           <a:xfrm>
-            <a:off x="6400800" y="1874519"/>
-            <a:ext cx="4663440" cy="1691640"/>
+            <a:off x="4526280" y="1965960"/>
+            <a:ext cx="3017520" cy="2743200"/>
           </a:xfrm>
           <a:prstGeom prst="rect">
             <a:avLst/>
@@ -4925,13 +4750,13 @@
               </a:defRPr>
             </a:pPr>
             <a:r>
-              <a:t>2. Domain Interactions Trump Hyperparameter Tweaks</a:t>
+              <a:t>Live 'What-If' Curve</a:t>
             </a:r>
           </a:p>
           <a:p>
             <a:pPr>
               <a:spcBef>
-                <a:spcPts val="600"/>
+                <a:spcPts val="800"/>
               </a:spcBef>
               <a:defRPr sz="1300">
                 <a:solidFill>
@@ -4941,7 +4766,22 @@
               </a:defRPr>
             </a:pPr>
             <a:r>
-              <a:t>Engineering the Quality × Living Area interaction yielded more predictive improvement than weeks of algorithmic hyperparameter searching. Model tuning refines performance; domain insights drive it.</a:t>
+              <a:t>Interactive Living Area Trajectory:</a:t>
+            </a:r>
+            <a:br/>
+            <a:br/>
+            <a:r>
+              <a:t>• Shows a smooth curve from 800 to 3,600 sq ft.</a:t>
+            </a:r>
+            <a:br/>
+            <a:br/>
+            <a:r>
+              <a:t>• Marks a red diamond on the user's current house.</a:t>
+            </a:r>
+            <a:br/>
+            <a:br/>
+            <a:r>
+              <a:t>• Lets homeowners instantly see: 'If I finish my 400 sq ft attic, how much does my property value jump?'</a:t>
             </a:r>
           </a:p>
         </p:txBody>
@@ -4954,8 +4794,8 @@
         </p:nvSpPr>
         <p:spPr>
           <a:xfrm>
-            <a:off x="731520" y="3886200"/>
-            <a:ext cx="5120640" cy="1965960"/>
+            <a:off x="7955279" y="1737360"/>
+            <a:ext cx="3383280" cy="3108960"/>
           </a:xfrm>
           <a:prstGeom prst="roundRect">
             <a:avLst/>
@@ -4999,8 +4839,8 @@
         </p:nvSpPr>
         <p:spPr>
           <a:xfrm>
-            <a:off x="731520" y="3886200"/>
-            <a:ext cx="91440" cy="1965960"/>
+            <a:off x="7955279" y="1737360"/>
+            <a:ext cx="3383280" cy="91440"/>
           </a:xfrm>
           <a:prstGeom prst="rect">
             <a:avLst/>
@@ -5042,8 +4882,8 @@
         </p:nvSpPr>
         <p:spPr>
           <a:xfrm>
-            <a:off x="960120" y="4023360"/>
-            <a:ext cx="4663440" cy="1691640"/>
+            <a:off x="8138159" y="1965960"/>
+            <a:ext cx="3017520" cy="2743200"/>
           </a:xfrm>
           <a:prstGeom prst="rect">
             <a:avLst/>
@@ -5065,13 +4905,13 @@
               </a:defRPr>
             </a:pPr>
             <a:r>
-              <a:t>3. Dual Explainability Builds Trust</a:t>
+              <a:t>Live Marginal Value Badges</a:t>
             </a:r>
           </a:p>
           <a:p>
             <a:pPr>
               <a:spcBef>
-                <a:spcPts val="600"/>
+                <a:spcPts val="800"/>
               </a:spcBef>
               <a:defRPr sz="1300">
                 <a:solidFill>
@@ -5081,7 +4921,27 @@
               </a:defRPr>
             </a:pPr>
             <a:r>
-              <a:t>Pairing global permutation rankings with local SHAP waterfalls transforms an opaque black box into an accountable appraisal partner that loan officers, regulators, and consumers can inspect.</a:t>
+              <a:t>Instant dollar answers to practical questions:</a:t>
+            </a:r>
+            <a:br/>
+            <a:br/>
+            <a:r>
+              <a:t>• +200 sq ft Living Space: +$16,000 lift</a:t>
+            </a:r>
+            <a:br/>
+            <a:br/>
+            <a:r>
+              <a:t>• +1 Full Bathroom: +$9,500 lift</a:t>
+            </a:r>
+            <a:br/>
+            <a:br/>
+            <a:r>
+              <a:t>• Complete Modern Remodel: +$12,000 lift</a:t>
+            </a:r>
+            <a:br/>
+            <a:br/>
+            <a:r>
+              <a:t>Evaluated live on-the-fly by the trained model.</a:t>
             </a:r>
           </a:p>
         </p:txBody>
@@ -5094,8 +4954,8 @@
         </p:nvSpPr>
         <p:spPr>
           <a:xfrm>
-            <a:off x="6172200" y="3886200"/>
-            <a:ext cx="5120640" cy="1965960"/>
+            <a:off x="731520" y="5029200"/>
+            <a:ext cx="10698480" cy="1097280"/>
           </a:xfrm>
           <a:prstGeom prst="roundRect">
             <a:avLst/>
@@ -5133,6 +4993,693 @@
       </p:sp>
       <p:sp>
         <p:nvSpPr>
+          <p:cNvPr id="16" name="TextBox 15"/>
+          <p:cNvSpPr txBox="1"/>
+          <p:nvPr/>
+        </p:nvSpPr>
+        <p:spPr>
+          <a:xfrm>
+            <a:off x="1005840" y="5120640"/>
+            <a:ext cx="10149840" cy="914400"/>
+          </a:xfrm>
+          <a:prstGeom prst="rect">
+            <a:avLst/>
+          </a:prstGeom>
+          <a:noFill/>
+        </p:spPr>
+        <p:txBody>
+          <a:bodyPr wrap="square" lIns="0" tIns="0" rIns="0" bIns="0">
+            <a:spAutoFit/>
+          </a:bodyPr>
+          <a:lstStyle/>
+          <a:p>
+            <a:pPr>
+              <a:defRPr sz="1400" b="1">
+                <a:solidFill>
+                  <a:srgbClr val="1E3A8A"/>
+                </a:solidFill>
+                <a:latin typeface="Calibri"/>
+              </a:defRPr>
+            </a:pPr>
+            <a:r>
+              <a:t>Complete Transparency for Unexposed Details:</a:t>
+            </a:r>
+          </a:p>
+          <a:p>
+            <a:pPr>
+              <a:spcBef>
+                <a:spcPts val="200"/>
+              </a:spcBef>
+              <a:defRPr sz="1200">
+                <a:solidFill>
+                  <a:srgbClr val="1E293B"/>
+                </a:solidFill>
+                <a:latin typeface="Calibri"/>
+              </a:defRPr>
+            </a:pPr>
+            <a:r>
+              <a:t>For details not shown on the simple screen (like electrical panel type or foundation materials), the app clearly lists its assumptions using standard Ames medians so there are zero hidden surprises.</a:t>
+            </a:r>
+          </a:p>
+        </p:txBody>
+      </p:sp>
+    </p:spTree>
+  </p:cSld>
+  <p:clrMapOvr>
+    <a:masterClrMapping/>
+  </p:clrMapOvr>
+</p:sld>
+</file>
+
+<file path=ppt/slides/slide13.xml><?xml version="1.0" encoding="utf-8"?>
+<p:sld xmlns:a="http://schemas.openxmlformats.org/drawingml/2006/main" xmlns:p="http://schemas.openxmlformats.org/presentationml/2006/main" xmlns:r="http://schemas.openxmlformats.org/officeDocument/2006/relationships">
+  <p:cSld>
+    <p:bg>
+      <p:bgPr>
+        <a:solidFill>
+          <a:srgbClr val="F8FAFC"/>
+        </a:solidFill>
+        <a:effectLst/>
+      </p:bgPr>
+    </p:bg>
+    <p:spTree>
+      <p:nvGrpSpPr>
+        <p:cNvPr id="1" name=""/>
+        <p:cNvGrpSpPr/>
+        <p:nvPr/>
+      </p:nvGrpSpPr>
+      <p:grpSpPr/>
+      <p:sp>
+        <p:nvSpPr>
+          <p:cNvPr id="2" name="TextBox 1"/>
+          <p:cNvSpPr txBox="1"/>
+          <p:nvPr/>
+        </p:nvSpPr>
+        <p:spPr>
+          <a:xfrm>
+            <a:off x="731520" y="365760"/>
+            <a:ext cx="10698480" cy="320040"/>
+          </a:xfrm>
+          <a:prstGeom prst="rect">
+            <a:avLst/>
+          </a:prstGeom>
+          <a:noFill/>
+        </p:spPr>
+        <p:txBody>
+          <a:bodyPr wrap="square" lIns="0" tIns="0" rIns="0" bIns="0">
+            <a:spAutoFit/>
+          </a:bodyPr>
+          <a:lstStyle/>
+          <a:p>
+            <a:pPr>
+              <a:defRPr sz="1100" b="1">
+                <a:solidFill>
+                  <a:srgbClr val="2563EB"/>
+                </a:solidFill>
+                <a:latin typeface="Calibri"/>
+              </a:defRPr>
+            </a:pPr>
+            <a:r>
+              <a:t>7. CONCLUSIONS &amp; WHAT WE LEARNED</a:t>
+            </a:r>
+          </a:p>
+        </p:txBody>
+      </p:sp>
+      <p:sp>
+        <p:nvSpPr>
+          <p:cNvPr id="3" name="TextBox 2"/>
+          <p:cNvSpPr txBox="1"/>
+          <p:nvPr/>
+        </p:nvSpPr>
+        <p:spPr>
+          <a:xfrm>
+            <a:off x="731520" y="658368"/>
+            <a:ext cx="10698480" cy="594360"/>
+          </a:xfrm>
+          <a:prstGeom prst="rect">
+            <a:avLst/>
+          </a:prstGeom>
+          <a:noFill/>
+        </p:spPr>
+        <p:txBody>
+          <a:bodyPr wrap="square" lIns="0" tIns="0" rIns="0" bIns="0">
+            <a:spAutoFit/>
+          </a:bodyPr>
+          <a:lstStyle/>
+          <a:p>
+            <a:pPr>
+              <a:defRPr sz="2600" b="1">
+                <a:solidFill>
+                  <a:srgbClr val="1E3A8A"/>
+                </a:solidFill>
+                <a:latin typeface="Calibri"/>
+              </a:defRPr>
+            </a:pPr>
+            <a:r>
+              <a:t>Key Takeaways: 4 Big Lessons from This Case Study</a:t>
+            </a:r>
+          </a:p>
+        </p:txBody>
+      </p:sp>
+      <p:sp>
+        <p:nvSpPr>
+          <p:cNvPr id="4" name="TextBox 3"/>
+          <p:cNvSpPr txBox="1"/>
+          <p:nvPr/>
+        </p:nvSpPr>
+        <p:spPr>
+          <a:xfrm>
+            <a:off x="731520" y="1234440"/>
+            <a:ext cx="10698480" cy="411480"/>
+          </a:xfrm>
+          <a:prstGeom prst="rect">
+            <a:avLst/>
+          </a:prstGeom>
+          <a:noFill/>
+        </p:spPr>
+        <p:txBody>
+          <a:bodyPr wrap="square" lIns="0" tIns="0" rIns="0" bIns="0">
+            <a:spAutoFit/>
+          </a:bodyPr>
+          <a:lstStyle/>
+          <a:p>
+            <a:pPr>
+              <a:defRPr sz="1300">
+                <a:solidFill>
+                  <a:srgbClr val="64748B"/>
+                </a:solidFill>
+                <a:latin typeface="Calibri"/>
+              </a:defRPr>
+            </a:pPr>
+            <a:r>
+              <a:t>Simple, practical lessons you can remember and explain with confidence</a:t>
+            </a:r>
+          </a:p>
+        </p:txBody>
+      </p:sp>
+      <p:sp>
+        <p:nvSpPr>
+          <p:cNvPr id="5" name="TextBox 4"/>
+          <p:cNvSpPr txBox="1"/>
+          <p:nvPr/>
+        </p:nvSpPr>
+        <p:spPr>
+          <a:xfrm>
+            <a:off x="731520" y="6446520"/>
+            <a:ext cx="10698480" cy="274320"/>
+          </a:xfrm>
+          <a:prstGeom prst="rect">
+            <a:avLst/>
+          </a:prstGeom>
+          <a:noFill/>
+        </p:spPr>
+        <p:txBody>
+          <a:bodyPr wrap="none" lIns="0" tIns="0" rIns="0" bIns="0">
+            <a:spAutoFit/>
+          </a:bodyPr>
+          <a:lstStyle/>
+          <a:p>
+            <a:pPr>
+              <a:defRPr sz="1000">
+                <a:solidFill>
+                  <a:srgbClr val="64748B"/>
+                </a:solidFill>
+                <a:latin typeface="Calibri"/>
+              </a:defRPr>
+            </a:pPr>
+            <a:r>
+              <a:t>Explainable House Price Prediction (Ames, Iowa Case Study) • Slide 13 of 13</a:t>
+            </a:r>
+          </a:p>
+        </p:txBody>
+      </p:sp>
+      <p:sp>
+        <p:nvSpPr>
+          <p:cNvPr id="6" name="Rounded Rectangle 5"/>
+          <p:cNvSpPr/>
+          <p:nvPr/>
+        </p:nvSpPr>
+        <p:spPr>
+          <a:xfrm>
+            <a:off x="731520" y="1737360"/>
+            <a:ext cx="5120640" cy="1965960"/>
+          </a:xfrm>
+          <a:prstGeom prst="roundRect">
+            <a:avLst/>
+          </a:prstGeom>
+          <a:solidFill>
+            <a:srgbClr val="FFFFFF"/>
+          </a:solidFill>
+          <a:ln w="12700">
+            <a:solidFill>
+              <a:srgbClr val="E2E8F0"/>
+            </a:solidFill>
+          </a:ln>
+        </p:spPr>
+        <p:style>
+          <a:lnRef idx="1">
+            <a:schemeClr val="accent1"/>
+          </a:lnRef>
+          <a:fillRef idx="3">
+            <a:schemeClr val="accent1"/>
+          </a:fillRef>
+          <a:effectRef idx="2">
+            <a:schemeClr val="accent1"/>
+          </a:effectRef>
+          <a:fontRef idx="minor">
+            <a:schemeClr val="lt1"/>
+          </a:fontRef>
+        </p:style>
+        <p:txBody>
+          <a:bodyPr rtlCol="0" anchor="ctr"/>
+          <a:lstStyle/>
+          <a:p>
+            <a:pPr algn="ctr"/>
+          </a:p>
+        </p:txBody>
+      </p:sp>
+      <p:sp>
+        <p:nvSpPr>
+          <p:cNvPr id="7" name="Rectangle 6"/>
+          <p:cNvSpPr/>
+          <p:nvPr/>
+        </p:nvSpPr>
+        <p:spPr>
+          <a:xfrm>
+            <a:off x="731520" y="1737360"/>
+            <a:ext cx="91440" cy="1965960"/>
+          </a:xfrm>
+          <a:prstGeom prst="rect">
+            <a:avLst/>
+          </a:prstGeom>
+          <a:solidFill>
+            <a:srgbClr val="1E3A8A"/>
+          </a:solidFill>
+          <a:ln>
+            <a:noFill/>
+          </a:ln>
+        </p:spPr>
+        <p:style>
+          <a:lnRef idx="1">
+            <a:schemeClr val="accent1"/>
+          </a:lnRef>
+          <a:fillRef idx="3">
+            <a:schemeClr val="accent1"/>
+          </a:fillRef>
+          <a:effectRef idx="2">
+            <a:schemeClr val="accent1"/>
+          </a:effectRef>
+          <a:fontRef idx="minor">
+            <a:schemeClr val="lt1"/>
+          </a:fontRef>
+        </p:style>
+        <p:txBody>
+          <a:bodyPr rtlCol="0" anchor="ctr"/>
+          <a:lstStyle/>
+          <a:p>
+            <a:pPr algn="ctr"/>
+          </a:p>
+        </p:txBody>
+      </p:sp>
+      <p:sp>
+        <p:nvSpPr>
+          <p:cNvPr id="8" name="TextBox 7"/>
+          <p:cNvSpPr txBox="1"/>
+          <p:nvPr/>
+        </p:nvSpPr>
+        <p:spPr>
+          <a:xfrm>
+            <a:off x="960120" y="1874519"/>
+            <a:ext cx="4663440" cy="1691640"/>
+          </a:xfrm>
+          <a:prstGeom prst="rect">
+            <a:avLst/>
+          </a:prstGeom>
+          <a:noFill/>
+        </p:spPr>
+        <p:txBody>
+          <a:bodyPr wrap="square" lIns="0" tIns="0" rIns="0" bIns="0">
+            <a:spAutoFit/>
+          </a:bodyPr>
+          <a:lstStyle/>
+          <a:p>
+            <a:pPr>
+              <a:defRPr sz="1600" b="1">
+                <a:solidFill>
+                  <a:srgbClr val="1E3A8A"/>
+                </a:solidFill>
+                <a:latin typeface="Calibri"/>
+              </a:defRPr>
+            </a:pPr>
+            <a:r>
+              <a:t>Lesson 1: Cleaning Inside the Model Stops Cheating</a:t>
+            </a:r>
+          </a:p>
+          <a:p>
+            <a:pPr>
+              <a:spcBef>
+                <a:spcPts val="600"/>
+              </a:spcBef>
+              <a:defRPr sz="1300">
+                <a:solidFill>
+                  <a:srgbClr val="1E293B"/>
+                </a:solidFill>
+                <a:latin typeface="Calibri"/>
+              </a:defRPr>
+            </a:pPr>
+            <a:r>
+              <a:t>Never clean data outside your cross-validation folds. Wrapping everything in a strict pipeline (mlr3pipelines) guarantees your test scores reflect true real-world performance.</a:t>
+            </a:r>
+          </a:p>
+        </p:txBody>
+      </p:sp>
+      <p:sp>
+        <p:nvSpPr>
+          <p:cNvPr id="9" name="Rounded Rectangle 8"/>
+          <p:cNvSpPr/>
+          <p:nvPr/>
+        </p:nvSpPr>
+        <p:spPr>
+          <a:xfrm>
+            <a:off x="6172200" y="1737360"/>
+            <a:ext cx="5120640" cy="1965960"/>
+          </a:xfrm>
+          <a:prstGeom prst="roundRect">
+            <a:avLst/>
+          </a:prstGeom>
+          <a:solidFill>
+            <a:srgbClr val="FFFFFF"/>
+          </a:solidFill>
+          <a:ln w="12700">
+            <a:solidFill>
+              <a:srgbClr val="E2E8F0"/>
+            </a:solidFill>
+          </a:ln>
+        </p:spPr>
+        <p:style>
+          <a:lnRef idx="1">
+            <a:schemeClr val="accent1"/>
+          </a:lnRef>
+          <a:fillRef idx="3">
+            <a:schemeClr val="accent1"/>
+          </a:fillRef>
+          <a:effectRef idx="2">
+            <a:schemeClr val="accent1"/>
+          </a:effectRef>
+          <a:fontRef idx="minor">
+            <a:schemeClr val="lt1"/>
+          </a:fontRef>
+        </p:style>
+        <p:txBody>
+          <a:bodyPr rtlCol="0" anchor="ctr"/>
+          <a:lstStyle/>
+          <a:p>
+            <a:pPr algn="ctr"/>
+          </a:p>
+        </p:txBody>
+      </p:sp>
+      <p:sp>
+        <p:nvSpPr>
+          <p:cNvPr id="10" name="Rectangle 9"/>
+          <p:cNvSpPr/>
+          <p:nvPr/>
+        </p:nvSpPr>
+        <p:spPr>
+          <a:xfrm>
+            <a:off x="6172200" y="1737360"/>
+            <a:ext cx="91440" cy="1965960"/>
+          </a:xfrm>
+          <a:prstGeom prst="rect">
+            <a:avLst/>
+          </a:prstGeom>
+          <a:solidFill>
+            <a:srgbClr val="2563EB"/>
+          </a:solidFill>
+          <a:ln>
+            <a:noFill/>
+          </a:ln>
+        </p:spPr>
+        <p:style>
+          <a:lnRef idx="1">
+            <a:schemeClr val="accent1"/>
+          </a:lnRef>
+          <a:fillRef idx="3">
+            <a:schemeClr val="accent1"/>
+          </a:fillRef>
+          <a:effectRef idx="2">
+            <a:schemeClr val="accent1"/>
+          </a:effectRef>
+          <a:fontRef idx="minor">
+            <a:schemeClr val="lt1"/>
+          </a:fontRef>
+        </p:style>
+        <p:txBody>
+          <a:bodyPr rtlCol="0" anchor="ctr"/>
+          <a:lstStyle/>
+          <a:p>
+            <a:pPr algn="ctr"/>
+          </a:p>
+        </p:txBody>
+      </p:sp>
+      <p:sp>
+        <p:nvSpPr>
+          <p:cNvPr id="11" name="TextBox 10"/>
+          <p:cNvSpPr txBox="1"/>
+          <p:nvPr/>
+        </p:nvSpPr>
+        <p:spPr>
+          <a:xfrm>
+            <a:off x="6400800" y="1874519"/>
+            <a:ext cx="4663440" cy="1691640"/>
+          </a:xfrm>
+          <a:prstGeom prst="rect">
+            <a:avLst/>
+          </a:prstGeom>
+          <a:noFill/>
+        </p:spPr>
+        <p:txBody>
+          <a:bodyPr wrap="square" lIns="0" tIns="0" rIns="0" bIns="0">
+            <a:spAutoFit/>
+          </a:bodyPr>
+          <a:lstStyle/>
+          <a:p>
+            <a:pPr>
+              <a:defRPr sz="1600" b="1">
+                <a:solidFill>
+                  <a:srgbClr val="2563EB"/>
+                </a:solidFill>
+                <a:latin typeface="Calibri"/>
+              </a:defRPr>
+            </a:pPr>
+            <a:r>
+              <a:t>Lesson 2: Smart Features Beat Complex Tuning</a:t>
+            </a:r>
+          </a:p>
+          <a:p>
+            <a:pPr>
+              <a:spcBef>
+                <a:spcPts val="600"/>
+              </a:spcBef>
+              <a:defRPr sz="1300">
+                <a:solidFill>
+                  <a:srgbClr val="1E293B"/>
+                </a:solidFill>
+                <a:latin typeface="Calibri"/>
+              </a:defRPr>
+            </a:pPr>
+            <a:r>
+              <a:t>Multiplying Quality x Size alone gave us more accuracy than weeks of hyperparameter tweaking. Knowing your domain matters more than raw compute.</a:t>
+            </a:r>
+          </a:p>
+        </p:txBody>
+      </p:sp>
+      <p:sp>
+        <p:nvSpPr>
+          <p:cNvPr id="12" name="Rounded Rectangle 11"/>
+          <p:cNvSpPr/>
+          <p:nvPr/>
+        </p:nvSpPr>
+        <p:spPr>
+          <a:xfrm>
+            <a:off x="731520" y="3886200"/>
+            <a:ext cx="5120640" cy="1965960"/>
+          </a:xfrm>
+          <a:prstGeom prst="roundRect">
+            <a:avLst/>
+          </a:prstGeom>
+          <a:solidFill>
+            <a:srgbClr val="FFFFFF"/>
+          </a:solidFill>
+          <a:ln w="12700">
+            <a:solidFill>
+              <a:srgbClr val="E2E8F0"/>
+            </a:solidFill>
+          </a:ln>
+        </p:spPr>
+        <p:style>
+          <a:lnRef idx="1">
+            <a:schemeClr val="accent1"/>
+          </a:lnRef>
+          <a:fillRef idx="3">
+            <a:schemeClr val="accent1"/>
+          </a:fillRef>
+          <a:effectRef idx="2">
+            <a:schemeClr val="accent1"/>
+          </a:effectRef>
+          <a:fontRef idx="minor">
+            <a:schemeClr val="lt1"/>
+          </a:fontRef>
+        </p:style>
+        <p:txBody>
+          <a:bodyPr rtlCol="0" anchor="ctr"/>
+          <a:lstStyle/>
+          <a:p>
+            <a:pPr algn="ctr"/>
+          </a:p>
+        </p:txBody>
+      </p:sp>
+      <p:sp>
+        <p:nvSpPr>
+          <p:cNvPr id="13" name="Rectangle 12"/>
+          <p:cNvSpPr/>
+          <p:nvPr/>
+        </p:nvSpPr>
+        <p:spPr>
+          <a:xfrm>
+            <a:off x="731520" y="3886200"/>
+            <a:ext cx="91440" cy="1965960"/>
+          </a:xfrm>
+          <a:prstGeom prst="rect">
+            <a:avLst/>
+          </a:prstGeom>
+          <a:solidFill>
+            <a:srgbClr val="059669"/>
+          </a:solidFill>
+          <a:ln>
+            <a:noFill/>
+          </a:ln>
+        </p:spPr>
+        <p:style>
+          <a:lnRef idx="1">
+            <a:schemeClr val="accent1"/>
+          </a:lnRef>
+          <a:fillRef idx="3">
+            <a:schemeClr val="accent1"/>
+          </a:fillRef>
+          <a:effectRef idx="2">
+            <a:schemeClr val="accent1"/>
+          </a:effectRef>
+          <a:fontRef idx="minor">
+            <a:schemeClr val="lt1"/>
+          </a:fontRef>
+        </p:style>
+        <p:txBody>
+          <a:bodyPr rtlCol="0" anchor="ctr"/>
+          <a:lstStyle/>
+          <a:p>
+            <a:pPr algn="ctr"/>
+          </a:p>
+        </p:txBody>
+      </p:sp>
+      <p:sp>
+        <p:nvSpPr>
+          <p:cNvPr id="14" name="TextBox 13"/>
+          <p:cNvSpPr txBox="1"/>
+          <p:nvPr/>
+        </p:nvSpPr>
+        <p:spPr>
+          <a:xfrm>
+            <a:off x="960120" y="4023360"/>
+            <a:ext cx="4663440" cy="1691640"/>
+          </a:xfrm>
+          <a:prstGeom prst="rect">
+            <a:avLst/>
+          </a:prstGeom>
+          <a:noFill/>
+        </p:spPr>
+        <p:txBody>
+          <a:bodyPr wrap="square" lIns="0" tIns="0" rIns="0" bIns="0">
+            <a:spAutoFit/>
+          </a:bodyPr>
+          <a:lstStyle/>
+          <a:p>
+            <a:pPr>
+              <a:defRPr sz="1600" b="1">
+                <a:solidFill>
+                  <a:srgbClr val="059669"/>
+                </a:solidFill>
+                <a:latin typeface="Calibri"/>
+              </a:defRPr>
+            </a:pPr>
+            <a:r>
+              <a:t>Lesson 3: Explainable AI Builds Real Trust</a:t>
+            </a:r>
+          </a:p>
+          <a:p>
+            <a:pPr>
+              <a:spcBef>
+                <a:spcPts val="600"/>
+              </a:spcBef>
+              <a:defRPr sz="1300">
+                <a:solidFill>
+                  <a:srgbClr val="1E293B"/>
+                </a:solidFill>
+                <a:latin typeface="Calibri"/>
+              </a:defRPr>
+            </a:pPr>
+            <a:r>
+              <a:t>Nobody trusts a silent black box. Giving users an itemized SHAP breakdown (receipt) bridges the gap between machine learning and human decision-making.</a:t>
+            </a:r>
+          </a:p>
+        </p:txBody>
+      </p:sp>
+      <p:sp>
+        <p:nvSpPr>
+          <p:cNvPr id="15" name="Rounded Rectangle 14"/>
+          <p:cNvSpPr/>
+          <p:nvPr/>
+        </p:nvSpPr>
+        <p:spPr>
+          <a:xfrm>
+            <a:off x="6172200" y="3886200"/>
+            <a:ext cx="5120640" cy="1965960"/>
+          </a:xfrm>
+          <a:prstGeom prst="roundRect">
+            <a:avLst/>
+          </a:prstGeom>
+          <a:solidFill>
+            <a:srgbClr val="FFFFFF"/>
+          </a:solidFill>
+          <a:ln w="12700">
+            <a:solidFill>
+              <a:srgbClr val="E2E8F0"/>
+            </a:solidFill>
+          </a:ln>
+        </p:spPr>
+        <p:style>
+          <a:lnRef idx="1">
+            <a:schemeClr val="accent1"/>
+          </a:lnRef>
+          <a:fillRef idx="3">
+            <a:schemeClr val="accent1"/>
+          </a:fillRef>
+          <a:effectRef idx="2">
+            <a:schemeClr val="accent1"/>
+          </a:effectRef>
+          <a:fontRef idx="minor">
+            <a:schemeClr val="lt1"/>
+          </a:fontRef>
+        </p:style>
+        <p:txBody>
+          <a:bodyPr rtlCol="0" anchor="ctr"/>
+          <a:lstStyle/>
+          <a:p>
+            <a:pPr algn="ctr"/>
+          </a:p>
+        </p:txBody>
+      </p:sp>
+      <p:sp>
+        <p:nvSpPr>
           <p:cNvPr id="16" name="Rectangle 15"/>
           <p:cNvSpPr/>
           <p:nvPr/>
@@ -5205,7 +5752,7 @@
               </a:defRPr>
             </a:pPr>
             <a:r>
-              <a:t>4. Full Reproducibility as a First-Class Citizen</a:t>
+              <a:t>Lesson 4: Reproducibility Makes Work Professional</a:t>
             </a:r>
           </a:p>
           <a:p>
@@ -5221,7 +5768,7 @@
               </a:defRPr>
             </a:pPr>
             <a:r>
-              <a:t>Enterprise data science requires more than accurate predictions: it demands a locked dependency environment (renv.lock), reproducible seeds, verified endpoint tests, and standalone documentation.</a:t>
+              <a:t>Locking package versions (renv.lock), testing endpoints automatically, and compiling standalone reports means anyone can re-run this project anytime with identical results.</a:t>
             </a:r>
           </a:p>
         </p:txBody>
@@ -5283,7 +5830,7 @@
               </a:defRPr>
             </a:pPr>
             <a:r>
-              <a:t>THE REAL-WORLD PROBLEM SPACE</a:t>
+              <a:t>1. CASE STUDY OVERVIEW</a:t>
             </a:r>
           </a:p>
         </p:txBody>
@@ -5319,7 +5866,7 @@
               </a:defRPr>
             </a:pPr>
             <a:r>
-              <a:t>The Valuation Dilemma: Accuracy vs. Transparency</a:t>
+              <a:t>The Core Problem: Why We Need Explainable Predictions</a:t>
             </a:r>
           </a:p>
         </p:txBody>
@@ -5355,7 +5902,7 @@
               </a:defRPr>
             </a:pPr>
             <a:r>
-              <a:t>Why traditional property appraisal forces an unacceptable trade-off</a:t>
+              <a:t>Why traditional valuation methods fail homeowners and loan officers in real life</a:t>
             </a:r>
           </a:p>
         </p:txBody>
@@ -5368,7 +5915,7 @@
         </p:nvSpPr>
         <p:spPr>
           <a:xfrm>
-            <a:off x="731520" y="6400800"/>
+            <a:off x="731520" y="6446520"/>
             <a:ext cx="10698480" cy="274320"/>
           </a:xfrm>
           <a:prstGeom prst="rect">
@@ -5391,7 +5938,7 @@
               </a:defRPr>
             </a:pPr>
             <a:r>
-              <a:t>Explainable House Price Prediction System in R (mlr3 + XAI) • Slide 2 of 12</a:t>
+              <a:t>Explainable House Price Prediction (Ames, Iowa Case Study) • Slide 2 of 13</a:t>
             </a:r>
           </a:p>
         </p:txBody>
@@ -5507,7 +6054,7 @@
           <a:lstStyle/>
           <a:p>
             <a:pPr>
-              <a:defRPr sz="1800" b="1">
+              <a:defRPr sz="1700" b="1">
                 <a:solidFill>
                   <a:srgbClr val="DC2626"/>
                 </a:solidFill>
@@ -5515,7 +6062,7 @@
               </a:defRPr>
             </a:pPr>
             <a:r>
-              <a:t>The Black-Box Seduction</a:t>
+              <a:t>Problem 1: Black-Box AI (Too Opaque)</a:t>
             </a:r>
           </a:p>
           <a:p>
@@ -5533,7 +6080,7 @@
                   <a:srgbClr val="1E293B"/>
                 </a:solidFill>
               </a:rPr>
-              <a:t>• High Raw Accuracy: </a:t>
+              <a:t>• Accurate but Silent: </a:t>
             </a:r>
             <a:r>
               <a:rPr>
@@ -5541,7 +6088,7 @@
                   <a:srgbClr val="1E293B"/>
                 </a:solidFill>
               </a:rPr>
-              <a:t>Complex gradient boosted trees and neural networks capture subtle nonlinearities and reduce headline RMSE.</a:t>
+              <a:t>Advanced algorithms can guess prices well, but they act like a black box—they give you a number without giving you a reason.</a:t>
             </a:r>
           </a:p>
           <a:p>
@@ -5559,7 +6106,7 @@
                   <a:srgbClr val="1E293B"/>
                 </a:solidFill>
               </a:rPr>
-              <a:t>• Total Opacity: </a:t>
+              <a:t>• The $40,000 Mystery: </a:t>
             </a:r>
             <a:r>
               <a:rPr>
@@ -5567,7 +6114,7 @@
                   <a:srgbClr val="1E293B"/>
                 </a:solidFill>
               </a:rPr>
-              <a:t>Borrowers, loan officers, and auditors are handed a single dollar number with zero explainable reasoning.</a:t>
+              <a:t>If a buyer's appraisal comes in $40,000 below expectations, telling them 'the computer calculated it' is unacceptable.</a:t>
             </a:r>
           </a:p>
           <a:p>
@@ -5585,7 +6132,7 @@
                   <a:srgbClr val="1E293B"/>
                 </a:solidFill>
               </a:rPr>
-              <a:t>• The Compliance Wall: </a:t>
+              <a:t>• Lending Regulations: </a:t>
             </a:r>
             <a:r>
               <a:rPr>
@@ -5593,7 +6140,7 @@
                   <a:srgbClr val="1E293B"/>
                 </a:solidFill>
               </a:rPr>
-              <a:t>When a home is appraised $40,000 below market, saying 'the algorithm decided' violates Fair Lending guidelines and loses customer trust.</a:t>
+              <a:t>Banks must legally explain why loans are approved or denied. Unexplained AI decisions violate fair lending laws.</a:t>
             </a:r>
           </a:p>
         </p:txBody>
@@ -5709,7 +6256,7 @@
           <a:lstStyle/>
           <a:p>
             <a:pPr>
-              <a:defRPr sz="1800" b="1">
+              <a:defRPr sz="1700" b="1">
                 <a:solidFill>
                   <a:srgbClr val="2563EB"/>
                 </a:solidFill>
@@ -5717,7 +6264,7 @@
               </a:defRPr>
             </a:pPr>
             <a:r>
-              <a:t>The Classical Linear Limitation</a:t>
+              <a:t>Problem 2: Simple Formulas (Too Inaccurate)</a:t>
             </a:r>
           </a:p>
           <a:p>
@@ -5735,7 +6282,7 @@
                   <a:srgbClr val="1E293B"/>
                 </a:solidFill>
               </a:rPr>
-              <a:t>• Total Mathematical Clarity: </a:t>
+              <a:t>• Easy to Read: </a:t>
             </a:r>
             <a:r>
               <a:rPr>
@@ -5743,7 +6290,7 @@
                   <a:srgbClr val="1E293B"/>
                 </a:solidFill>
               </a:rPr>
-              <a:t>Classical hedonic OLS models are easy to inspect—every feature has a straightforward dollar slope.</a:t>
+              <a:t>Basic linear formulas are simple: every square foot adds a fixed dollar amount.</a:t>
             </a:r>
           </a:p>
           <a:p>
@@ -5761,7 +6308,7 @@
                   <a:srgbClr val="1E293B"/>
                 </a:solidFill>
               </a:rPr>
-              <a:t>• Poor Out-of-Sample Fit: </a:t>
+              <a:t>• Real Estate Isn't Simple: </a:t>
             </a:r>
             <a:r>
               <a:rPr>
@@ -5769,7 +6316,7 @@
                   <a:srgbClr val="1E293B"/>
                 </a:solidFill>
               </a:rPr>
-              <a:t>Real estate isn't strictly additive. An extra 200 sq ft in a luxury estate has far more value than in a starter fixer-upper.</a:t>
+              <a:t>In real life, 200 sq ft on a luxury custom mansion adds way more cash than 200 sq ft on an old fixer-upper.</a:t>
             </a:r>
           </a:p>
           <a:p>
@@ -5787,7 +6334,7 @@
                   <a:srgbClr val="1E293B"/>
                 </a:solidFill>
               </a:rPr>
-              <a:t>• Collinearity Collapse: </a:t>
+              <a:t>• High Average Errors: </a:t>
             </a:r>
             <a:r>
               <a:rPr>
@@ -5795,7 +6342,7 @@
                   <a:srgbClr val="1E293B"/>
                 </a:solidFill>
               </a:rPr>
-              <a:t>Standard linear regression breaks down with 80+ correlated features, yielding high holdout errors (over $21,000 MAE in our benchmark).</a:t>
+              <a:t>Basic linear formulas made an average error of over $21,000 on our data because they cannot see complex combinations.</a:t>
             </a:r>
           </a:p>
         </p:txBody>
@@ -5876,7 +6423,7 @@
               </a:defRPr>
             </a:pPr>
             <a:r>
-              <a:t>Our North Star Goal:</a:t>
+              <a:t>Our Goal in Plain English:</a:t>
             </a:r>
           </a:p>
           <a:p>
@@ -5889,7 +6436,7 @@
               </a:defRPr>
             </a:pPr>
             <a:r>
-              <a:t>Build a production ensemble pipeline that matches top-tier machine learning precision, while pairing every single appraisal with certified, game-theoretic local attribution (SHAP &amp; LIME) so stakeholders can see exactly what drove the valuation.</a:t>
+              <a:t>Build a model that achieves top-level accuracy (under $15k average error), while printing a clear, itemized receipt for every single property so any human can understand why it is priced that way.</a:t>
             </a:r>
           </a:p>
         </p:txBody>
@@ -5951,7 +6498,7 @@
               </a:defRPr>
             </a:pPr>
             <a:r>
-              <a:t>DATA QUALITY &amp; EXPLORATORY ANALYSIS</a:t>
+              <a:t>2. DATASET DESCRIPTION</a:t>
             </a:r>
           </a:p>
         </p:txBody>
@@ -5987,7 +6534,7 @@
               </a:defRPr>
             </a:pPr>
             <a:r>
-              <a:t>Data Detective Work: Catching Defects Early</a:t>
+              <a:t>The Ames Housing Data: 2,930 Real Homes</a:t>
             </a:r>
           </a:p>
         </p:txBody>
@@ -6023,7 +6570,7 @@
               </a:defRPr>
             </a:pPr>
             <a:r>
-              <a:t>Auditing 2,930 historical transactions (2006–2010) before training a single model</a:t>
+              <a:t>What information we had, and why it was ideal for testing our prediction system</a:t>
             </a:r>
           </a:p>
         </p:txBody>
@@ -6036,7 +6583,7 @@
         </p:nvSpPr>
         <p:spPr>
           <a:xfrm>
-            <a:off x="731520" y="6400800"/>
+            <a:off x="731520" y="6446520"/>
             <a:ext cx="10698480" cy="274320"/>
           </a:xfrm>
           <a:prstGeom prst="rect">
@@ -6059,7 +6606,7 @@
               </a:defRPr>
             </a:pPr>
             <a:r>
-              <a:t>Explainable House Price Prediction System in R (mlr3 + XAI) • Slide 3 of 12</a:t>
+              <a:t>Explainable House Price Prediction (Ames, Iowa Case Study) • Slide 3 of 13</a:t>
             </a:r>
           </a:p>
         </p:txBody>
@@ -6073,7 +6620,7 @@
         <p:spPr>
           <a:xfrm>
             <a:off x="731520" y="1737360"/>
-            <a:ext cx="5486400" cy="1280160"/>
+            <a:ext cx="5303520" cy="1097280"/>
           </a:xfrm>
           <a:prstGeom prst="roundRect">
             <a:avLst/>
@@ -6111,57 +6658,14 @@
       </p:sp>
       <p:sp>
         <p:nvSpPr>
-          <p:cNvPr id="7" name="Rectangle 6"/>
-          <p:cNvSpPr/>
-          <p:nvPr/>
-        </p:nvSpPr>
-        <p:spPr>
-          <a:xfrm>
-            <a:off x="731520" y="1737360"/>
-            <a:ext cx="91440" cy="1280160"/>
-          </a:xfrm>
-          <a:prstGeom prst="rect">
-            <a:avLst/>
-          </a:prstGeom>
-          <a:solidFill>
-            <a:srgbClr val="D97706"/>
-          </a:solidFill>
-          <a:ln>
-            <a:noFill/>
-          </a:ln>
-        </p:spPr>
-        <p:style>
-          <a:lnRef idx="1">
-            <a:schemeClr val="accent1"/>
-          </a:lnRef>
-          <a:fillRef idx="3">
-            <a:schemeClr val="accent1"/>
-          </a:fillRef>
-          <a:effectRef idx="2">
-            <a:schemeClr val="accent1"/>
-          </a:effectRef>
-          <a:fontRef idx="minor">
-            <a:schemeClr val="lt1"/>
-          </a:fontRef>
-        </p:style>
-        <p:txBody>
-          <a:bodyPr rtlCol="0" anchor="ctr"/>
-          <a:lstStyle/>
-          <a:p>
-            <a:pPr algn="ctr"/>
-          </a:p>
-        </p:txBody>
-      </p:sp>
-      <p:sp>
-        <p:nvSpPr>
-          <p:cNvPr id="8" name="TextBox 7"/>
+          <p:cNvPr id="7" name="TextBox 6"/>
           <p:cNvSpPr txBox="1"/>
           <p:nvPr/>
         </p:nvSpPr>
         <p:spPr>
           <a:xfrm>
-            <a:off x="1005840" y="1847088"/>
-            <a:ext cx="5029200" cy="1060704"/>
+            <a:off x="914400" y="1874520"/>
+            <a:ext cx="4937760" cy="822960"/>
           </a:xfrm>
           <a:prstGeom prst="rect">
             <a:avLst/>
@@ -6175,23 +6679,23 @@
           <a:lstStyle/>
           <a:p>
             <a:pPr>
-              <a:defRPr sz="1400" b="1">
-                <a:solidFill>
-                  <a:srgbClr val="D97706"/>
-                </a:solidFill>
-                <a:latin typeface="Calibri"/>
-              </a:defRPr>
-            </a:pPr>
-            <a:r>
-              <a:t>Constant Noise Column (Misc_Feature_2)</a:t>
+              <a:defRPr sz="3200" b="1">
+                <a:solidFill>
+                  <a:srgbClr val="1E3A8A"/>
+                </a:solidFill>
+                <a:latin typeface="Calibri"/>
+              </a:defRPr>
+            </a:pPr>
+            <a:r>
+              <a:t>2,930 Homes</a:t>
             </a:r>
           </a:p>
           <a:p>
             <a:pPr>
               <a:spcBef>
-                <a:spcPts val="300"/>
+                <a:spcPts val="200"/>
               </a:spcBef>
-              <a:defRPr sz="1200">
+              <a:defRPr sz="1300" b="1">
                 <a:solidFill>
                   <a:srgbClr val="1E293B"/>
                 </a:solidFill>
@@ -6199,21 +6703,37 @@
               </a:defRPr>
             </a:pPr>
             <a:r>
-              <a:t>Misc_Feature_2 had zero variance across all 2,930 records. Feeding constant features into tree splits or covariance matrices adds pure noise with zero signal.</a:t>
-            </a:r>
-          </a:p>
-        </p:txBody>
-      </p:sp>
-      <p:sp>
-        <p:nvSpPr>
-          <p:cNvPr id="9" name="Rounded Rectangle 8"/>
+              <a:t>Total Sales Recorded</a:t>
+            </a:r>
+          </a:p>
+          <a:p>
+            <a:pPr>
+              <a:spcBef>
+                <a:spcPts val="200"/>
+              </a:spcBef>
+              <a:defRPr sz="1100">
+                <a:solidFill>
+                  <a:srgbClr val="64748B"/>
+                </a:solidFill>
+                <a:latin typeface="Calibri"/>
+              </a:defRPr>
+            </a:pPr>
+            <a:r>
+              <a:t>Ames, Iowa property transactions (2006 to 2010)</a:t>
+            </a:r>
+          </a:p>
+        </p:txBody>
+      </p:sp>
+      <p:sp>
+        <p:nvSpPr>
+          <p:cNvPr id="8" name="Rounded Rectangle 7"/>
           <p:cNvSpPr/>
           <p:nvPr/>
         </p:nvSpPr>
         <p:spPr>
           <a:xfrm>
-            <a:off x="731520" y="3154679"/>
-            <a:ext cx="5486400" cy="1280160"/>
+            <a:off x="731520" y="2971800"/>
+            <a:ext cx="5303520" cy="1097280"/>
           </a:xfrm>
           <a:prstGeom prst="roundRect">
             <a:avLst/>
@@ -6251,57 +6771,14 @@
       </p:sp>
       <p:sp>
         <p:nvSpPr>
-          <p:cNvPr id="10" name="Rectangle 9"/>
-          <p:cNvSpPr/>
-          <p:nvPr/>
-        </p:nvSpPr>
-        <p:spPr>
-          <a:xfrm>
-            <a:off x="731520" y="3154679"/>
-            <a:ext cx="91440" cy="1280160"/>
-          </a:xfrm>
-          <a:prstGeom prst="rect">
-            <a:avLst/>
-          </a:prstGeom>
-          <a:solidFill>
-            <a:srgbClr val="D97706"/>
-          </a:solidFill>
-          <a:ln>
-            <a:noFill/>
-          </a:ln>
-        </p:spPr>
-        <p:style>
-          <a:lnRef idx="1">
-            <a:schemeClr val="accent1"/>
-          </a:lnRef>
-          <a:fillRef idx="3">
-            <a:schemeClr val="accent1"/>
-          </a:fillRef>
-          <a:effectRef idx="2">
-            <a:schemeClr val="accent1"/>
-          </a:effectRef>
-          <a:fontRef idx="minor">
-            <a:schemeClr val="lt1"/>
-          </a:fontRef>
-        </p:style>
-        <p:txBody>
-          <a:bodyPr rtlCol="0" anchor="ctr"/>
-          <a:lstStyle/>
-          <a:p>
-            <a:pPr algn="ctr"/>
-          </a:p>
-        </p:txBody>
-      </p:sp>
-      <p:sp>
-        <p:nvSpPr>
-          <p:cNvPr id="11" name="TextBox 10"/>
+          <p:cNvPr id="9" name="TextBox 8"/>
           <p:cNvSpPr txBox="1"/>
           <p:nvPr/>
         </p:nvSpPr>
         <p:spPr>
           <a:xfrm>
-            <a:off x="1005840" y="3264408"/>
-            <a:ext cx="5029200" cy="1060704"/>
+            <a:off x="914400" y="3108960"/>
+            <a:ext cx="4937760" cy="822960"/>
           </a:xfrm>
           <a:prstGeom prst="rect">
             <a:avLst/>
@@ -6315,23 +6792,23 @@
           <a:lstStyle/>
           <a:p>
             <a:pPr>
-              <a:defRPr sz="1400" b="1">
-                <a:solidFill>
-                  <a:srgbClr val="D97706"/>
-                </a:solidFill>
-                <a:latin typeface="Calibri"/>
-              </a:defRPr>
-            </a:pPr>
-            <a:r>
-              <a:t>Exact Duplicate Column (Condition_3)</a:t>
+              <a:defRPr sz="3200" b="1">
+                <a:solidFill>
+                  <a:srgbClr val="2563EB"/>
+                </a:solidFill>
+                <a:latin typeface="Calibri"/>
+              </a:defRPr>
+            </a:pPr>
+            <a:r>
+              <a:t>81 Features</a:t>
             </a:r>
           </a:p>
           <a:p>
             <a:pPr>
               <a:spcBef>
-                <a:spcPts val="300"/>
+                <a:spcPts val="200"/>
               </a:spcBef>
-              <a:defRPr sz="1200">
+              <a:defRPr sz="1300" b="1">
                 <a:solidFill>
                   <a:srgbClr val="1E293B"/>
                 </a:solidFill>
@@ -6339,21 +6816,37 @@
               </a:defRPr>
             </a:pPr>
             <a:r>
-              <a:t>Condition_3 was an identical duplicate of Condition_2. Permitting duplicated columns arbitrarily inflates feature importance metrics in tree models.</a:t>
-            </a:r>
-          </a:p>
-        </p:txBody>
-      </p:sp>
-      <p:sp>
-        <p:nvSpPr>
-          <p:cNvPr id="12" name="Rounded Rectangle 11"/>
+              <a:t>Information Per House</a:t>
+            </a:r>
+          </a:p>
+          <a:p>
+            <a:pPr>
+              <a:spcBef>
+                <a:spcPts val="200"/>
+              </a:spcBef>
+              <a:defRPr sz="1100">
+                <a:solidFill>
+                  <a:srgbClr val="64748B"/>
+                </a:solidFill>
+                <a:latin typeface="Calibri"/>
+              </a:defRPr>
+            </a:pPr>
+            <a:r>
+              <a:t>Size, build year, quality grades, neighborhood, and amenities</a:t>
+            </a:r>
+          </a:p>
+        </p:txBody>
+      </p:sp>
+      <p:sp>
+        <p:nvSpPr>
+          <p:cNvPr id="10" name="Rounded Rectangle 9"/>
           <p:cNvSpPr/>
           <p:nvPr/>
         </p:nvSpPr>
         <p:spPr>
           <a:xfrm>
-            <a:off x="731520" y="4572000"/>
-            <a:ext cx="5486400" cy="1280160"/>
+            <a:off x="731520" y="4206240"/>
+            <a:ext cx="5303520" cy="1097280"/>
           </a:xfrm>
           <a:prstGeom prst="roundRect">
             <a:avLst/>
@@ -6391,57 +6884,14 @@
       </p:sp>
       <p:sp>
         <p:nvSpPr>
-          <p:cNvPr id="13" name="Rectangle 12"/>
-          <p:cNvSpPr/>
-          <p:nvPr/>
-        </p:nvSpPr>
-        <p:spPr>
-          <a:xfrm>
-            <a:off x="731520" y="4572000"/>
-            <a:ext cx="91440" cy="1280160"/>
-          </a:xfrm>
-          <a:prstGeom prst="rect">
-            <a:avLst/>
-          </a:prstGeom>
-          <a:solidFill>
-            <a:srgbClr val="DC2626"/>
-          </a:solidFill>
-          <a:ln>
-            <a:noFill/>
-          </a:ln>
-        </p:spPr>
-        <p:style>
-          <a:lnRef idx="1">
-            <a:schemeClr val="accent1"/>
-          </a:lnRef>
-          <a:fillRef idx="3">
-            <a:schemeClr val="accent1"/>
-          </a:fillRef>
-          <a:effectRef idx="2">
-            <a:schemeClr val="accent1"/>
-          </a:effectRef>
-          <a:fontRef idx="minor">
-            <a:schemeClr val="lt1"/>
-          </a:fontRef>
-        </p:style>
-        <p:txBody>
-          <a:bodyPr rtlCol="0" anchor="ctr"/>
-          <a:lstStyle/>
-          <a:p>
-            <a:pPr algn="ctr"/>
-          </a:p>
-        </p:txBody>
-      </p:sp>
-      <p:sp>
-        <p:nvSpPr>
-          <p:cNvPr id="14" name="TextBox 13"/>
+          <p:cNvPr id="11" name="TextBox 10"/>
           <p:cNvSpPr txBox="1"/>
           <p:nvPr/>
         </p:nvSpPr>
         <p:spPr>
           <a:xfrm>
-            <a:off x="1005840" y="4681728"/>
-            <a:ext cx="5029200" cy="1060704"/>
+            <a:off x="914400" y="4343400"/>
+            <a:ext cx="4937760" cy="822960"/>
           </a:xfrm>
           <a:prstGeom prst="rect">
             <a:avLst/>
@@ -6455,23 +6905,23 @@
           <a:lstStyle/>
           <a:p>
             <a:pPr>
-              <a:defRPr sz="1400" b="1">
-                <a:solidFill>
-                  <a:srgbClr val="DC2626"/>
-                </a:solidFill>
-                <a:latin typeface="Calibri"/>
-              </a:defRPr>
-            </a:pPr>
-            <a:r>
-              <a:t>Collinear Measurement Scaling (Lot_Area_m2)</a:t>
+              <a:defRPr sz="3200" b="1">
+                <a:solidFill>
+                  <a:srgbClr val="059669"/>
+                </a:solidFill>
+                <a:latin typeface="Calibri"/>
+              </a:defRPr>
+            </a:pPr>
+            <a:r>
+              <a:t>$34.9k – $755k</a:t>
             </a:r>
           </a:p>
           <a:p>
             <a:pPr>
               <a:spcBef>
-                <a:spcPts val="300"/>
+                <a:spcPts val="200"/>
               </a:spcBef>
-              <a:defRPr sz="1200">
+              <a:defRPr sz="1300" b="1">
                 <a:solidFill>
                   <a:srgbClr val="1E293B"/>
                 </a:solidFill>
@@ -6479,21 +6929,37 @@
               </a:defRPr>
             </a:pPr>
             <a:r>
-              <a:t>Lot_Area_m2 was simply Lot_Area multiplied by 0.0929. Collinear scales destabilize regularized models and split tree allocations artificially.</a:t>
-            </a:r>
-          </a:p>
-        </p:txBody>
-      </p:sp>
-      <p:sp>
-        <p:nvSpPr>
-          <p:cNvPr id="15" name="Rounded Rectangle 14"/>
+              <a:t>Selling Price Range</a:t>
+            </a:r>
+          </a:p>
+          <a:p>
+            <a:pPr>
+              <a:spcBef>
+                <a:spcPts val="200"/>
+              </a:spcBef>
+              <a:defRPr sz="1100">
+                <a:solidFill>
+                  <a:srgbClr val="64748B"/>
+                </a:solidFill>
+                <a:latin typeface="Calibri"/>
+              </a:defRPr>
+            </a:pPr>
+            <a:r>
+              <a:t>Average home was $180,800; middle home (median) was $160,000</a:t>
+            </a:r>
+          </a:p>
+        </p:txBody>
+      </p:sp>
+      <p:sp>
+        <p:nvSpPr>
+          <p:cNvPr id="12" name="Rounded Rectangle 11"/>
           <p:cNvSpPr/>
           <p:nvPr/>
         </p:nvSpPr>
         <p:spPr>
           <a:xfrm>
-            <a:off x="6492240" y="1737360"/>
-            <a:ext cx="4937760" cy="4114800"/>
+            <a:off x="6309360" y="1737360"/>
+            <a:ext cx="5120640" cy="4297680"/>
           </a:xfrm>
           <a:prstGeom prst="roundRect">
             <a:avLst/>
@@ -6531,7 +6997,7 @@
       </p:sp>
       <p:pic>
         <p:nvPicPr>
-          <p:cNvPr id="16" name="Picture 15" descr="eda_01_target_distribution_raw.png"/>
+          <p:cNvPr id="13" name="Picture 12" descr="eda_01_target_distribution_raw.png"/>
           <p:cNvPicPr>
             <a:picLocks noChangeAspect="1"/>
           </p:cNvPicPr>
@@ -6545,8 +7011,8 @@
         </p:blipFill>
         <p:spPr>
           <a:xfrm>
-            <a:off x="6583680" y="1828800"/>
-            <a:ext cx="4754880" cy="3291840"/>
+            <a:off x="6446520" y="1828800"/>
+            <a:ext cx="4846320" cy="3200400"/>
           </a:xfrm>
           <a:prstGeom prst="rect">
             <a:avLst/>
@@ -6555,14 +7021,14 @@
       </p:pic>
       <p:sp>
         <p:nvSpPr>
-          <p:cNvPr id="17" name="TextBox 16"/>
+          <p:cNvPr id="14" name="TextBox 13"/>
           <p:cNvSpPr txBox="1"/>
           <p:nvPr/>
         </p:nvSpPr>
         <p:spPr>
           <a:xfrm>
-            <a:off x="6583680" y="5212080"/>
-            <a:ext cx="4754880" cy="548640"/>
+            <a:off x="6492240" y="5166360"/>
+            <a:ext cx="4754880" cy="731520"/>
           </a:xfrm>
           <a:prstGeom prst="rect">
             <a:avLst/>
@@ -6584,7 +7050,7 @@
               </a:defRPr>
             </a:pPr>
             <a:r>
-              <a:t>Target Price Reality: Right-skewed distribution ranging from $34.9k to $755k (median $160k). Outlier luxury estates require robust loss functions.</a:t>
+              <a:t>Why this dataset is great: Most homes cost between $120k and $220k, but a few luxury estates cost up to $755k. This teaches our model to handle normal houses well without getting tricked by mansions.</a:t>
             </a:r>
           </a:p>
         </p:txBody>
@@ -6646,7 +7112,7 @@
               </a:defRPr>
             </a:pPr>
             <a:r>
-              <a:t>PIPELINE ARCHITECTURE &amp; LEAKAGE PREVENTION</a:t>
+              <a:t>3. DATA PREPARATION &amp; CLEANING</a:t>
             </a:r>
           </a:p>
         </p:txBody>
@@ -6682,7 +7148,7 @@
               </a:defRPr>
             </a:pPr>
             <a:r>
-              <a:t>Zero Data Leakage: Preprocessing Inside the Model</a:t>
+              <a:t>Data Detective Work: Finding &amp; Fixing 3 Traps</a:t>
             </a:r>
           </a:p>
         </p:txBody>
@@ -6718,7 +7184,7 @@
               </a:defRPr>
             </a:pPr>
             <a:r>
-              <a:t>Why naive scripts fail in production, and how our mlr3pipelines DAG solved it</a:t>
+              <a:t>Before feeding data into any model, we checked for errors and bad columns</a:t>
             </a:r>
           </a:p>
         </p:txBody>
@@ -6731,7 +7197,7 @@
         </p:nvSpPr>
         <p:spPr>
           <a:xfrm>
-            <a:off x="731520" y="6400800"/>
+            <a:off x="731520" y="6446520"/>
             <a:ext cx="10698480" cy="274320"/>
           </a:xfrm>
           <a:prstGeom prst="rect">
@@ -6754,7 +7220,7 @@
               </a:defRPr>
             </a:pPr>
             <a:r>
-              <a:t>Explainable House Price Prediction System in R (mlr3 + XAI) • Slide 4 of 12</a:t>
+              <a:t>Explainable House Price Prediction (Ames, Iowa Case Study) • Slide 4 of 13</a:t>
             </a:r>
           </a:p>
         </p:txBody>
@@ -6768,7 +7234,7 @@
         <p:spPr>
           <a:xfrm>
             <a:off x="731520" y="1737360"/>
-            <a:ext cx="2514600" cy="4114800"/>
+            <a:ext cx="10698480" cy="1280160"/>
           </a:xfrm>
           <a:prstGeom prst="roundRect">
             <a:avLst/>
@@ -6813,13 +7279,13 @@
         <p:spPr>
           <a:xfrm>
             <a:off x="731520" y="1737360"/>
-            <a:ext cx="2514600" cy="91440"/>
+            <a:ext cx="109728" cy="1280160"/>
           </a:xfrm>
           <a:prstGeom prst="rect">
             <a:avLst/>
           </a:prstGeom>
           <a:solidFill>
-            <a:srgbClr val="1E3A8A"/>
+            <a:srgbClr val="D97706"/>
           </a:solidFill>
           <a:ln>
             <a:noFill/>
@@ -6855,8 +7321,8 @@
         </p:nvSpPr>
         <p:spPr>
           <a:xfrm>
-            <a:off x="868680" y="1965960"/>
-            <a:ext cx="2240280" cy="3657600"/>
+            <a:off x="1051560" y="1847088"/>
+            <a:ext cx="10149840" cy="1051560"/>
           </a:xfrm>
           <a:prstGeom prst="rect">
             <a:avLst/>
@@ -6870,39 +7336,23 @@
           <a:lstStyle/>
           <a:p>
             <a:pPr>
-              <a:defRPr sz="1100" b="1">
-                <a:solidFill>
-                  <a:srgbClr val="2563EB"/>
-                </a:solidFill>
-                <a:latin typeface="Calibri"/>
-              </a:defRPr>
-            </a:pPr>
-            <a:r>
-              <a:t>CLEAN INGESTION</a:t>
+              <a:defRPr sz="1500" b="1">
+                <a:solidFill>
+                  <a:srgbClr val="D97706"/>
+                </a:solidFill>
+                <a:latin typeface="Calibri"/>
+              </a:defRPr>
+            </a:pPr>
+            <a:r>
+              <a:t>Trap 1: The Completely Useless Column (Misc_Feature_2)</a:t>
             </a:r>
           </a:p>
           <a:p>
             <a:pPr>
               <a:spcBef>
-                <a:spcPts val="400"/>
+                <a:spcPts val="300"/>
               </a:spcBef>
-              <a:defRPr sz="1600" b="1">
-                <a:solidFill>
-                  <a:srgbClr val="1E3A8A"/>
-                </a:solidFill>
-                <a:latin typeface="Calibri"/>
-              </a:defRPr>
-            </a:pPr>
-            <a:r>
-              <a:t>1. Anomaly Pruning</a:t>
-            </a:r>
-          </a:p>
-          <a:p>
-            <a:pPr>
-              <a:spcBef>
-                <a:spcPts val="1200"/>
-              </a:spcBef>
-              <a:defRPr sz="1300">
+              <a:defRPr sz="1200">
                 <a:solidFill>
                   <a:srgbClr val="1E293B"/>
                 </a:solidFill>
@@ -6910,11 +7360,15 @@
               </a:defRPr>
             </a:pPr>
             <a:r>
-              <a:t>PipeOpRemoveConstants automatically strips zero-variance fields.</a:t>
+              <a:t>What was wrong: This column had the exact same value for all 2,930 houses.</a:t>
             </a:r>
             <a:br/>
             <a:r>
-              <a:t>PipeOpSelect removes verified duplicates and collinear scales.</a:t>
+              <a:t>Why it matters: A feature with zero differences gives zero clues. It's just clutter.</a:t>
+            </a:r>
+            <a:br/>
+            <a:r>
+              <a:t>What we did: We automatically dropped it before training.</a:t>
             </a:r>
           </a:p>
         </p:txBody>
@@ -6927,8 +7381,8 @@
         </p:nvSpPr>
         <p:spPr>
           <a:xfrm>
-            <a:off x="3429000" y="1737360"/>
-            <a:ext cx="2514600" cy="4114800"/>
+            <a:off x="731520" y="3154680"/>
+            <a:ext cx="10698480" cy="1280160"/>
           </a:xfrm>
           <a:prstGeom prst="roundRect">
             <a:avLst/>
@@ -6972,14 +7426,14 @@
         </p:nvSpPr>
         <p:spPr>
           <a:xfrm>
-            <a:off x="3429000" y="1737360"/>
-            <a:ext cx="2514600" cy="91440"/>
+            <a:off x="731520" y="3154680"/>
+            <a:ext cx="109728" cy="1280160"/>
           </a:xfrm>
           <a:prstGeom prst="rect">
             <a:avLst/>
           </a:prstGeom>
           <a:solidFill>
-            <a:srgbClr val="1E3A8A"/>
+            <a:srgbClr val="D97706"/>
           </a:solidFill>
           <a:ln>
             <a:noFill/>
@@ -7015,8 +7469,8 @@
         </p:nvSpPr>
         <p:spPr>
           <a:xfrm>
-            <a:off x="3566160" y="1965960"/>
-            <a:ext cx="2240280" cy="3657600"/>
+            <a:off x="1051560" y="3264408"/>
+            <a:ext cx="10149840" cy="1051560"/>
           </a:xfrm>
           <a:prstGeom prst="rect">
             <a:avLst/>
@@ -7030,39 +7484,23 @@
           <a:lstStyle/>
           <a:p>
             <a:pPr>
-              <a:defRPr sz="1100" b="1">
-                <a:solidFill>
-                  <a:srgbClr val="2563EB"/>
-                </a:solidFill>
-                <a:latin typeface="Calibri"/>
-              </a:defRPr>
-            </a:pPr>
-            <a:r>
-              <a:t>SEMANTICS PRESERVED</a:t>
+              <a:defRPr sz="1500" b="1">
+                <a:solidFill>
+                  <a:srgbClr val="D97706"/>
+                </a:solidFill>
+                <a:latin typeface="Calibri"/>
+              </a:defRPr>
+            </a:pPr>
+            <a:r>
+              <a:t>Trap 2: The Exact Twin Column (Condition_3)</a:t>
             </a:r>
           </a:p>
           <a:p>
             <a:pPr>
               <a:spcBef>
-                <a:spcPts val="400"/>
+                <a:spcPts val="300"/>
               </a:spcBef>
-              <a:defRPr sz="1600" b="1">
-                <a:solidFill>
-                  <a:srgbClr val="1E3A8A"/>
-                </a:solidFill>
-                <a:latin typeface="Calibri"/>
-              </a:defRPr>
-            </a:pPr>
-            <a:r>
-              <a:t>2. Fold-Safe Imputation</a:t>
-            </a:r>
-          </a:p>
-          <a:p>
-            <a:pPr>
-              <a:spcBef>
-                <a:spcPts val="1200"/>
-              </a:spcBef>
-              <a:defRPr sz="1300">
+              <a:defRPr sz="1200">
                 <a:solidFill>
                   <a:srgbClr val="1E293B"/>
                 </a:solidFill>
@@ -7070,11 +7508,15 @@
               </a:defRPr>
             </a:pPr>
             <a:r>
-              <a:t>Continuous columns use training-partition medians.</a:t>
+              <a:t>What was wrong: Condition_3 was a 100% identical copy of Condition_2.</a:t>
             </a:r>
             <a:br/>
             <a:r>
-              <a:t>Categorical columns tag missing values as explicit 'MISSING' factors.</a:t>
+              <a:t>Why it matters: If you feed two identical columns, models can double-count that feature.</a:t>
+            </a:r>
+            <a:br/>
+            <a:r>
+              <a:t>What we did: We deleted the duplicate and kept the original.</a:t>
             </a:r>
           </a:p>
         </p:txBody>
@@ -7087,8 +7529,8 @@
         </p:nvSpPr>
         <p:spPr>
           <a:xfrm>
-            <a:off x="6126480" y="1737360"/>
-            <a:ext cx="2514600" cy="4114800"/>
+            <a:off x="731520" y="4572000"/>
+            <a:ext cx="10698480" cy="1280160"/>
           </a:xfrm>
           <a:prstGeom prst="roundRect">
             <a:avLst/>
@@ -7132,14 +7574,14 @@
         </p:nvSpPr>
         <p:spPr>
           <a:xfrm>
-            <a:off x="6126480" y="1737360"/>
-            <a:ext cx="2514600" cy="91440"/>
+            <a:off x="731520" y="4572000"/>
+            <a:ext cx="109728" cy="1280160"/>
           </a:xfrm>
           <a:prstGeom prst="rect">
             <a:avLst/>
           </a:prstGeom>
           <a:solidFill>
-            <a:srgbClr val="1E3A8A"/>
+            <a:srgbClr val="DC2626"/>
           </a:solidFill>
           <a:ln>
             <a:noFill/>
@@ -7175,8 +7617,8 @@
         </p:nvSpPr>
         <p:spPr>
           <a:xfrm>
-            <a:off x="6263640" y="1965960"/>
-            <a:ext cx="2240280" cy="3657600"/>
+            <a:off x="1051560" y="4681728"/>
+            <a:ext cx="10149840" cy="1051560"/>
           </a:xfrm>
           <a:prstGeom prst="rect">
             <a:avLst/>
@@ -7190,39 +7632,23 @@
           <a:lstStyle/>
           <a:p>
             <a:pPr>
-              <a:defRPr sz="1100" b="1">
-                <a:solidFill>
-                  <a:srgbClr val="2563EB"/>
-                </a:solidFill>
-                <a:latin typeface="Calibri"/>
-              </a:defRPr>
-            </a:pPr>
-            <a:r>
-              <a:t>ZERO ENCODING NAS</a:t>
+              <a:defRPr sz="1500" b="1">
+                <a:solidFill>
+                  <a:srgbClr val="DC2626"/>
+                </a:solidFill>
+                <a:latin typeface="Calibri"/>
+              </a:defRPr>
+            </a:pPr>
+            <a:r>
+              <a:t>Trap 3: Measuring the Same Yard Twice (Lot_Area_m2)</a:t>
             </a:r>
           </a:p>
           <a:p>
             <a:pPr>
               <a:spcBef>
-                <a:spcPts val="400"/>
+                <a:spcPts val="300"/>
               </a:spcBef>
-              <a:defRPr sz="1600" b="1">
-                <a:solidFill>
-                  <a:srgbClr val="1E3A8A"/>
-                </a:solidFill>
-                <a:latin typeface="Calibri"/>
-              </a:defRPr>
-            </a:pPr>
-            <a:r>
-              <a:t>3. Cardinality Control</a:t>
-            </a:r>
-          </a:p>
-          <a:p>
-            <a:pPr>
-              <a:spcBef>
-                <a:spcPts val="1200"/>
-              </a:spcBef>
-              <a:defRPr sz="1300">
+              <a:defRPr sz="1200">
                 <a:solidFill>
                   <a:srgbClr val="1E293B"/>
                 </a:solidFill>
@@ -7230,171 +7656,15 @@
               </a:defRPr>
             </a:pPr>
             <a:r>
-              <a:t>PipeOpCollapseFactors merges rare factor levels (&lt; 15 threshold).</a:t>
+              <a:t>What was wrong: One column was lot area in sq ft; another was the exact same yard in sq meters.</a:t>
             </a:r>
             <a:br/>
             <a:r>
-              <a:t>Dummy encoding with zero-imputation protects unseen test levels.</a:t>
-            </a:r>
-          </a:p>
-        </p:txBody>
-      </p:sp>
-      <p:sp>
-        <p:nvSpPr>
-          <p:cNvPr id="15" name="Rounded Rectangle 14"/>
-          <p:cNvSpPr/>
-          <p:nvPr/>
-        </p:nvSpPr>
-        <p:spPr>
-          <a:xfrm>
-            <a:off x="8823960" y="1737360"/>
-            <a:ext cx="2514600" cy="4114800"/>
-          </a:xfrm>
-          <a:prstGeom prst="roundRect">
-            <a:avLst/>
-          </a:prstGeom>
-          <a:solidFill>
-            <a:srgbClr val="FFFFFF"/>
-          </a:solidFill>
-          <a:ln w="12700">
-            <a:solidFill>
-              <a:srgbClr val="E2E8F0"/>
-            </a:solidFill>
-          </a:ln>
-        </p:spPr>
-        <p:style>
-          <a:lnRef idx="1">
-            <a:schemeClr val="accent1"/>
-          </a:lnRef>
-          <a:fillRef idx="3">
-            <a:schemeClr val="accent1"/>
-          </a:fillRef>
-          <a:effectRef idx="2">
-            <a:schemeClr val="accent1"/>
-          </a:effectRef>
-          <a:fontRef idx="minor">
-            <a:schemeClr val="lt1"/>
-          </a:fontRef>
-        </p:style>
-        <p:txBody>
-          <a:bodyPr rtlCol="0" anchor="ctr"/>
-          <a:lstStyle/>
-          <a:p>
-            <a:pPr algn="ctr"/>
-          </a:p>
-        </p:txBody>
-      </p:sp>
-      <p:sp>
-        <p:nvSpPr>
-          <p:cNvPr id="16" name="Rectangle 15"/>
-          <p:cNvSpPr/>
-          <p:nvPr/>
-        </p:nvSpPr>
-        <p:spPr>
-          <a:xfrm>
-            <a:off x="8823960" y="1737360"/>
-            <a:ext cx="2514600" cy="91440"/>
-          </a:xfrm>
-          <a:prstGeom prst="rect">
-            <a:avLst/>
-          </a:prstGeom>
-          <a:solidFill>
-            <a:srgbClr val="1E3A8A"/>
-          </a:solidFill>
-          <a:ln>
-            <a:noFill/>
-          </a:ln>
-        </p:spPr>
-        <p:style>
-          <a:lnRef idx="1">
-            <a:schemeClr val="accent1"/>
-          </a:lnRef>
-          <a:fillRef idx="3">
-            <a:schemeClr val="accent1"/>
-          </a:fillRef>
-          <a:effectRef idx="2">
-            <a:schemeClr val="accent1"/>
-          </a:effectRef>
-          <a:fontRef idx="minor">
-            <a:schemeClr val="lt1"/>
-          </a:fontRef>
-        </p:style>
-        <p:txBody>
-          <a:bodyPr rtlCol="0" anchor="ctr"/>
-          <a:lstStyle/>
-          <a:p>
-            <a:pPr algn="ctr"/>
-          </a:p>
-        </p:txBody>
-      </p:sp>
-      <p:sp>
-        <p:nvSpPr>
-          <p:cNvPr id="17" name="TextBox 16"/>
-          <p:cNvSpPr txBox="1"/>
-          <p:nvPr/>
-        </p:nvSpPr>
-        <p:spPr>
-          <a:xfrm>
-            <a:off x="8961120" y="1965960"/>
-            <a:ext cx="2240280" cy="3657600"/>
-          </a:xfrm>
-          <a:prstGeom prst="rect">
-            <a:avLst/>
-          </a:prstGeom>
-          <a:noFill/>
-        </p:spPr>
-        <p:txBody>
-          <a:bodyPr wrap="square" lIns="0" tIns="0" rIns="0" bIns="0">
-            <a:spAutoFit/>
-          </a:bodyPr>
-          <a:lstStyle/>
-          <a:p>
-            <a:pPr>
-              <a:defRPr sz="1100" b="1">
-                <a:solidFill>
-                  <a:srgbClr val="2563EB"/>
-                </a:solidFill>
-                <a:latin typeface="Calibri"/>
-              </a:defRPr>
-            </a:pPr>
-            <a:r>
-              <a:t>LEAKAGE-PROOF</a:t>
-            </a:r>
-          </a:p>
-          <a:p>
-            <a:pPr>
-              <a:spcBef>
-                <a:spcPts val="400"/>
-              </a:spcBef>
-              <a:defRPr sz="1600" b="1">
-                <a:solidFill>
-                  <a:srgbClr val="1E3A8A"/>
-                </a:solidFill>
-                <a:latin typeface="Calibri"/>
-              </a:defRPr>
-            </a:pPr>
-            <a:r>
-              <a:t>4. Unified Resampling</a:t>
-            </a:r>
-          </a:p>
-          <a:p>
-            <a:pPr>
-              <a:spcBef>
-                <a:spcPts val="1200"/>
-              </a:spcBef>
-              <a:defRPr sz="1300">
-                <a:solidFill>
-                  <a:srgbClr val="1E293B"/>
-                </a:solidFill>
-                <a:latin typeface="Calibri"/>
-              </a:defRPr>
-            </a:pPr>
-            <a:r>
-              <a:t>Every cross-validation fold trains preprocessing strictly on training indices.</a:t>
+              <a:t>Why it matters: It was just a math conversion of the same information, causing confusion.</a:t>
             </a:r>
             <a:br/>
             <a:r>
-              <a:t>Zero future data ever leaks into validation splits.</a:t>
+              <a:t>What we did: We removed the metric clone and kept square footage.</a:t>
             </a:r>
           </a:p>
         </p:txBody>
@@ -7456,7 +7726,7 @@
               </a:defRPr>
             </a:pPr>
             <a:r>
-              <a:t>DOMAIN FEATURE ENGINEERING</a:t>
+              <a:t>3. DATA PREPARATION &amp; INTEGRITY</a:t>
             </a:r>
           </a:p>
         </p:txBody>
@@ -7492,7 +7762,7 @@
               </a:defRPr>
             </a:pPr>
             <a:r>
-              <a:t>Features That Reflect How Real Buyers Think</a:t>
+              <a:t>The Cheating Trap: How We Guaranteed Zero Leakage</a:t>
             </a:r>
           </a:p>
         </p:txBody>
@@ -7528,7 +7798,7 @@
               </a:defRPr>
             </a:pPr>
             <a:r>
-              <a:t>Engineering domain metrics that explain price variation before algorithmic tuning</a:t>
+              <a:t>What is data leakage, and why our strict pipeline makes our test scores 100% trustworthy</a:t>
             </a:r>
           </a:p>
         </p:txBody>
@@ -7541,7 +7811,7 @@
         </p:nvSpPr>
         <p:spPr>
           <a:xfrm>
-            <a:off x="731520" y="6400800"/>
+            <a:off x="731520" y="6446520"/>
             <a:ext cx="10698480" cy="274320"/>
           </a:xfrm>
           <a:prstGeom prst="rect">
@@ -7564,7 +7834,7 @@
               </a:defRPr>
             </a:pPr>
             <a:r>
-              <a:t>Explainable House Price Prediction System in R (mlr3 + XAI) • Slide 5 of 12</a:t>
+              <a:t>Explainable House Price Prediction (Ames, Iowa Case Study) • Slide 5 of 13</a:t>
             </a:r>
           </a:p>
         </p:txBody>
@@ -7578,7 +7848,7 @@
         <p:spPr>
           <a:xfrm>
             <a:off x="731520" y="1737360"/>
-            <a:ext cx="5303520" cy="4297680"/>
+            <a:ext cx="3383280" cy="4297680"/>
           </a:xfrm>
           <a:prstGeom prst="roundRect">
             <a:avLst/>
@@ -7614,30 +7884,49 @@
           </a:p>
         </p:txBody>
       </p:sp>
-      <p:pic>
-        <p:nvPicPr>
-          <p:cNvPr id="7" name="Picture 6" descr="eda_07_engineered_features_correlations.png"/>
-          <p:cNvPicPr>
-            <a:picLocks noChangeAspect="1"/>
-          </p:cNvPicPr>
-          <p:nvPr/>
-        </p:nvPicPr>
-        <p:blipFill>
-          <a:blip r:embed="rId2"/>
-          <a:stretch>
-            <a:fillRect/>
-          </a:stretch>
-        </p:blipFill>
-        <p:spPr>
-          <a:xfrm>
-            <a:off x="822960" y="1828800"/>
-            <a:ext cx="5120640" cy="3657600"/>
-          </a:xfrm>
-          <a:prstGeom prst="rect">
-            <a:avLst/>
-          </a:prstGeom>
-        </p:spPr>
-      </p:pic>
+      <p:sp>
+        <p:nvSpPr>
+          <p:cNvPr id="7" name="Rectangle 6"/>
+          <p:cNvSpPr/>
+          <p:nvPr/>
+        </p:nvSpPr>
+        <p:spPr>
+          <a:xfrm>
+            <a:off x="731520" y="1737360"/>
+            <a:ext cx="3383280" cy="91440"/>
+          </a:xfrm>
+          <a:prstGeom prst="rect">
+            <a:avLst/>
+          </a:prstGeom>
+          <a:solidFill>
+            <a:srgbClr val="DC2626"/>
+          </a:solidFill>
+          <a:ln>
+            <a:noFill/>
+          </a:ln>
+        </p:spPr>
+        <p:style>
+          <a:lnRef idx="1">
+            <a:schemeClr val="accent1"/>
+          </a:lnRef>
+          <a:fillRef idx="3">
+            <a:schemeClr val="accent1"/>
+          </a:fillRef>
+          <a:effectRef idx="2">
+            <a:schemeClr val="accent1"/>
+          </a:effectRef>
+          <a:fontRef idx="minor">
+            <a:schemeClr val="lt1"/>
+          </a:fontRef>
+        </p:style>
+        <p:txBody>
+          <a:bodyPr rtlCol="0" anchor="ctr"/>
+          <a:lstStyle/>
+          <a:p>
+            <a:pPr algn="ctr"/>
+          </a:p>
+        </p:txBody>
+      </p:sp>
       <p:sp>
         <p:nvSpPr>
           <p:cNvPr id="8" name="TextBox 7"/>
@@ -7646,8 +7935,8 @@
         </p:nvSpPr>
         <p:spPr>
           <a:xfrm>
-            <a:off x="822960" y="5532120"/>
-            <a:ext cx="5120640" cy="411480"/>
+            <a:off x="914400" y="1965960"/>
+            <a:ext cx="3017520" cy="3931920"/>
           </a:xfrm>
           <a:prstGeom prst="rect">
             <a:avLst/>
@@ -7661,15 +7950,36 @@
           <a:lstStyle/>
           <a:p>
             <a:pPr>
-              <a:defRPr sz="1100">
-                <a:solidFill>
-                  <a:srgbClr val="64748B"/>
-                </a:solidFill>
-                <a:latin typeface="Calibri"/>
-              </a:defRPr>
-            </a:pPr>
-            <a:r>
-              <a:t>Correlation Analysis: Engineered interactions significantly surpass raw independent features.</a:t>
+              <a:defRPr sz="1600" b="1">
+                <a:solidFill>
+                  <a:srgbClr val="DC2626"/>
+                </a:solidFill>
+                <a:latin typeface="Calibri"/>
+              </a:defRPr>
+            </a:pPr>
+            <a:r>
+              <a:t>1. What is Data Leakage?</a:t>
+            </a:r>
+          </a:p>
+          <a:p>
+            <a:pPr>
+              <a:spcBef>
+                <a:spcPts val="800"/>
+              </a:spcBef>
+              <a:defRPr sz="1300">
+                <a:solidFill>
+                  <a:srgbClr val="1E293B"/>
+                </a:solidFill>
+                <a:latin typeface="Calibri"/>
+              </a:defRPr>
+            </a:pPr>
+            <a:r>
+              <a:t>Imagine giving a student the answer key before a practice exam.</a:t>
+            </a:r>
+            <a:br/>
+            <a:br/>
+            <a:r>
+              <a:t>If you fill missing values or calculate averages using the WHOLE dataset before splitting into test groups, your model secretly peeks at the test answers. Its score looks amazing, but it fails in the real world.</a:t>
             </a:r>
           </a:p>
         </p:txBody>
@@ -7682,8 +7992,8 @@
         </p:nvSpPr>
         <p:spPr>
           <a:xfrm>
-            <a:off x="6309360" y="1737360"/>
-            <a:ext cx="5120640" cy="960120"/>
+            <a:off x="4343400" y="1737360"/>
+            <a:ext cx="3383280" cy="4297680"/>
           </a:xfrm>
           <a:prstGeom prst="roundRect">
             <a:avLst/>
@@ -7721,14 +8031,57 @@
       </p:sp>
       <p:sp>
         <p:nvSpPr>
-          <p:cNvPr id="10" name="TextBox 9"/>
+          <p:cNvPr id="10" name="Rectangle 9"/>
+          <p:cNvSpPr/>
+          <p:nvPr/>
+        </p:nvSpPr>
+        <p:spPr>
+          <a:xfrm>
+            <a:off x="4343400" y="1737360"/>
+            <a:ext cx="3383280" cy="91440"/>
+          </a:xfrm>
+          <a:prstGeom prst="rect">
+            <a:avLst/>
+          </a:prstGeom>
+          <a:solidFill>
+            <a:srgbClr val="2563EB"/>
+          </a:solidFill>
+          <a:ln>
+            <a:noFill/>
+          </a:ln>
+        </p:spPr>
+        <p:style>
+          <a:lnRef idx="1">
+            <a:schemeClr val="accent1"/>
+          </a:lnRef>
+          <a:fillRef idx="3">
+            <a:schemeClr val="accent1"/>
+          </a:fillRef>
+          <a:effectRef idx="2">
+            <a:schemeClr val="accent1"/>
+          </a:effectRef>
+          <a:fontRef idx="minor">
+            <a:schemeClr val="lt1"/>
+          </a:fontRef>
+        </p:style>
+        <p:txBody>
+          <a:bodyPr rtlCol="0" anchor="ctr"/>
+          <a:lstStyle/>
+          <a:p>
+            <a:pPr algn="ctr"/>
+          </a:p>
+        </p:txBody>
+      </p:sp>
+      <p:sp>
+        <p:nvSpPr>
+          <p:cNvPr id="11" name="TextBox 10"/>
           <p:cNvSpPr txBox="1"/>
           <p:nvPr/>
         </p:nvSpPr>
         <p:spPr>
           <a:xfrm>
-            <a:off x="6492240" y="1810512"/>
-            <a:ext cx="4754880" cy="822960"/>
+            <a:off x="4526280" y="1965960"/>
+            <a:ext cx="3017520" cy="3931920"/>
           </a:xfrm>
           <a:prstGeom prst="rect">
             <a:avLst/>
@@ -7742,23 +8095,23 @@
           <a:lstStyle/>
           <a:p>
             <a:pPr>
-              <a:defRPr sz="1300" b="1">
-                <a:solidFill>
-                  <a:srgbClr val="059669"/>
-                </a:solidFill>
-                <a:latin typeface="Calibri"/>
-              </a:defRPr>
-            </a:pPr>
-            <a:r>
-              <a:t>Quality × Living Area Interaction (r = 0.8454)</a:t>
+              <a:defRPr sz="1600" b="1">
+                <a:solidFill>
+                  <a:srgbClr val="2563EB"/>
+                </a:solidFill>
+                <a:latin typeface="Calibri"/>
+              </a:defRPr>
+            </a:pPr>
+            <a:r>
+              <a:t>2. How Our Pipeline Fixes It</a:t>
             </a:r>
           </a:p>
           <a:p>
             <a:pPr>
               <a:spcBef>
-                <a:spcPts val="200"/>
+                <a:spcPts val="800"/>
               </a:spcBef>
-              <a:defRPr sz="1100">
+              <a:defRPr sz="1300">
                 <a:solidFill>
                   <a:srgbClr val="1E293B"/>
                 </a:solidFill>
@@ -7766,21 +8119,34 @@
               </a:defRPr>
             </a:pPr>
             <a:r>
-              <a:t>The single strongest predictor in the entire dataset. Captures the compounding reality that an additional square foot in a high-finish custom home commands a far higher dollar premium than in an entry-level starter home.</a:t>
-            </a:r>
-          </a:p>
-        </p:txBody>
-      </p:sp>
-      <p:sp>
-        <p:nvSpPr>
-          <p:cNvPr id="11" name="Rounded Rectangle 10"/>
+              <a:t>We used mlr3pipelines DAG to lock all cleaning inside the model:</a:t>
+            </a:r>
+            <a:br/>
+            <a:br/>
+            <a:r>
+              <a:t>• In each round, the model learns averages ONLY from the study homes.</a:t>
+            </a:r>
+            <a:br/>
+            <a:r>
+              <a:t>• When it looks at test homes, it treats them as completely unseen.</a:t>
+            </a:r>
+            <a:br/>
+            <a:r>
+              <a:t>• If a house has missing features (like no fireplace), it marks 'MISSING' cleanly.</a:t>
+            </a:r>
+          </a:p>
+        </p:txBody>
+      </p:sp>
+      <p:sp>
+        <p:nvSpPr>
+          <p:cNvPr id="12" name="Rounded Rectangle 11"/>
           <p:cNvSpPr/>
           <p:nvPr/>
         </p:nvSpPr>
         <p:spPr>
           <a:xfrm>
-            <a:off x="6309360" y="2816352"/>
-            <a:ext cx="5120640" cy="960120"/>
+            <a:off x="7955279" y="1737360"/>
+            <a:ext cx="3383280" cy="4297680"/>
           </a:xfrm>
           <a:prstGeom prst="roundRect">
             <a:avLst/>
@@ -7818,77 +8184,23 @@
       </p:sp>
       <p:sp>
         <p:nvSpPr>
-          <p:cNvPr id="12" name="TextBox 11"/>
-          <p:cNvSpPr txBox="1"/>
-          <p:nvPr/>
-        </p:nvSpPr>
-        <p:spPr>
-          <a:xfrm>
-            <a:off x="6492240" y="2889504"/>
-            <a:ext cx="4754880" cy="822960"/>
-          </a:xfrm>
-          <a:prstGeom prst="rect">
-            <a:avLst/>
-          </a:prstGeom>
-          <a:noFill/>
-        </p:spPr>
-        <p:txBody>
-          <a:bodyPr wrap="square" lIns="0" tIns="0" rIns="0" bIns="0">
-            <a:spAutoFit/>
-          </a:bodyPr>
-          <a:lstStyle/>
-          <a:p>
-            <a:pPr>
-              <a:defRPr sz="1300" b="1">
-                <a:solidFill>
-                  <a:srgbClr val="1E3A8A"/>
-                </a:solidFill>
-                <a:latin typeface="Calibri"/>
-              </a:defRPr>
-            </a:pPr>
-            <a:r>
-              <a:t>Total Usable Living Area</a:t>
-            </a:r>
-          </a:p>
-          <a:p>
-            <a:pPr>
-              <a:spcBef>
-                <a:spcPts val="200"/>
-              </a:spcBef>
-              <a:defRPr sz="1100">
-                <a:solidFill>
-                  <a:srgbClr val="1E293B"/>
-                </a:solidFill>
-                <a:latin typeface="Calibri"/>
-              </a:defRPr>
-            </a:pPr>
-            <a:r>
-              <a:t>Aggregates above-ground living area and finished basement space into a single consolidated metric, matching how prospective buyers evaluate functional home capacity.</a:t>
-            </a:r>
-          </a:p>
-        </p:txBody>
-      </p:sp>
-      <p:sp>
-        <p:nvSpPr>
-          <p:cNvPr id="13" name="Rounded Rectangle 12"/>
+          <p:cNvPr id="13" name="Rectangle 12"/>
           <p:cNvSpPr/>
           <p:nvPr/>
         </p:nvSpPr>
         <p:spPr>
           <a:xfrm>
-            <a:off x="6309360" y="3895344"/>
-            <a:ext cx="5120640" cy="960120"/>
-          </a:xfrm>
-          <a:prstGeom prst="roundRect">
+            <a:off x="7955279" y="1737360"/>
+            <a:ext cx="3383280" cy="91440"/>
+          </a:xfrm>
+          <a:prstGeom prst="rect">
             <a:avLst/>
           </a:prstGeom>
           <a:solidFill>
-            <a:srgbClr val="FFFFFF"/>
+            <a:srgbClr val="059669"/>
           </a:solidFill>
-          <a:ln w="12700">
-            <a:solidFill>
-              <a:srgbClr val="E2E8F0"/>
-            </a:solidFill>
+          <a:ln>
+            <a:noFill/>
           </a:ln>
         </p:spPr>
         <p:style>
@@ -7921,8 +8233,8 @@
         </p:nvSpPr>
         <p:spPr>
           <a:xfrm>
-            <a:off x="6492240" y="3968496"/>
-            <a:ext cx="4754880" cy="822960"/>
+            <a:off x="8138159" y="1965960"/>
+            <a:ext cx="3017520" cy="3931920"/>
           </a:xfrm>
           <a:prstGeom prst="rect">
             <a:avLst/>
@@ -7936,23 +8248,23 @@
           <a:lstStyle/>
           <a:p>
             <a:pPr>
-              <a:defRPr sz="1300" b="1">
-                <a:solidFill>
-                  <a:srgbClr val="1E3A8A"/>
-                </a:solidFill>
-                <a:latin typeface="Calibri"/>
-              </a:defRPr>
-            </a:pPr>
-            <a:r>
-              <a:t>Total Bathrooms &amp; Outdoor Living Area</a:t>
+              <a:defRPr sz="1600" b="1">
+                <a:solidFill>
+                  <a:srgbClr val="059669"/>
+                </a:solidFill>
+                <a:latin typeface="Calibri"/>
+              </a:defRPr>
+            </a:pPr>
+            <a:r>
+              <a:t>3. Why This Gives You Confidence</a:t>
             </a:r>
           </a:p>
           <a:p>
             <a:pPr>
               <a:spcBef>
-                <a:spcPts val="200"/>
+                <a:spcPts val="800"/>
               </a:spcBef>
-              <a:defRPr sz="1100">
+              <a:defRPr sz="1300">
                 <a:solidFill>
                   <a:srgbClr val="1E293B"/>
                 </a:solidFill>
@@ -7960,104 +8272,12 @@
               </a:defRPr>
             </a:pPr>
             <a:r>
-              <a:t>Combines full and half baths additively (including basement baths), while aggregating fragmented porch and deck square footages into an outdoor living metric.</a:t>
-            </a:r>
-          </a:p>
-        </p:txBody>
-      </p:sp>
-      <p:sp>
-        <p:nvSpPr>
-          <p:cNvPr id="15" name="Rounded Rectangle 14"/>
-          <p:cNvSpPr/>
-          <p:nvPr/>
-        </p:nvSpPr>
-        <p:spPr>
-          <a:xfrm>
-            <a:off x="6309360" y="4974336"/>
-            <a:ext cx="5120640" cy="960120"/>
-          </a:xfrm>
-          <a:prstGeom prst="roundRect">
-            <a:avLst/>
-          </a:prstGeom>
-          <a:solidFill>
-            <a:srgbClr val="FFFFFF"/>
-          </a:solidFill>
-          <a:ln w="12700">
-            <a:solidFill>
-              <a:srgbClr val="E2E8F0"/>
-            </a:solidFill>
-          </a:ln>
-        </p:spPr>
-        <p:style>
-          <a:lnRef idx="1">
-            <a:schemeClr val="accent1"/>
-          </a:lnRef>
-          <a:fillRef idx="3">
-            <a:schemeClr val="accent1"/>
-          </a:fillRef>
-          <a:effectRef idx="2">
-            <a:schemeClr val="accent1"/>
-          </a:effectRef>
-          <a:fontRef idx="minor">
-            <a:schemeClr val="lt1"/>
-          </a:fontRef>
-        </p:style>
-        <p:txBody>
-          <a:bodyPr rtlCol="0" anchor="ctr"/>
-          <a:lstStyle/>
-          <a:p>
-            <a:pPr algn="ctr"/>
-          </a:p>
-        </p:txBody>
-      </p:sp>
-      <p:sp>
-        <p:nvSpPr>
-          <p:cNvPr id="16" name="TextBox 15"/>
-          <p:cNvSpPr txBox="1"/>
-          <p:nvPr/>
-        </p:nvSpPr>
-        <p:spPr>
-          <a:xfrm>
-            <a:off x="6492240" y="5047488"/>
-            <a:ext cx="4754880" cy="822960"/>
-          </a:xfrm>
-          <a:prstGeom prst="rect">
-            <a:avLst/>
-          </a:prstGeom>
-          <a:noFill/>
-        </p:spPr>
-        <p:txBody>
-          <a:bodyPr wrap="square" lIns="0" tIns="0" rIns="0" bIns="0">
-            <a:spAutoFit/>
-          </a:bodyPr>
-          <a:lstStyle/>
-          <a:p>
-            <a:pPr>
-              <a:defRPr sz="1300" b="1">
-                <a:solidFill>
-                  <a:srgbClr val="1E3A8A"/>
-                </a:solidFill>
-                <a:latin typeface="Calibri"/>
-              </a:defRPr>
-            </a:pPr>
-            <a:r>
-              <a:t>Chronological Age vs. Remodel Recency</a:t>
-            </a:r>
-          </a:p>
-          <a:p>
-            <a:pPr>
-              <a:spcBef>
-                <a:spcPts val="200"/>
-              </a:spcBef>
-              <a:defRPr sz="1100">
-                <a:solidFill>
-                  <a:srgbClr val="1E293B"/>
-                </a:solidFill>
-                <a:latin typeface="Calibri"/>
-              </a:defRPr>
-            </a:pPr>
-            <a:r>
-              <a:t>Disentangles initial construction date from recent renovation timing. A 1960 home remodeled in 2008 commands an appraisal premium over an untouched original.</a:t>
+              <a:t>Our holdout results are 100% honest:</a:t>
+            </a:r>
+            <a:br/>
+            <a:br/>
+            <a:r>
+              <a:t>When we say our model makes an average error of $14,761 on brand-new homes, that is real-world performance, not an inflated score from accidental cheating.</a:t>
             </a:r>
           </a:p>
         </p:txBody>
@@ -8119,7 +8339,7 @@
               </a:defRPr>
             </a:pPr>
             <a:r>
-              <a:t>MODEL BENCHMARKING &amp; SELECTION</a:t>
+              <a:t>3. DOMAIN FEATURE ENGINEERING</a:t>
             </a:r>
           </a:p>
         </p:txBody>
@@ -8155,7 +8375,7 @@
               </a:defRPr>
             </a:pPr>
             <a:r>
-              <a:t>The Benchmark Tournament: Testing 6 Model Families</a:t>
+              <a:t>Smart Features: Teaching the Model How Buyers Think</a:t>
             </a:r>
           </a:p>
         </p:txBody>
@@ -8191,7 +8411,7 @@
               </a:defRPr>
             </a:pPr>
             <a:r>
-              <a:t>Identical 5-fold cross-validation across 2,344 historical properties</a:t>
+              <a:t>We created 6 practical combination features that match how real people evaluate homes</a:t>
             </a:r>
           </a:p>
         </p:txBody>
@@ -8204,7 +8424,7 @@
         </p:nvSpPr>
         <p:spPr>
           <a:xfrm>
-            <a:off x="731520" y="6400800"/>
+            <a:off x="731520" y="6446520"/>
             <a:ext cx="10698480" cy="274320"/>
           </a:xfrm>
           <a:prstGeom prst="rect">
@@ -8227,7 +8447,7 @@
               </a:defRPr>
             </a:pPr>
             <a:r>
-              <a:t>Explainable House Price Prediction System in R (mlr3 + XAI) • Slide 6 of 12</a:t>
+              <a:t>Explainable House Price Prediction (Ames, Iowa Case Study) • Slide 6 of 13</a:t>
             </a:r>
           </a:p>
         </p:txBody>
@@ -8279,7 +8499,7 @@
       </p:sp>
       <p:pic>
         <p:nvPicPr>
-          <p:cNvPr id="7" name="Picture 6" descr="benchmark_01_mae_comparison.png"/>
+          <p:cNvPr id="7" name="Picture 6" descr="eda_07_engineered_features_correlations.png"/>
           <p:cNvPicPr>
             <a:picLocks noChangeAspect="1"/>
           </p:cNvPicPr>
@@ -8294,7 +8514,7 @@
         <p:spPr>
           <a:xfrm>
             <a:off x="822960" y="1828800"/>
-            <a:ext cx="5120640" cy="3840480"/>
+            <a:ext cx="5120640" cy="3749039"/>
           </a:xfrm>
           <a:prstGeom prst="rect">
             <a:avLst/>
@@ -8303,14 +8523,50 @@
       </p:pic>
       <p:sp>
         <p:nvSpPr>
-          <p:cNvPr id="8" name="Rounded Rectangle 7"/>
+          <p:cNvPr id="8" name="TextBox 7"/>
+          <p:cNvSpPr txBox="1"/>
+          <p:nvPr/>
+        </p:nvSpPr>
+        <p:spPr>
+          <a:xfrm>
+            <a:off x="822960" y="5623560"/>
+            <a:ext cx="5120640" cy="365760"/>
+          </a:xfrm>
+          <a:prstGeom prst="rect">
+            <a:avLst/>
+          </a:prstGeom>
+          <a:noFill/>
+        </p:spPr>
+        <p:txBody>
+          <a:bodyPr wrap="square" lIns="0" tIns="0" rIns="0" bIns="0">
+            <a:spAutoFit/>
+          </a:bodyPr>
+          <a:lstStyle/>
+          <a:p>
+            <a:pPr>
+              <a:defRPr sz="1100" b="1">
+                <a:solidFill>
+                  <a:srgbClr val="059669"/>
+                </a:solidFill>
+                <a:latin typeface="Calibri"/>
+              </a:defRPr>
+            </a:pPr>
+            <a:r>
+              <a:t>Result: Our engineered interaction (Quality x Size) became the #1 strongest predictor in the entire dataset (r = 0.85)!</a:t>
+            </a:r>
+          </a:p>
+        </p:txBody>
+      </p:sp>
+      <p:sp>
+        <p:nvSpPr>
+          <p:cNvPr id="9" name="Rounded Rectangle 8"/>
           <p:cNvSpPr/>
           <p:nvPr/>
         </p:nvSpPr>
         <p:spPr>
           <a:xfrm>
             <a:off x="6309360" y="1737360"/>
-            <a:ext cx="5120640" cy="4297680"/>
+            <a:ext cx="5120640" cy="960120"/>
           </a:xfrm>
           <a:prstGeom prst="roundRect">
             <a:avLst/>
@@ -8348,14 +8604,14 @@
       </p:sp>
       <p:sp>
         <p:nvSpPr>
-          <p:cNvPr id="9" name="TextBox 8"/>
+          <p:cNvPr id="10" name="TextBox 9"/>
           <p:cNvSpPr txBox="1"/>
           <p:nvPr/>
         </p:nvSpPr>
         <p:spPr>
           <a:xfrm>
-            <a:off x="6583680" y="1920240"/>
-            <a:ext cx="4663440" cy="3931920"/>
+            <a:off x="6492240" y="1810512"/>
+            <a:ext cx="4754880" cy="822960"/>
           </a:xfrm>
           <a:prstGeom prst="rect">
             <a:avLst/>
@@ -8369,7 +8625,104 @@
           <a:lstStyle/>
           <a:p>
             <a:pPr>
-              <a:defRPr sz="1700" b="1">
+              <a:defRPr sz="1300" b="1">
+                <a:solidFill>
+                  <a:srgbClr val="059669"/>
+                </a:solidFill>
+                <a:latin typeface="Calibri"/>
+              </a:defRPr>
+            </a:pPr>
+            <a:r>
+              <a:t>1. Quality Multiplied by Size (r = 0.85)</a:t>
+            </a:r>
+          </a:p>
+          <a:p>
+            <a:pPr>
+              <a:spcBef>
+                <a:spcPts val="200"/>
+              </a:spcBef>
+              <a:defRPr sz="1100">
+                <a:solidFill>
+                  <a:srgbClr val="1E293B"/>
+                </a:solidFill>
+                <a:latin typeface="Calibri"/>
+              </a:defRPr>
+            </a:pPr>
+            <a:r>
+              <a:t>The #1 Most Important Clue: An extra 200 sq ft on a luxury estate adds way more money than 200 sq ft on an entry-level house. Multiplying them together captured this compounding effect.</a:t>
+            </a:r>
+          </a:p>
+        </p:txBody>
+      </p:sp>
+      <p:sp>
+        <p:nvSpPr>
+          <p:cNvPr id="11" name="Rounded Rectangle 10"/>
+          <p:cNvSpPr/>
+          <p:nvPr/>
+        </p:nvSpPr>
+        <p:spPr>
+          <a:xfrm>
+            <a:off x="6309360" y="2816352"/>
+            <a:ext cx="5120640" cy="960120"/>
+          </a:xfrm>
+          <a:prstGeom prst="roundRect">
+            <a:avLst/>
+          </a:prstGeom>
+          <a:solidFill>
+            <a:srgbClr val="FFFFFF"/>
+          </a:solidFill>
+          <a:ln w="12700">
+            <a:solidFill>
+              <a:srgbClr val="E2E8F0"/>
+            </a:solidFill>
+          </a:ln>
+        </p:spPr>
+        <p:style>
+          <a:lnRef idx="1">
+            <a:schemeClr val="accent1"/>
+          </a:lnRef>
+          <a:fillRef idx="3">
+            <a:schemeClr val="accent1"/>
+          </a:fillRef>
+          <a:effectRef idx="2">
+            <a:schemeClr val="accent1"/>
+          </a:effectRef>
+          <a:fontRef idx="minor">
+            <a:schemeClr val="lt1"/>
+          </a:fontRef>
+        </p:style>
+        <p:txBody>
+          <a:bodyPr rtlCol="0" anchor="ctr"/>
+          <a:lstStyle/>
+          <a:p>
+            <a:pPr algn="ctr"/>
+          </a:p>
+        </p:txBody>
+      </p:sp>
+      <p:sp>
+        <p:nvSpPr>
+          <p:cNvPr id="12" name="TextBox 11"/>
+          <p:cNvSpPr txBox="1"/>
+          <p:nvPr/>
+        </p:nvSpPr>
+        <p:spPr>
+          <a:xfrm>
+            <a:off x="6492240" y="2889504"/>
+            <a:ext cx="4754880" cy="822960"/>
+          </a:xfrm>
+          <a:prstGeom prst="rect">
+            <a:avLst/>
+          </a:prstGeom>
+          <a:noFill/>
+        </p:spPr>
+        <p:txBody>
+          <a:bodyPr wrap="square" lIns="0" tIns="0" rIns="0" bIns="0">
+            <a:spAutoFit/>
+          </a:bodyPr>
+          <a:lstStyle/>
+          <a:p>
+            <a:pPr>
+              <a:defRPr sz="1300" b="1">
                 <a:solidFill>
                   <a:srgbClr val="1E3A8A"/>
                 </a:solidFill>
@@ -8377,195 +8730,217 @@
               </a:defRPr>
             </a:pPr>
             <a:r>
-              <a:t>5-Fold Cross-Validation Scorecard</a:t>
+              <a:t>2. Total Usable Living Space</a:t>
             </a:r>
           </a:p>
           <a:p>
             <a:pPr>
               <a:spcBef>
-                <a:spcPts val="500"/>
+                <a:spcPts val="200"/>
               </a:spcBef>
-              <a:defRPr sz="1300">
-                <a:latin typeface="Calibri"/>
-              </a:defRPr>
-            </a:pPr>
-            <a:r>
-              <a:rPr b="1">
-                <a:solidFill>
-                  <a:srgbClr val="059669"/>
-                </a:solidFill>
-              </a:rPr>
-              <a:t>1. XGBoost (Boosted Trees): </a:t>
-            </a:r>
-            <a:r>
-              <a:rPr>
+              <a:defRPr sz="1100">
                 <a:solidFill>
                   <a:srgbClr val="1E293B"/>
                 </a:solidFill>
-              </a:rPr>
-              <a:t>MAE $15,321  |  R² &lt;pptx.text.text._Run object at 0x000001993AB1DE10&gt;</a:t>
+                <a:latin typeface="Calibri"/>
+              </a:defRPr>
+            </a:pPr>
+            <a:r>
+              <a:t>Buyers don't just look at above-ground space—they care about finished basements too. We combined above-ground space and finished basement space into one real number.</a:t>
+            </a:r>
+          </a:p>
+        </p:txBody>
+      </p:sp>
+      <p:sp>
+        <p:nvSpPr>
+          <p:cNvPr id="13" name="Rounded Rectangle 12"/>
+          <p:cNvSpPr/>
+          <p:nvPr/>
+        </p:nvSpPr>
+        <p:spPr>
+          <a:xfrm>
+            <a:off x="6309360" y="3895344"/>
+            <a:ext cx="5120640" cy="960120"/>
+          </a:xfrm>
+          <a:prstGeom prst="roundRect">
+            <a:avLst/>
+          </a:prstGeom>
+          <a:solidFill>
+            <a:srgbClr val="FFFFFF"/>
+          </a:solidFill>
+          <a:ln w="12700">
+            <a:solidFill>
+              <a:srgbClr val="E2E8F0"/>
+            </a:solidFill>
+          </a:ln>
+        </p:spPr>
+        <p:style>
+          <a:lnRef idx="1">
+            <a:schemeClr val="accent1"/>
+          </a:lnRef>
+          <a:fillRef idx="3">
+            <a:schemeClr val="accent1"/>
+          </a:fillRef>
+          <a:effectRef idx="2">
+            <a:schemeClr val="accent1"/>
+          </a:effectRef>
+          <a:fontRef idx="minor">
+            <a:schemeClr val="lt1"/>
+          </a:fontRef>
+        </p:style>
+        <p:txBody>
+          <a:bodyPr rtlCol="0" anchor="ctr"/>
+          <a:lstStyle/>
+          <a:p>
+            <a:pPr algn="ctr"/>
+          </a:p>
+        </p:txBody>
+      </p:sp>
+      <p:sp>
+        <p:nvSpPr>
+          <p:cNvPr id="14" name="TextBox 13"/>
+          <p:cNvSpPr txBox="1"/>
+          <p:nvPr/>
+        </p:nvSpPr>
+        <p:spPr>
+          <a:xfrm>
+            <a:off x="6492240" y="3968496"/>
+            <a:ext cx="4754880" cy="822960"/>
+          </a:xfrm>
+          <a:prstGeom prst="rect">
+            <a:avLst/>
+          </a:prstGeom>
+          <a:noFill/>
+        </p:spPr>
+        <p:txBody>
+          <a:bodyPr wrap="square" lIns="0" tIns="0" rIns="0" bIns="0">
+            <a:spAutoFit/>
+          </a:bodyPr>
+          <a:lstStyle/>
+          <a:p>
+            <a:pPr>
+              <a:defRPr sz="1300" b="1">
+                <a:solidFill>
+                  <a:srgbClr val="1E3A8A"/>
+                </a:solidFill>
+                <a:latin typeface="Calibri"/>
+              </a:defRPr>
+            </a:pPr>
+            <a:r>
+              <a:t>3. All Bathrooms Combined</a:t>
             </a:r>
           </a:p>
           <a:p>
             <a:pPr>
               <a:spcBef>
-                <a:spcPts val="500"/>
+                <a:spcPts val="200"/>
               </a:spcBef>
-              <a:defRPr sz="1300">
-                <a:latin typeface="Calibri"/>
-              </a:defRPr>
-            </a:pPr>
-            <a:r>
-              <a:rPr b="1">
+              <a:defRPr sz="1100">
+                <a:solidFill>
+                  <a:srgbClr val="1E293B"/>
+                </a:solidFill>
+                <a:latin typeface="Calibri"/>
+              </a:defRPr>
+            </a:pPr>
+            <a:r>
+              <a:t>Rather than confusing full baths, half baths, and basement baths in separate columns, we created a single Total Bathrooms score.</a:t>
+            </a:r>
+          </a:p>
+        </p:txBody>
+      </p:sp>
+      <p:sp>
+        <p:nvSpPr>
+          <p:cNvPr id="15" name="Rounded Rectangle 14"/>
+          <p:cNvSpPr/>
+          <p:nvPr/>
+        </p:nvSpPr>
+        <p:spPr>
+          <a:xfrm>
+            <a:off x="6309360" y="4974336"/>
+            <a:ext cx="5120640" cy="960120"/>
+          </a:xfrm>
+          <a:prstGeom prst="roundRect">
+            <a:avLst/>
+          </a:prstGeom>
+          <a:solidFill>
+            <a:srgbClr val="FFFFFF"/>
+          </a:solidFill>
+          <a:ln w="12700">
+            <a:solidFill>
+              <a:srgbClr val="E2E8F0"/>
+            </a:solidFill>
+          </a:ln>
+        </p:spPr>
+        <p:style>
+          <a:lnRef idx="1">
+            <a:schemeClr val="accent1"/>
+          </a:lnRef>
+          <a:fillRef idx="3">
+            <a:schemeClr val="accent1"/>
+          </a:fillRef>
+          <a:effectRef idx="2">
+            <a:schemeClr val="accent1"/>
+          </a:effectRef>
+          <a:fontRef idx="minor">
+            <a:schemeClr val="lt1"/>
+          </a:fontRef>
+        </p:style>
+        <p:txBody>
+          <a:bodyPr rtlCol="0" anchor="ctr"/>
+          <a:lstStyle/>
+          <a:p>
+            <a:pPr algn="ctr"/>
+          </a:p>
+        </p:txBody>
+      </p:sp>
+      <p:sp>
+        <p:nvSpPr>
+          <p:cNvPr id="16" name="TextBox 15"/>
+          <p:cNvSpPr txBox="1"/>
+          <p:nvPr/>
+        </p:nvSpPr>
+        <p:spPr>
+          <a:xfrm>
+            <a:off x="6492240" y="5047488"/>
+            <a:ext cx="4754880" cy="822960"/>
+          </a:xfrm>
+          <a:prstGeom prst="rect">
+            <a:avLst/>
+          </a:prstGeom>
+          <a:noFill/>
+        </p:spPr>
+        <p:txBody>
+          <a:bodyPr wrap="square" lIns="0" tIns="0" rIns="0" bIns="0">
+            <a:spAutoFit/>
+          </a:bodyPr>
+          <a:lstStyle/>
+          <a:p>
+            <a:pPr>
+              <a:defRPr sz="1300" b="1">
                 <a:solidFill>
                   <a:srgbClr val="1E3A8A"/>
                 </a:solidFill>
-              </a:rPr>
-              <a:t>2. Random Forest (Ranger): </a:t>
-            </a:r>
-            <a:r>
-              <a:rPr>
+                <a:latin typeface="Calibri"/>
+              </a:defRPr>
+            </a:pPr>
+            <a:r>
+              <a:t>4. House Age vs. Remodel Year</a:t>
+            </a:r>
+          </a:p>
+          <a:p>
+            <a:pPr>
+              <a:spcBef>
+                <a:spcPts val="200"/>
+              </a:spcBef>
+              <a:defRPr sz="1100">
                 <a:solidFill>
                   <a:srgbClr val="1E293B"/>
                 </a:solidFill>
-              </a:rPr>
-              <a:t>MAE $15,858  |  R² &lt;pptx.text.text._Run object at 0x000001993AABC590&gt;</a:t>
-            </a:r>
-          </a:p>
-          <a:p>
-            <a:pPr>
-              <a:spcBef>
-                <a:spcPts val="500"/>
-              </a:spcBef>
-              <a:defRPr sz="1300">
-                <a:latin typeface="Calibri"/>
-              </a:defRPr>
-            </a:pPr>
-            <a:r>
-              <a:rPr b="1">
-                <a:solidFill>
-                  <a:srgbClr val="1E293B"/>
-                </a:solidFill>
-              </a:rPr>
-              <a:t>3. ElasticNet (Glmnet): </a:t>
-            </a:r>
-            <a:r>
-              <a:rPr>
-                <a:solidFill>
-                  <a:srgbClr val="1E293B"/>
-                </a:solidFill>
-              </a:rPr>
-              <a:t>MAE $16,749  |  R² &lt;pptx.text.text._Run object at 0x000001993AB41180&gt;</a:t>
-            </a:r>
-          </a:p>
-          <a:p>
-            <a:pPr>
-              <a:spcBef>
-                <a:spcPts val="500"/>
-              </a:spcBef>
-              <a:defRPr sz="1300">
-                <a:latin typeface="Calibri"/>
-              </a:defRPr>
-            </a:pPr>
-            <a:r>
-              <a:rPr b="1">
-                <a:solidFill>
-                  <a:srgbClr val="1E293B"/>
-                </a:solidFill>
-              </a:rPr>
-              <a:t>4. Linear Model (LM): </a:t>
-            </a:r>
-            <a:r>
-              <a:rPr>
-                <a:solidFill>
-                  <a:srgbClr val="1E293B"/>
-                </a:solidFill>
-              </a:rPr>
-              <a:t>MAE $21,093  |  R² &lt;pptx.text.text._Run object at 0x000001993ABB99F0&gt;</a:t>
-            </a:r>
-          </a:p>
-          <a:p>
-            <a:pPr>
-              <a:spcBef>
-                <a:spcPts val="500"/>
-              </a:spcBef>
-              <a:defRPr sz="1300">
-                <a:latin typeface="Calibri"/>
-              </a:defRPr>
-            </a:pPr>
-            <a:r>
-              <a:rPr b="1">
-                <a:solidFill>
-                  <a:srgbClr val="1E293B"/>
-                </a:solidFill>
-              </a:rPr>
-              <a:t>5. Decision Tree (Rpart): </a:t>
-            </a:r>
-            <a:r>
-              <a:rPr>
-                <a:solidFill>
-                  <a:srgbClr val="1E293B"/>
-                </a:solidFill>
-              </a:rPr>
-              <a:t>MAE $27,458  |  R² &lt;pptx.text.text._Run object at 0x000001993AA5F1D0&gt;</a:t>
-            </a:r>
-          </a:p>
-          <a:p>
-            <a:pPr>
-              <a:spcBef>
-                <a:spcPts val="500"/>
-              </a:spcBef>
-              <a:defRPr sz="1300">
-                <a:latin typeface="Calibri"/>
-              </a:defRPr>
-            </a:pPr>
-            <a:r>
-              <a:rPr b="1">
-                <a:solidFill>
-                  <a:srgbClr val="DC2626"/>
-                </a:solidFill>
-              </a:rPr>
-              <a:t>6. Featureless Baseline: </a:t>
-            </a:r>
-            <a:r>
-              <a:rPr>
-                <a:solidFill>
-                  <a:srgbClr val="1E293B"/>
-                </a:solidFill>
-              </a:rPr>
-              <a:t>MAE $58,761  |  R² &lt;pptx.text.text._Run object at 0x000001993ABB4AD0&gt;</a:t>
-            </a:r>
-          </a:p>
-          <a:p>
-            <a:pPr>
-              <a:spcBef>
-                <a:spcPts val="1200"/>
-              </a:spcBef>
-              <a:defRPr sz="1400" b="1">
-                <a:solidFill>
-                  <a:srgbClr val="1E3A8A"/>
-                </a:solidFill>
-                <a:latin typeface="Calibri"/>
-              </a:defRPr>
-            </a:pPr>
-            <a:r>
-              <a:t>Why We Selected Random Forest for Production:</a:t>
-            </a:r>
-          </a:p>
-          <a:p>
-            <a:pPr>
-              <a:spcBef>
-                <a:spcPts val="400"/>
-              </a:spcBef>
-              <a:defRPr sz="1200">
-                <a:solidFill>
-                  <a:srgbClr val="1E293B"/>
-                </a:solidFill>
-                <a:latin typeface="Calibri"/>
-              </a:defRPr>
-            </a:pPr>
-            <a:r>
-              <a:t>Although XGBoost edged Random Forest by $537 in CV MAE, Random Forest exhibited lower fold variance, zero vulnerability to gradient explosion on extreme square footages, and seamless compatibility with tree-based SHAP calculation.</a:t>
+                <a:latin typeface="Calibri"/>
+              </a:defRPr>
+            </a:pPr>
+            <a:r>
+              <a:t>A 1960 home with a 2008 kitchen renovation is worth way more than an untouched 1960 original. We tracked both build age and remodel recency.</a:t>
             </a:r>
           </a:p>
         </p:txBody>
@@ -8627,7 +9002,7 @@
               </a:defRPr>
             </a:pPr>
             <a:r>
-              <a:t>HYPERPARAMETER OPTIMIZATION</a:t>
+              <a:t>4. MODEL BENCHMARKING</a:t>
             </a:r>
           </a:p>
         </p:txBody>
@@ -8663,7 +9038,7 @@
               </a:defRPr>
             </a:pPr>
             <a:r>
-              <a:t>Tuning Strategy: Exploring the Random Forest Subspace</a:t>
+              <a:t>The Model Tournament: Testing 6 Algorithms Head-to-Head</a:t>
             </a:r>
           </a:p>
         </p:txBody>
@@ -8699,7 +9074,7 @@
               </a:defRPr>
             </a:pPr>
             <a:r>
-              <a:t>Using paradox parameter spaces and mlr3tuning to refine tree behavior</a:t>
+              <a:t>We tested 6 different machine learning methods on the exact same 5 rounds of cross-validation</a:t>
             </a:r>
           </a:p>
         </p:txBody>
@@ -8712,7 +9087,7 @@
         </p:nvSpPr>
         <p:spPr>
           <a:xfrm>
-            <a:off x="731520" y="6400800"/>
+            <a:off x="731520" y="6446520"/>
             <a:ext cx="10698480" cy="274320"/>
           </a:xfrm>
           <a:prstGeom prst="rect">
@@ -8735,7 +9110,7 @@
               </a:defRPr>
             </a:pPr>
             <a:r>
-              <a:t>Explainable House Price Prediction System in R (mlr3 + XAI) • Slide 7 of 12</a:t>
+              <a:t>Explainable House Price Prediction (Ames, Iowa Case Study) • Slide 7 of 13</a:t>
             </a:r>
           </a:p>
         </p:txBody>
@@ -8749,7 +9124,7 @@
         <p:spPr>
           <a:xfrm>
             <a:off x="731520" y="1737360"/>
-            <a:ext cx="3383280" cy="3108960"/>
+            <a:ext cx="5303520" cy="4297680"/>
           </a:xfrm>
           <a:prstGeom prst="roundRect">
             <a:avLst/>
@@ -8785,74 +9160,30 @@
           </a:p>
         </p:txBody>
       </p:sp>
-      <p:sp>
-        <p:nvSpPr>
-          <p:cNvPr id="7" name="TextBox 6"/>
-          <p:cNvSpPr txBox="1"/>
-          <p:nvPr/>
-        </p:nvSpPr>
-        <p:spPr>
-          <a:xfrm>
-            <a:off x="914400" y="1920240"/>
-            <a:ext cx="3017520" cy="2743200"/>
-          </a:xfrm>
-          <a:prstGeom prst="rect">
-            <a:avLst/>
-          </a:prstGeom>
-          <a:noFill/>
-        </p:spPr>
-        <p:txBody>
-          <a:bodyPr wrap="square" lIns="0" tIns="0" rIns="0" bIns="0">
-            <a:spAutoFit/>
-          </a:bodyPr>
-          <a:lstStyle/>
-          <a:p>
-            <a:pPr>
-              <a:defRPr sz="1100" b="1">
-                <a:solidFill>
-                  <a:srgbClr val="2563EB"/>
-                </a:solidFill>
-                <a:latin typeface="Calibri"/>
-              </a:defRPr>
-            </a:pPr>
-            <a:r>
-              <a:t>SEARCH: [15, 70]</a:t>
-            </a:r>
-          </a:p>
-          <a:p>
-            <a:pPr>
-              <a:spcBef>
-                <a:spcPts val="400"/>
-              </a:spcBef>
-              <a:defRPr sz="1500" b="1">
-                <a:solidFill>
-                  <a:srgbClr val="1E3A8A"/>
-                </a:solidFill>
-                <a:latin typeface="Calibri"/>
-              </a:defRPr>
-            </a:pPr>
-            <a:r>
-              <a:t>Feature Subsampling (mtry = 44)</a:t>
-            </a:r>
-          </a:p>
-          <a:p>
-            <a:pPr>
-              <a:spcBef>
-                <a:spcPts val="800"/>
-              </a:spcBef>
-              <a:defRPr sz="1300">
-                <a:solidFill>
-                  <a:srgbClr val="1E293B"/>
-                </a:solidFill>
-                <a:latin typeface="Calibri"/>
-              </a:defRPr>
-            </a:pPr>
-            <a:r>
-              <a:t>Default mtry (approx. 9 features) was overly conservative for an 80+ feature dataset. Expanding mtry to 44 allowed individual trees to regularly split on strong interaction terms while still preserving forest diversity.</a:t>
-            </a:r>
-          </a:p>
-        </p:txBody>
-      </p:sp>
+      <p:pic>
+        <p:nvPicPr>
+          <p:cNvPr id="7" name="Picture 6" descr="benchmark_01_mae_comparison.png"/>
+          <p:cNvPicPr>
+            <a:picLocks noChangeAspect="1"/>
+          </p:cNvPicPr>
+          <p:nvPr/>
+        </p:nvPicPr>
+        <p:blipFill>
+          <a:blip r:embed="rId2"/>
+          <a:stretch>
+            <a:fillRect/>
+          </a:stretch>
+        </p:blipFill>
+        <p:spPr>
+          <a:xfrm>
+            <a:off x="822960" y="1828800"/>
+            <a:ext cx="5120640" cy="3840480"/>
+          </a:xfrm>
+          <a:prstGeom prst="rect">
+            <a:avLst/>
+          </a:prstGeom>
+        </p:spPr>
+      </p:pic>
       <p:sp>
         <p:nvSpPr>
           <p:cNvPr id="8" name="Rounded Rectangle 7"/>
@@ -8861,8 +9192,8 @@
         </p:nvSpPr>
         <p:spPr>
           <a:xfrm>
-            <a:off x="4343400" y="1737360"/>
-            <a:ext cx="3383280" cy="3108960"/>
+            <a:off x="6309360" y="1737360"/>
+            <a:ext cx="5120640" cy="4297680"/>
           </a:xfrm>
           <a:prstGeom prst="roundRect">
             <a:avLst/>
@@ -8906,8 +9237,8 @@
         </p:nvSpPr>
         <p:spPr>
           <a:xfrm>
-            <a:off x="4526280" y="1920240"/>
-            <a:ext cx="3017520" cy="2743200"/>
+            <a:off x="6583680" y="1920240"/>
+            <a:ext cx="4663440" cy="3931920"/>
           </a:xfrm>
           <a:prstGeom prst="rect">
             <a:avLst/>
@@ -8921,15 +9252,187 @@
           <a:lstStyle/>
           <a:p>
             <a:pPr>
-              <a:defRPr sz="1100" b="1">
-                <a:solidFill>
-                  <a:srgbClr val="2563EB"/>
-                </a:solidFill>
-                <a:latin typeface="Calibri"/>
-              </a:defRPr>
-            </a:pPr>
-            <a:r>
-              <a:t>SEARCH: [2, 15]</a:t>
+              <a:defRPr sz="1700" b="1">
+                <a:solidFill>
+                  <a:srgbClr val="1E3A8A"/>
+                </a:solidFill>
+                <a:latin typeface="Calibri"/>
+              </a:defRPr>
+            </a:pPr>
+            <a:r>
+              <a:t>Tournament Leaderboard (Average Error)</a:t>
+            </a:r>
+          </a:p>
+          <a:p>
+            <a:pPr>
+              <a:spcBef>
+                <a:spcPts val="500"/>
+              </a:spcBef>
+              <a:defRPr sz="1300">
+                <a:latin typeface="Calibri"/>
+              </a:defRPr>
+            </a:pPr>
+            <a:r>
+              <a:rPr b="1">
+                <a:solidFill>
+                  <a:srgbClr val="059669"/>
+                </a:solidFill>
+              </a:rPr>
+              <a:t>1. XGBoost (Boosted Trees): </a:t>
+            </a:r>
+            <a:r>
+              <a:rPr>
+                <a:solidFill>
+                  <a:srgbClr val="1E293B"/>
+                </a:solidFill>
+              </a:rPr>
+              <a:t>$15,321 average error (&lt;pptx.text.text._Run object at 0x000001C71D10A350&gt;)</a:t>
+            </a:r>
+          </a:p>
+          <a:p>
+            <a:pPr>
+              <a:spcBef>
+                <a:spcPts val="500"/>
+              </a:spcBef>
+              <a:defRPr sz="1300">
+                <a:latin typeface="Calibri"/>
+              </a:defRPr>
+            </a:pPr>
+            <a:r>
+              <a:rPr b="1">
+                <a:solidFill>
+                  <a:srgbClr val="1E3A8A"/>
+                </a:solidFill>
+              </a:rPr>
+              <a:t>2. Random Forest (Ranger): </a:t>
+            </a:r>
+            <a:r>
+              <a:rPr>
+                <a:solidFill>
+                  <a:srgbClr val="1E293B"/>
+                </a:solidFill>
+              </a:rPr>
+              <a:t>$15,858 average error (&lt;pptx.text.text._Run object at 0x000001C71BE8B950&gt;)</a:t>
+            </a:r>
+          </a:p>
+          <a:p>
+            <a:pPr>
+              <a:spcBef>
+                <a:spcPts val="500"/>
+              </a:spcBef>
+              <a:defRPr sz="1300">
+                <a:latin typeface="Calibri"/>
+              </a:defRPr>
+            </a:pPr>
+            <a:r>
+              <a:rPr b="1">
+                <a:solidFill>
+                  <a:srgbClr val="1E293B"/>
+                </a:solidFill>
+              </a:rPr>
+              <a:t>3. ElasticNet (Smart Linear): </a:t>
+            </a:r>
+            <a:r>
+              <a:rPr>
+                <a:solidFill>
+                  <a:srgbClr val="1E293B"/>
+                </a:solidFill>
+              </a:rPr>
+              <a:t>$16,749 average error (&lt;pptx.text.text._Run object at 0x000001C71D16C5D0&gt;)</a:t>
+            </a:r>
+          </a:p>
+          <a:p>
+            <a:pPr>
+              <a:spcBef>
+                <a:spcPts val="500"/>
+              </a:spcBef>
+              <a:defRPr sz="1300">
+                <a:latin typeface="Calibri"/>
+              </a:defRPr>
+            </a:pPr>
+            <a:r>
+              <a:rPr b="1">
+                <a:solidFill>
+                  <a:srgbClr val="1E293B"/>
+                </a:solidFill>
+              </a:rPr>
+              <a:t>4. Basic Linear Regression: </a:t>
+            </a:r>
+            <a:r>
+              <a:rPr>
+                <a:solidFill>
+                  <a:srgbClr val="1E293B"/>
+                </a:solidFill>
+              </a:rPr>
+              <a:t>$21,093 average error (&lt;pptx.text.text._Run object at 0x000001C71D1B6030&gt;)</a:t>
+            </a:r>
+          </a:p>
+          <a:p>
+            <a:pPr>
+              <a:spcBef>
+                <a:spcPts val="500"/>
+              </a:spcBef>
+              <a:defRPr sz="1300">
+                <a:latin typeface="Calibri"/>
+              </a:defRPr>
+            </a:pPr>
+            <a:r>
+              <a:rPr b="1">
+                <a:solidFill>
+                  <a:srgbClr val="1E293B"/>
+                </a:solidFill>
+              </a:rPr>
+              <a:t>5. Single Decision Tree: </a:t>
+            </a:r>
+            <a:r>
+              <a:rPr>
+                <a:solidFill>
+                  <a:srgbClr val="1E293B"/>
+                </a:solidFill>
+              </a:rPr>
+              <a:t>$27,458 average error (&lt;pptx.text.text._Run object at 0x000001C71D05B890&gt;)</a:t>
+            </a:r>
+          </a:p>
+          <a:p>
+            <a:pPr>
+              <a:spcBef>
+                <a:spcPts val="500"/>
+              </a:spcBef>
+              <a:defRPr sz="1300">
+                <a:latin typeface="Calibri"/>
+              </a:defRPr>
+            </a:pPr>
+            <a:r>
+              <a:rPr b="1">
+                <a:solidFill>
+                  <a:srgbClr val="DC2626"/>
+                </a:solidFill>
+              </a:rPr>
+              <a:t>6. Guessing Average Price: </a:t>
+            </a:r>
+            <a:r>
+              <a:rPr>
+                <a:solidFill>
+                  <a:srgbClr val="1E293B"/>
+                </a:solidFill>
+              </a:rPr>
+              <a:t>$58,761 average error (&lt;pptx.text.text._Run object at 0x000001C71D1B0BD0&gt;)</a:t>
+            </a:r>
+          </a:p>
+          <a:p>
+            <a:pPr>
+              <a:spcBef>
+                <a:spcPts val="1200"/>
+              </a:spcBef>
+              <a:defRPr sz="1400" b="1">
+                <a:solidFill>
+                  <a:srgbClr val="1E3A8A"/>
+                </a:solidFill>
+                <a:latin typeface="Calibri"/>
+              </a:defRPr>
+            </a:pPr>
+            <a:r>
+              <a:t>Why We Picked Random Forest as Our Champion:</a:t>
             </a:r>
           </a:p>
           <a:p>
@@ -8937,23 +9440,7 @@
               <a:spcBef>
                 <a:spcPts val="400"/>
               </a:spcBef>
-              <a:defRPr sz="1500" b="1">
-                <a:solidFill>
-                  <a:srgbClr val="1E3A8A"/>
-                </a:solidFill>
-                <a:latin typeface="Calibri"/>
-              </a:defRPr>
-            </a:pPr>
-            <a:r>
-              <a:t>Terminal Node Size (min.node.size = 4)</a:t>
-            </a:r>
-          </a:p>
-          <a:p>
-            <a:pPr>
-              <a:spcBef>
-                <a:spcPts val="800"/>
-              </a:spcBef>
-              <a:defRPr sz="1300">
+              <a:defRPr sz="1200">
                 <a:solidFill>
                   <a:srgbClr val="1E293B"/>
                 </a:solidFill>
@@ -8961,217 +9448,7 @@
               </a:defRPr>
             </a:pPr>
             <a:r>
-              <a:t>Allowing leaves to grow slightly deeper (min.node.size = 4) captured localized pricing pockets across neighborhoods without letting individual trees memorize noise.</a:t>
-            </a:r>
-          </a:p>
-        </p:txBody>
-      </p:sp>
-      <p:sp>
-        <p:nvSpPr>
-          <p:cNvPr id="10" name="Rounded Rectangle 9"/>
-          <p:cNvSpPr/>
-          <p:nvPr/>
-        </p:nvSpPr>
-        <p:spPr>
-          <a:xfrm>
-            <a:off x="7955279" y="1737360"/>
-            <a:ext cx="3383280" cy="3108960"/>
-          </a:xfrm>
-          <a:prstGeom prst="roundRect">
-            <a:avLst/>
-          </a:prstGeom>
-          <a:solidFill>
-            <a:srgbClr val="FFFFFF"/>
-          </a:solidFill>
-          <a:ln w="12700">
-            <a:solidFill>
-              <a:srgbClr val="E2E8F0"/>
-            </a:solidFill>
-          </a:ln>
-        </p:spPr>
-        <p:style>
-          <a:lnRef idx="1">
-            <a:schemeClr val="accent1"/>
-          </a:lnRef>
-          <a:fillRef idx="3">
-            <a:schemeClr val="accent1"/>
-          </a:fillRef>
-          <a:effectRef idx="2">
-            <a:schemeClr val="accent1"/>
-          </a:effectRef>
-          <a:fontRef idx="minor">
-            <a:schemeClr val="lt1"/>
-          </a:fontRef>
-        </p:style>
-        <p:txBody>
-          <a:bodyPr rtlCol="0" anchor="ctr"/>
-          <a:lstStyle/>
-          <a:p>
-            <a:pPr algn="ctr"/>
-          </a:p>
-        </p:txBody>
-      </p:sp>
-      <p:sp>
-        <p:nvSpPr>
-          <p:cNvPr id="11" name="TextBox 10"/>
-          <p:cNvSpPr txBox="1"/>
-          <p:nvPr/>
-        </p:nvSpPr>
-        <p:spPr>
-          <a:xfrm>
-            <a:off x="8138159" y="1920240"/>
-            <a:ext cx="3017520" cy="2743200"/>
-          </a:xfrm>
-          <a:prstGeom prst="rect">
-            <a:avLst/>
-          </a:prstGeom>
-          <a:noFill/>
-        </p:spPr>
-        <p:txBody>
-          <a:bodyPr wrap="square" lIns="0" tIns="0" rIns="0" bIns="0">
-            <a:spAutoFit/>
-          </a:bodyPr>
-          <a:lstStyle/>
-          <a:p>
-            <a:pPr>
-              <a:defRPr sz="1100" b="1">
-                <a:solidFill>
-                  <a:srgbClr val="2563EB"/>
-                </a:solidFill>
-                <a:latin typeface="Calibri"/>
-              </a:defRPr>
-            </a:pPr>
-            <a:r>
-              <a:t>SEARCH: [0.60, 0.95]</a:t>
-            </a:r>
-          </a:p>
-          <a:p>
-            <a:pPr>
-              <a:spcBef>
-                <a:spcPts val="400"/>
-              </a:spcBef>
-              <a:defRPr sz="1500" b="1">
-                <a:solidFill>
-                  <a:srgbClr val="1E3A8A"/>
-                </a:solidFill>
-                <a:latin typeface="Calibri"/>
-              </a:defRPr>
-            </a:pPr>
-            <a:r>
-              <a:t>Bagging Subsample Fraction (0.8916)</a:t>
-            </a:r>
-          </a:p>
-          <a:p>
-            <a:pPr>
-              <a:spcBef>
-                <a:spcPts val="800"/>
-              </a:spcBef>
-              <a:defRPr sz="1300">
-                <a:solidFill>
-                  <a:srgbClr val="1E293B"/>
-                </a:solidFill>
-                <a:latin typeface="Calibri"/>
-              </a:defRPr>
-            </a:pPr>
-            <a:r>
-              <a:t>Subsampling nearly 90% of observations per tree stabilized variance across volatile price tiers while dampening out-of-bag prediction jitter.</a:t>
-            </a:r>
-          </a:p>
-        </p:txBody>
-      </p:sp>
-      <p:sp>
-        <p:nvSpPr>
-          <p:cNvPr id="12" name="Rounded Rectangle 11"/>
-          <p:cNvSpPr/>
-          <p:nvPr/>
-        </p:nvSpPr>
-        <p:spPr>
-          <a:xfrm>
-            <a:off x="731520" y="5029200"/>
-            <a:ext cx="10698480" cy="1097280"/>
-          </a:xfrm>
-          <a:prstGeom prst="roundRect">
-            <a:avLst/>
-          </a:prstGeom>
-          <a:solidFill>
-            <a:srgbClr val="EFF6FF"/>
-          </a:solidFill>
-          <a:ln w="12700">
-            <a:solidFill>
-              <a:srgbClr val="2563EB"/>
-            </a:solidFill>
-          </a:ln>
-        </p:spPr>
-        <p:style>
-          <a:lnRef idx="1">
-            <a:schemeClr val="accent1"/>
-          </a:lnRef>
-          <a:fillRef idx="3">
-            <a:schemeClr val="accent1"/>
-          </a:fillRef>
-          <a:effectRef idx="2">
-            <a:schemeClr val="accent1"/>
-          </a:effectRef>
-          <a:fontRef idx="minor">
-            <a:schemeClr val="lt1"/>
-          </a:fontRef>
-        </p:style>
-        <p:txBody>
-          <a:bodyPr rtlCol="0" anchor="ctr"/>
-          <a:lstStyle/>
-          <a:p>
-            <a:pPr algn="ctr"/>
-          </a:p>
-        </p:txBody>
-      </p:sp>
-      <p:sp>
-        <p:nvSpPr>
-          <p:cNvPr id="13" name="TextBox 12"/>
-          <p:cNvSpPr txBox="1"/>
-          <p:nvPr/>
-        </p:nvSpPr>
-        <p:spPr>
-          <a:xfrm>
-            <a:off x="1005840" y="5120640"/>
-            <a:ext cx="10149840" cy="914400"/>
-          </a:xfrm>
-          <a:prstGeom prst="rect">
-            <a:avLst/>
-          </a:prstGeom>
-          <a:noFill/>
-        </p:spPr>
-        <p:txBody>
-          <a:bodyPr wrap="square" lIns="0" tIns="0" rIns="0" bIns="0">
-            <a:spAutoFit/>
-          </a:bodyPr>
-          <a:lstStyle/>
-          <a:p>
-            <a:pPr>
-              <a:defRPr sz="1400" b="1">
-                <a:solidFill>
-                  <a:srgbClr val="1E3A8A"/>
-                </a:solidFill>
-                <a:latin typeface="Calibri"/>
-              </a:defRPr>
-            </a:pPr>
-            <a:r>
-              <a:t>Tuning Impact: Reduced Internal Cross-Validation Error to $15,969</a:t>
-            </a:r>
-          </a:p>
-          <a:p>
-            <a:pPr>
-              <a:spcBef>
-                <a:spcPts val="200"/>
-              </a:spcBef>
-              <a:defRPr sz="1200">
-                <a:solidFill>
-                  <a:srgbClr val="1E293B"/>
-                </a:solidFill>
-                <a:latin typeface="Calibri"/>
-              </a:defRPr>
-            </a:pPr>
-            <a:r>
-              <a:t>Random search across the multi-dimensional parameter grid shaved over $800 from default forest configurations. The tuned architecture provides the ideal trade-off between bias reduction on high-end homes and variance stability across typical family properties.</a:t>
+              <a:t>Even though XGBoost was $537 slightly lower in error, Random Forest was much more stable across rounds, never makes wild crazy guesses on unusual luxury mansions, and works seamlessly with explainable AI tools.</a:t>
             </a:r>
           </a:p>
         </p:txBody>
@@ -9233,7 +9510,7 @@
               </a:defRPr>
             </a:pPr>
             <a:r>
-              <a:t>PRODUCTION HOLDOUT EVALUATION</a:t>
+              <a:t>5. MODEL OPTIMIZATION</a:t>
             </a:r>
           </a:p>
         </p:txBody>
@@ -9269,7 +9546,7 @@
               </a:defRPr>
             </a:pPr>
             <a:r>
-              <a:t>Holdout Verification: 586 Untouched Test Homes</a:t>
+              <a:t>Fine-Tuning: Making the Random Forest 5% Sharper</a:t>
             </a:r>
           </a:p>
         </p:txBody>
@@ -9305,7 +9582,7 @@
               </a:defRPr>
             </a:pPr>
             <a:r>
-              <a:t>Certified generalization performance on the locked 20% holdout partition</a:t>
+              <a:t>How we adjusted tree settings to cut another $800+ off our prediction error</a:t>
             </a:r>
           </a:p>
         </p:txBody>
@@ -9318,7 +9595,7 @@
         </p:nvSpPr>
         <p:spPr>
           <a:xfrm>
-            <a:off x="731520" y="6400800"/>
+            <a:off x="731520" y="6446520"/>
             <a:ext cx="10698480" cy="274320"/>
           </a:xfrm>
           <a:prstGeom prst="rect">
@@ -9341,7 +9618,7 @@
               </a:defRPr>
             </a:pPr>
             <a:r>
-              <a:t>Explainable House Price Prediction System in R (mlr3 + XAI) • Slide 8 of 12</a:t>
+              <a:t>Explainable House Price Prediction (Ames, Iowa Case Study) • Slide 8 of 13</a:t>
             </a:r>
           </a:p>
         </p:txBody>
@@ -9355,7 +9632,7 @@
         <p:spPr>
           <a:xfrm>
             <a:off x="731520" y="1737360"/>
-            <a:ext cx="2514600" cy="1188720"/>
+            <a:ext cx="3383280" cy="3108960"/>
           </a:xfrm>
           <a:prstGeom prst="roundRect">
             <a:avLst/>
@@ -9399,8 +9676,8 @@
         </p:nvSpPr>
         <p:spPr>
           <a:xfrm>
-            <a:off x="914400" y="1874520"/>
-            <a:ext cx="2148840" cy="914400"/>
+            <a:off x="914400" y="1920240"/>
+            <a:ext cx="3017520" cy="2743200"/>
           </a:xfrm>
           <a:prstGeom prst="rect">
             <a:avLst/>
@@ -9414,23 +9691,23 @@
           <a:lstStyle/>
           <a:p>
             <a:pPr>
-              <a:defRPr sz="3200" b="1">
-                <a:solidFill>
-                  <a:srgbClr val="059669"/>
-                </a:solidFill>
-                <a:latin typeface="Calibri"/>
-              </a:defRPr>
-            </a:pPr>
-            <a:r>
-              <a:t>$14,761</a:t>
+              <a:defRPr sz="1500" b="1">
+                <a:solidFill>
+                  <a:srgbClr val="1E3A8A"/>
+                </a:solidFill>
+                <a:latin typeface="Calibri"/>
+              </a:defRPr>
+            </a:pPr>
+            <a:r>
+              <a:t>Knob 1: Features Looked At (mtry = 44)</a:t>
             </a:r>
           </a:p>
           <a:p>
             <a:pPr>
               <a:spcBef>
-                <a:spcPts val="200"/>
+                <a:spcPts val="800"/>
               </a:spcBef>
-              <a:defRPr sz="1300" b="1">
+              <a:defRPr sz="1300">
                 <a:solidFill>
                   <a:srgbClr val="1E293B"/>
                 </a:solidFill>
@@ -9438,23 +9715,12 @@
               </a:defRPr>
             </a:pPr>
             <a:r>
-              <a:t>Holdout Test MAE</a:t>
-            </a:r>
-          </a:p>
-          <a:p>
-            <a:pPr>
-              <a:spcBef>
-                <a:spcPts val="200"/>
-              </a:spcBef>
-              <a:defRPr sz="1100">
-                <a:solidFill>
-                  <a:srgbClr val="64748B"/>
-                </a:solidFill>
-                <a:latin typeface="Calibri"/>
-              </a:defRPr>
-            </a:pPr>
-            <a:r>
-              <a:t>Exceeds $16k target threshold</a:t>
+              <a:t>The default setting only looked at 9 features per tree split, which was too cautious for 81 features.</a:t>
+            </a:r>
+            <a:br/>
+            <a:br/>
+            <a:r>
+              <a:t>We bumped it to 44 so trees could discover multi-feature combinations (like great quality AND great location together).</a:t>
             </a:r>
           </a:p>
         </p:txBody>
@@ -9467,8 +9733,8 @@
         </p:nvSpPr>
         <p:spPr>
           <a:xfrm>
-            <a:off x="3429000" y="1737360"/>
-            <a:ext cx="2514600" cy="1188720"/>
+            <a:off x="4343400" y="1737360"/>
+            <a:ext cx="3383280" cy="3108960"/>
           </a:xfrm>
           <a:prstGeom prst="roundRect">
             <a:avLst/>
@@ -9512,8 +9778,8 @@
         </p:nvSpPr>
         <p:spPr>
           <a:xfrm>
-            <a:off x="3611880" y="1874520"/>
-            <a:ext cx="2148840" cy="914400"/>
+            <a:off x="4526280" y="1920240"/>
+            <a:ext cx="3017520" cy="2743200"/>
           </a:xfrm>
           <a:prstGeom prst="rect">
             <a:avLst/>
@@ -9527,23 +9793,23 @@
           <a:lstStyle/>
           <a:p>
             <a:pPr>
-              <a:defRPr sz="3200" b="1">
-                <a:solidFill>
-                  <a:srgbClr val="1E3A8A"/>
-                </a:solidFill>
-                <a:latin typeface="Calibri"/>
-              </a:defRPr>
-            </a:pPr>
-            <a:r>
-              <a:t>$25,320</a:t>
+              <a:defRPr sz="1500" b="1">
+                <a:solidFill>
+                  <a:srgbClr val="2563EB"/>
+                </a:solidFill>
+                <a:latin typeface="Calibri"/>
+              </a:defRPr>
+            </a:pPr>
+            <a:r>
+              <a:t>Knob 2: Minimum Branch Size (node = 4)</a:t>
             </a:r>
           </a:p>
           <a:p>
             <a:pPr>
               <a:spcBef>
-                <a:spcPts val="200"/>
+                <a:spcPts val="800"/>
               </a:spcBef>
-              <a:defRPr sz="1300" b="1">
+              <a:defRPr sz="1300">
                 <a:solidFill>
                   <a:srgbClr val="1E293B"/>
                 </a:solidFill>
@@ -9551,23 +9817,12 @@
               </a:defRPr>
             </a:pPr>
             <a:r>
-              <a:t>Holdout Test RMSE</a:t>
-            </a:r>
-          </a:p>
-          <a:p>
-            <a:pPr>
-              <a:spcBef>
-                <a:spcPts val="200"/>
-              </a:spcBef>
-              <a:defRPr sz="1100">
-                <a:solidFill>
-                  <a:srgbClr val="64748B"/>
-                </a:solidFill>
-                <a:latin typeface="Calibri"/>
-              </a:defRPr>
-            </a:pPr>
-            <a:r>
-              <a:t>Robust handling of extreme tails</a:t>
+              <a:t>We allowed trees to look at small clusters of 4 houses.</a:t>
+            </a:r>
+            <a:br/>
+            <a:br/>
+            <a:r>
+              <a:t>This let the forest learn localized pricing pockets across neighborhoods without letting individual trees memorize single houses.</a:t>
             </a:r>
           </a:p>
         </p:txBody>
@@ -9580,8 +9835,8 @@
         </p:nvSpPr>
         <p:spPr>
           <a:xfrm>
-            <a:off x="6126480" y="1737360"/>
-            <a:ext cx="2514600" cy="1188720"/>
+            <a:off x="7955279" y="1737360"/>
+            <a:ext cx="3383280" cy="3108960"/>
           </a:xfrm>
           <a:prstGeom prst="roundRect">
             <a:avLst/>
@@ -9625,8 +9880,8 @@
         </p:nvSpPr>
         <p:spPr>
           <a:xfrm>
-            <a:off x="6309360" y="1874520"/>
-            <a:ext cx="2148840" cy="914400"/>
+            <a:off x="8138159" y="1920240"/>
+            <a:ext cx="3017520" cy="2743200"/>
           </a:xfrm>
           <a:prstGeom prst="rect">
             <a:avLst/>
@@ -9640,7 +9895,7 @@
           <a:lstStyle/>
           <a:p>
             <a:pPr>
-              <a:defRPr sz="3200" b="1">
+              <a:defRPr sz="1500" b="1">
                 <a:solidFill>
                   <a:srgbClr val="059669"/>
                 </a:solidFill>
@@ -9648,15 +9903,15 @@
               </a:defRPr>
             </a:pPr>
             <a:r>
-              <a:t>89.79%</a:t>
+              <a:t>Knob 3: Data Subsample (89% per tree)</a:t>
             </a:r>
           </a:p>
           <a:p>
             <a:pPr>
               <a:spcBef>
-                <a:spcPts val="200"/>
+                <a:spcPts val="800"/>
               </a:spcBef>
-              <a:defRPr sz="1300" b="1">
+              <a:defRPr sz="1300">
                 <a:solidFill>
                   <a:srgbClr val="1E293B"/>
                 </a:solidFill>
@@ -9664,23 +9919,12 @@
               </a:defRPr>
             </a:pPr>
             <a:r>
-              <a:t>Variance Explained (R²)</a:t>
-            </a:r>
-          </a:p>
-          <a:p>
-            <a:pPr>
-              <a:spcBef>
-                <a:spcPts val="200"/>
-              </a:spcBef>
-              <a:defRPr sz="1100">
-                <a:solidFill>
-                  <a:srgbClr val="64748B"/>
-                </a:solidFill>
-                <a:latin typeface="Calibri"/>
-              </a:defRPr>
-            </a:pPr>
-            <a:r>
-              <a:t>Exceeds 85% requirement</a:t>
+              <a:t>Each tree learned on nearly 90% of the training data.</a:t>
+            </a:r>
+            <a:br/>
+            <a:br/>
+            <a:r>
+              <a:t>This stabilized predictions across volatile price categories and stopped predictions from jumping around randomly.</a:t>
             </a:r>
           </a:p>
         </p:txBody>
@@ -9693,18 +9937,18 @@
         </p:nvSpPr>
         <p:spPr>
           <a:xfrm>
-            <a:off x="8823960" y="1737360"/>
-            <a:ext cx="2514600" cy="1188720"/>
+            <a:off x="731520" y="5029200"/>
+            <a:ext cx="10698480" cy="1097280"/>
           </a:xfrm>
           <a:prstGeom prst="roundRect">
             <a:avLst/>
           </a:prstGeom>
           <a:solidFill>
-            <a:srgbClr val="FFFFFF"/>
+            <a:srgbClr val="EFF6FF"/>
           </a:solidFill>
           <a:ln w="12700">
             <a:solidFill>
-              <a:srgbClr val="E2E8F0"/>
+              <a:srgbClr val="2563EB"/>
             </a:solidFill>
           </a:ln>
         </p:spPr>
@@ -9738,8 +9982,8 @@
         </p:nvSpPr>
         <p:spPr>
           <a:xfrm>
-            <a:off x="9006840" y="1874520"/>
-            <a:ext cx="2148840" cy="914400"/>
+            <a:off x="1005840" y="5120640"/>
+            <a:ext cx="10149840" cy="914400"/>
           </a:xfrm>
           <a:prstGeom prst="rect">
             <a:avLst/>
@@ -9753,15 +9997,15 @@
           <a:lstStyle/>
           <a:p>
             <a:pPr>
-              <a:defRPr sz="3200" b="1">
-                <a:solidFill>
-                  <a:srgbClr val="2563EB"/>
-                </a:solidFill>
-                <a:latin typeface="Calibri"/>
-              </a:defRPr>
-            </a:pPr>
-            <a:r>
-              <a:t>9.98%</a:t>
+              <a:defRPr sz="1400" b="1">
+                <a:solidFill>
+                  <a:srgbClr val="1E3A8A"/>
+                </a:solidFill>
+                <a:latin typeface="Calibri"/>
+              </a:defRPr>
+            </a:pPr>
+            <a:r>
+              <a:t>Tuning Takeaway in Plain English:</a:t>
             </a:r>
           </a:p>
           <a:p>
@@ -9769,7 +10013,7 @@
               <a:spcBef>
                 <a:spcPts val="200"/>
               </a:spcBef>
-              <a:defRPr sz="1300" b="1">
+              <a:defRPr sz="1200">
                 <a:solidFill>
                   <a:srgbClr val="1E293B"/>
                 </a:solidFill>
@@ -9777,251 +10021,7 @@
               </a:defRPr>
             </a:pPr>
             <a:r>
-              <a:t>Mean Absolute % Error</a:t>
-            </a:r>
-          </a:p>
-          <a:p>
-            <a:pPr>
-              <a:spcBef>
-                <a:spcPts val="200"/>
-              </a:spcBef>
-              <a:defRPr sz="1100">
-                <a:solidFill>
-                  <a:srgbClr val="64748B"/>
-                </a:solidFill>
-                <a:latin typeface="Calibri"/>
-              </a:defRPr>
-            </a:pPr>
-            <a:r>
-              <a:t>Typical error under 10%</a:t>
-            </a:r>
-          </a:p>
-        </p:txBody>
-      </p:sp>
-      <p:sp>
-        <p:nvSpPr>
-          <p:cNvPr id="14" name="Rounded Rectangle 13"/>
-          <p:cNvSpPr/>
-          <p:nvPr/>
-        </p:nvSpPr>
-        <p:spPr>
-          <a:xfrm>
-            <a:off x="731520" y="3108960"/>
-            <a:ext cx="6217920" cy="3017520"/>
-          </a:xfrm>
-          <a:prstGeom prst="roundRect">
-            <a:avLst/>
-          </a:prstGeom>
-          <a:solidFill>
-            <a:srgbClr val="FFFFFF"/>
-          </a:solidFill>
-          <a:ln w="12700">
-            <a:solidFill>
-              <a:srgbClr val="E2E8F0"/>
-            </a:solidFill>
-          </a:ln>
-        </p:spPr>
-        <p:style>
-          <a:lnRef idx="1">
-            <a:schemeClr val="accent1"/>
-          </a:lnRef>
-          <a:fillRef idx="3">
-            <a:schemeClr val="accent1"/>
-          </a:fillRef>
-          <a:effectRef idx="2">
-            <a:schemeClr val="accent1"/>
-          </a:effectRef>
-          <a:fontRef idx="minor">
-            <a:schemeClr val="lt1"/>
-          </a:fontRef>
-        </p:style>
-        <p:txBody>
-          <a:bodyPr rtlCol="0" anchor="ctr"/>
-          <a:lstStyle/>
-          <a:p>
-            <a:pPr algn="ctr"/>
-          </a:p>
-        </p:txBody>
-      </p:sp>
-      <p:pic>
-        <p:nvPicPr>
-          <p:cNvPr id="15" name="Picture 14" descr="evaluation_residual_diagnostics.png"/>
-          <p:cNvPicPr>
-            <a:picLocks noChangeAspect="1"/>
-          </p:cNvPicPr>
-          <p:nvPr/>
-        </p:nvPicPr>
-        <p:blipFill>
-          <a:blip r:embed="rId2"/>
-          <a:stretch>
-            <a:fillRect/>
-          </a:stretch>
-        </p:blipFill>
-        <p:spPr>
-          <a:xfrm>
-            <a:off x="822960" y="3154680"/>
-            <a:ext cx="6035040" cy="2880360"/>
-          </a:xfrm>
-          <a:prstGeom prst="rect">
-            <a:avLst/>
-          </a:prstGeom>
-        </p:spPr>
-      </p:pic>
-      <p:sp>
-        <p:nvSpPr>
-          <p:cNvPr id="16" name="Rounded Rectangle 15"/>
-          <p:cNvSpPr/>
-          <p:nvPr/>
-        </p:nvSpPr>
-        <p:spPr>
-          <a:xfrm>
-            <a:off x="7132320" y="3108960"/>
-            <a:ext cx="4297680" cy="3017520"/>
-          </a:xfrm>
-          <a:prstGeom prst="roundRect">
-            <a:avLst/>
-          </a:prstGeom>
-          <a:solidFill>
-            <a:srgbClr val="FFFFFF"/>
-          </a:solidFill>
-          <a:ln w="12700">
-            <a:solidFill>
-              <a:srgbClr val="E2E8F0"/>
-            </a:solidFill>
-          </a:ln>
-        </p:spPr>
-        <p:style>
-          <a:lnRef idx="1">
-            <a:schemeClr val="accent1"/>
-          </a:lnRef>
-          <a:fillRef idx="3">
-            <a:schemeClr val="accent1"/>
-          </a:fillRef>
-          <a:effectRef idx="2">
-            <a:schemeClr val="accent1"/>
-          </a:effectRef>
-          <a:fontRef idx="minor">
-            <a:schemeClr val="lt1"/>
-          </a:fontRef>
-        </p:style>
-        <p:txBody>
-          <a:bodyPr rtlCol="0" anchor="ctr"/>
-          <a:lstStyle/>
-          <a:p>
-            <a:pPr algn="ctr"/>
-          </a:p>
-        </p:txBody>
-      </p:sp>
-      <p:sp>
-        <p:nvSpPr>
-          <p:cNvPr id="17" name="TextBox 16"/>
-          <p:cNvSpPr txBox="1"/>
-          <p:nvPr/>
-        </p:nvSpPr>
-        <p:spPr>
-          <a:xfrm>
-            <a:off x="7315200" y="3246120"/>
-            <a:ext cx="3931920" cy="2743200"/>
-          </a:xfrm>
-          <a:prstGeom prst="rect">
-            <a:avLst/>
-          </a:prstGeom>
-          <a:noFill/>
-        </p:spPr>
-        <p:txBody>
-          <a:bodyPr wrap="square" lIns="0" tIns="0" rIns="0" bIns="0">
-            <a:spAutoFit/>
-          </a:bodyPr>
-          <a:lstStyle/>
-          <a:p>
-            <a:pPr>
-              <a:defRPr sz="1600" b="1">
-                <a:solidFill>
-                  <a:srgbClr val="1E3A8A"/>
-                </a:solidFill>
-                <a:latin typeface="Calibri"/>
-              </a:defRPr>
-            </a:pPr>
-            <a:r>
-              <a:t>Residual Diagnostic Takeaways</a:t>
-            </a:r>
-          </a:p>
-          <a:p>
-            <a:pPr>
-              <a:spcBef>
-                <a:spcPts val="600"/>
-              </a:spcBef>
-              <a:defRPr sz="1200">
-                <a:latin typeface="Calibri"/>
-              </a:defRPr>
-            </a:pPr>
-            <a:r>
-              <a:rPr b="1">
-                <a:solidFill>
-                  <a:srgbClr val="1E293B"/>
-                </a:solidFill>
-              </a:rPr>
-              <a:t>• Zero Systematic Bias: </a:t>
-            </a:r>
-            <a:r>
-              <a:rPr>
-                <a:solidFill>
-                  <a:srgbClr val="1E293B"/>
-                </a:solidFill>
-              </a:rPr>
-              <a:t>Residuals are symmetrically distributed around $0, indicating no systematic under- or over-valuation across the market.</a:t>
-            </a:r>
-          </a:p>
-          <a:p>
-            <a:pPr>
-              <a:spcBef>
-                <a:spcPts val="600"/>
-              </a:spcBef>
-              <a:defRPr sz="1200">
-                <a:latin typeface="Calibri"/>
-              </a:defRPr>
-            </a:pPr>
-            <a:r>
-              <a:rPr b="1">
-                <a:solidFill>
-                  <a:srgbClr val="1E293B"/>
-                </a:solidFill>
-              </a:rPr>
-              <a:t>• Tight Core Distribution: </a:t>
-            </a:r>
-            <a:r>
-              <a:rPr>
-                <a:solidFill>
-                  <a:srgbClr val="1E293B"/>
-                </a:solidFill>
-              </a:rPr>
-              <a:t>Over 80% of test predictions fall within ±8% of the final closed selling price.</a:t>
-            </a:r>
-          </a:p>
-          <a:p>
-            <a:pPr>
-              <a:spcBef>
-                <a:spcPts val="600"/>
-              </a:spcBef>
-              <a:defRPr sz="1200">
-                <a:latin typeface="Calibri"/>
-              </a:defRPr>
-            </a:pPr>
-            <a:r>
-              <a:rPr b="1">
-                <a:solidFill>
-                  <a:srgbClr val="1E293B"/>
-                </a:solidFill>
-              </a:rPr>
-              <a:t>• Mild Luxury Tail Variance: </a:t>
-            </a:r>
-            <a:r>
-              <a:rPr>
-                <a:solidFill>
-                  <a:srgbClr val="1E293B"/>
-                </a:solidFill>
-              </a:rPr>
-              <a:t>Heteroscedasticity appears above $450,000, where bespoke architectural features and custom landscaping create subjective buyer premiums.</a:t>
+              <a:t>Adjusting these 3 settings shaved another $800+ off our error, bringing internal error down to $15,969. The model became faster, smoother, and ready for production deployment.</a:t>
             </a:r>
           </a:p>
         </p:txBody>
@@ -10083,7 +10083,7 @@
               </a:defRPr>
             </a:pPr>
             <a:r>
-              <a:t>EXPLAINABLE AI • GLOBAL ATTRIBUTION</a:t>
+              <a:t>5. FINAL TEST RESULTS</a:t>
             </a:r>
           </a:p>
         </p:txBody>
@@ -10119,7 +10119,7 @@
               </a:defRPr>
             </a:pPr>
             <a:r>
-              <a:t>Global XAI: What Truly Drives Residential Value in Ames?</a:t>
+              <a:t>The Final Exam: Testing on 586 Brand New Homes</a:t>
             </a:r>
           </a:p>
         </p:txBody>
@@ -10155,7 +10155,7 @@
               </a:defRPr>
             </a:pPr>
             <a:r>
-              <a:t>Permutation feature importance measured by loss in out-of-sample MAE</a:t>
+              <a:t>We evaluated our trained model on a locked test set it had never seen before</a:t>
             </a:r>
           </a:p>
         </p:txBody>
@@ -10168,7 +10168,7 @@
         </p:nvSpPr>
         <p:spPr>
           <a:xfrm>
-            <a:off x="731520" y="6400800"/>
+            <a:off x="731520" y="6446520"/>
             <a:ext cx="10698480" cy="274320"/>
           </a:xfrm>
           <a:prstGeom prst="rect">
@@ -10191,7 +10191,7 @@
               </a:defRPr>
             </a:pPr>
             <a:r>
-              <a:t>Explainable House Price Prediction System in R (mlr3 + XAI) • Slide 9 of 12</a:t>
+              <a:t>Explainable House Price Prediction (Ames, Iowa Case Study) • Slide 9 of 13</a:t>
             </a:r>
           </a:p>
         </p:txBody>
@@ -10205,7 +10205,7 @@
         <p:spPr>
           <a:xfrm>
             <a:off x="731520" y="1737360"/>
-            <a:ext cx="5303520" cy="4297680"/>
+            <a:ext cx="2514600" cy="1188720"/>
           </a:xfrm>
           <a:prstGeom prst="roundRect">
             <a:avLst/>
@@ -10241,30 +10241,74 @@
           </a:p>
         </p:txBody>
       </p:sp>
-      <p:pic>
-        <p:nvPicPr>
-          <p:cNvPr id="7" name="Picture 6" descr="xai_01_global_importance.png"/>
-          <p:cNvPicPr>
-            <a:picLocks noChangeAspect="1"/>
-          </p:cNvPicPr>
-          <p:nvPr/>
-        </p:nvPicPr>
-        <p:blipFill>
-          <a:blip r:embed="rId2"/>
-          <a:stretch>
-            <a:fillRect/>
-          </a:stretch>
-        </p:blipFill>
-        <p:spPr>
-          <a:xfrm>
-            <a:off x="822960" y="1828800"/>
-            <a:ext cx="5120640" cy="3931920"/>
-          </a:xfrm>
-          <a:prstGeom prst="rect">
-            <a:avLst/>
-          </a:prstGeom>
-        </p:spPr>
-      </p:pic>
+      <p:sp>
+        <p:nvSpPr>
+          <p:cNvPr id="7" name="TextBox 6"/>
+          <p:cNvSpPr txBox="1"/>
+          <p:nvPr/>
+        </p:nvSpPr>
+        <p:spPr>
+          <a:xfrm>
+            <a:off x="914400" y="1874520"/>
+            <a:ext cx="2148840" cy="914400"/>
+          </a:xfrm>
+          <a:prstGeom prst="rect">
+            <a:avLst/>
+          </a:prstGeom>
+          <a:noFill/>
+        </p:spPr>
+        <p:txBody>
+          <a:bodyPr wrap="square" lIns="0" tIns="0" rIns="0" bIns="0">
+            <a:spAutoFit/>
+          </a:bodyPr>
+          <a:lstStyle/>
+          <a:p>
+            <a:pPr>
+              <a:defRPr sz="3200" b="1">
+                <a:solidFill>
+                  <a:srgbClr val="059669"/>
+                </a:solidFill>
+                <a:latin typeface="Calibri"/>
+              </a:defRPr>
+            </a:pPr>
+            <a:r>
+              <a:t>$14,761</a:t>
+            </a:r>
+          </a:p>
+          <a:p>
+            <a:pPr>
+              <a:spcBef>
+                <a:spcPts val="200"/>
+              </a:spcBef>
+              <a:defRPr sz="1300" b="1">
+                <a:solidFill>
+                  <a:srgbClr val="1E293B"/>
+                </a:solidFill>
+                <a:latin typeface="Calibri"/>
+              </a:defRPr>
+            </a:pPr>
+            <a:r>
+              <a:t>Average Error (MAE)</a:t>
+            </a:r>
+          </a:p>
+          <a:p>
+            <a:pPr>
+              <a:spcBef>
+                <a:spcPts val="200"/>
+              </a:spcBef>
+              <a:defRPr sz="1100">
+                <a:solidFill>
+                  <a:srgbClr val="64748B"/>
+                </a:solidFill>
+                <a:latin typeface="Calibri"/>
+              </a:defRPr>
+            </a:pPr>
+            <a:r>
+              <a:t>Our target was &lt; $16,000 (PASSED)</a:t>
+            </a:r>
+          </a:p>
+        </p:txBody>
+      </p:sp>
       <p:sp>
         <p:nvSpPr>
           <p:cNvPr id="8" name="Rounded Rectangle 7"/>
@@ -10273,8 +10317,8 @@
         </p:nvSpPr>
         <p:spPr>
           <a:xfrm>
-            <a:off x="6309360" y="1737360"/>
-            <a:ext cx="5120640" cy="4297680"/>
+            <a:off x="3429000" y="1737360"/>
+            <a:ext cx="2514600" cy="1188720"/>
           </a:xfrm>
           <a:prstGeom prst="roundRect">
             <a:avLst/>
@@ -10318,8 +10362,8 @@
         </p:nvSpPr>
         <p:spPr>
           <a:xfrm>
-            <a:off x="6583680" y="1920240"/>
-            <a:ext cx="4663440" cy="3931920"/>
+            <a:off x="3611880" y="1874520"/>
+            <a:ext cx="2148840" cy="914400"/>
           </a:xfrm>
           <a:prstGeom prst="rect">
             <a:avLst/>
@@ -10333,7 +10377,233 @@
           <a:lstStyle/>
           <a:p>
             <a:pPr>
-              <a:defRPr sz="1700" b="1">
+              <a:defRPr sz="3200" b="1">
+                <a:solidFill>
+                  <a:srgbClr val="059669"/>
+                </a:solidFill>
+                <a:latin typeface="Calibri"/>
+              </a:defRPr>
+            </a:pPr>
+            <a:r>
+              <a:t>89.79%</a:t>
+            </a:r>
+          </a:p>
+          <a:p>
+            <a:pPr>
+              <a:spcBef>
+                <a:spcPts val="200"/>
+              </a:spcBef>
+              <a:defRPr sz="1300" b="1">
+                <a:solidFill>
+                  <a:srgbClr val="1E293B"/>
+                </a:solidFill>
+                <a:latin typeface="Calibri"/>
+              </a:defRPr>
+            </a:pPr>
+            <a:r>
+              <a:t>Accuracy Score (R²)</a:t>
+            </a:r>
+          </a:p>
+          <a:p>
+            <a:pPr>
+              <a:spcBef>
+                <a:spcPts val="200"/>
+              </a:spcBef>
+              <a:defRPr sz="1100">
+                <a:solidFill>
+                  <a:srgbClr val="64748B"/>
+                </a:solidFill>
+                <a:latin typeface="Calibri"/>
+              </a:defRPr>
+            </a:pPr>
+            <a:r>
+              <a:t>Our target was &gt; 85.0% (PASSED)</a:t>
+            </a:r>
+          </a:p>
+        </p:txBody>
+      </p:sp>
+      <p:sp>
+        <p:nvSpPr>
+          <p:cNvPr id="10" name="Rounded Rectangle 9"/>
+          <p:cNvSpPr/>
+          <p:nvPr/>
+        </p:nvSpPr>
+        <p:spPr>
+          <a:xfrm>
+            <a:off x="6126480" y="1737360"/>
+            <a:ext cx="2514600" cy="1188720"/>
+          </a:xfrm>
+          <a:prstGeom prst="roundRect">
+            <a:avLst/>
+          </a:prstGeom>
+          <a:solidFill>
+            <a:srgbClr val="FFFFFF"/>
+          </a:solidFill>
+          <a:ln w="12700">
+            <a:solidFill>
+              <a:srgbClr val="E2E8F0"/>
+            </a:solidFill>
+          </a:ln>
+        </p:spPr>
+        <p:style>
+          <a:lnRef idx="1">
+            <a:schemeClr val="accent1"/>
+          </a:lnRef>
+          <a:fillRef idx="3">
+            <a:schemeClr val="accent1"/>
+          </a:fillRef>
+          <a:effectRef idx="2">
+            <a:schemeClr val="accent1"/>
+          </a:effectRef>
+          <a:fontRef idx="minor">
+            <a:schemeClr val="lt1"/>
+          </a:fontRef>
+        </p:style>
+        <p:txBody>
+          <a:bodyPr rtlCol="0" anchor="ctr"/>
+          <a:lstStyle/>
+          <a:p>
+            <a:pPr algn="ctr"/>
+          </a:p>
+        </p:txBody>
+      </p:sp>
+      <p:sp>
+        <p:nvSpPr>
+          <p:cNvPr id="11" name="TextBox 10"/>
+          <p:cNvSpPr txBox="1"/>
+          <p:nvPr/>
+        </p:nvSpPr>
+        <p:spPr>
+          <a:xfrm>
+            <a:off x="6309360" y="1874520"/>
+            <a:ext cx="2148840" cy="914400"/>
+          </a:xfrm>
+          <a:prstGeom prst="rect">
+            <a:avLst/>
+          </a:prstGeom>
+          <a:noFill/>
+        </p:spPr>
+        <p:txBody>
+          <a:bodyPr wrap="square" lIns="0" tIns="0" rIns="0" bIns="0">
+            <a:spAutoFit/>
+          </a:bodyPr>
+          <a:lstStyle/>
+          <a:p>
+            <a:pPr>
+              <a:defRPr sz="3200" b="1">
+                <a:solidFill>
+                  <a:srgbClr val="2563EB"/>
+                </a:solidFill>
+                <a:latin typeface="Calibri"/>
+              </a:defRPr>
+            </a:pPr>
+            <a:r>
+              <a:t>9.98%</a:t>
+            </a:r>
+          </a:p>
+          <a:p>
+            <a:pPr>
+              <a:spcBef>
+                <a:spcPts val="200"/>
+              </a:spcBef>
+              <a:defRPr sz="1300" b="1">
+                <a:solidFill>
+                  <a:srgbClr val="1E293B"/>
+                </a:solidFill>
+                <a:latin typeface="Calibri"/>
+              </a:defRPr>
+            </a:pPr>
+            <a:r>
+              <a:t>Typical Error %</a:t>
+            </a:r>
+          </a:p>
+          <a:p>
+            <a:pPr>
+              <a:spcBef>
+                <a:spcPts val="200"/>
+              </a:spcBef>
+              <a:defRPr sz="1100">
+                <a:solidFill>
+                  <a:srgbClr val="64748B"/>
+                </a:solidFill>
+                <a:latin typeface="Calibri"/>
+              </a:defRPr>
+            </a:pPr>
+            <a:r>
+              <a:t>Predictions are typically within 10% of sale price</a:t>
+            </a:r>
+          </a:p>
+        </p:txBody>
+      </p:sp>
+      <p:sp>
+        <p:nvSpPr>
+          <p:cNvPr id="12" name="Rounded Rectangle 11"/>
+          <p:cNvSpPr/>
+          <p:nvPr/>
+        </p:nvSpPr>
+        <p:spPr>
+          <a:xfrm>
+            <a:off x="8823960" y="1737360"/>
+            <a:ext cx="2514600" cy="1188720"/>
+          </a:xfrm>
+          <a:prstGeom prst="roundRect">
+            <a:avLst/>
+          </a:prstGeom>
+          <a:solidFill>
+            <a:srgbClr val="FFFFFF"/>
+          </a:solidFill>
+          <a:ln w="12700">
+            <a:solidFill>
+              <a:srgbClr val="E2E8F0"/>
+            </a:solidFill>
+          </a:ln>
+        </p:spPr>
+        <p:style>
+          <a:lnRef idx="1">
+            <a:schemeClr val="accent1"/>
+          </a:lnRef>
+          <a:fillRef idx="3">
+            <a:schemeClr val="accent1"/>
+          </a:fillRef>
+          <a:effectRef idx="2">
+            <a:schemeClr val="accent1"/>
+          </a:effectRef>
+          <a:fontRef idx="minor">
+            <a:schemeClr val="lt1"/>
+          </a:fontRef>
+        </p:style>
+        <p:txBody>
+          <a:bodyPr rtlCol="0" anchor="ctr"/>
+          <a:lstStyle/>
+          <a:p>
+            <a:pPr algn="ctr"/>
+          </a:p>
+        </p:txBody>
+      </p:sp>
+      <p:sp>
+        <p:nvSpPr>
+          <p:cNvPr id="13" name="TextBox 12"/>
+          <p:cNvSpPr txBox="1"/>
+          <p:nvPr/>
+        </p:nvSpPr>
+        <p:spPr>
+          <a:xfrm>
+            <a:off x="9006840" y="1874520"/>
+            <a:ext cx="2148840" cy="914400"/>
+          </a:xfrm>
+          <a:prstGeom prst="rect">
+            <a:avLst/>
+          </a:prstGeom>
+          <a:noFill/>
+        </p:spPr>
+        <p:txBody>
+          <a:bodyPr wrap="square" lIns="0" tIns="0" rIns="0" bIns="0">
+            <a:spAutoFit/>
+          </a:bodyPr>
+          <a:lstStyle/>
+          <a:p>
+            <a:pPr>
+              <a:defRPr sz="3200" b="1">
                 <a:solidFill>
                   <a:srgbClr val="1E3A8A"/>
                 </a:solidFill>
@@ -10341,25 +10611,207 @@
               </a:defRPr>
             </a:pPr>
             <a:r>
-              <a:t>Market-Wide Valuation Insights</a:t>
+              <a:t>586 Homes</a:t>
             </a:r>
           </a:p>
           <a:p>
             <a:pPr>
               <a:spcBef>
-                <a:spcPts val="800"/>
+                <a:spcPts val="200"/>
               </a:spcBef>
-              <a:defRPr sz="1300">
+              <a:defRPr sz="1300" b="1">
+                <a:solidFill>
+                  <a:srgbClr val="1E293B"/>
+                </a:solidFill>
+                <a:latin typeface="Calibri"/>
+              </a:defRPr>
+            </a:pPr>
+            <a:r>
+              <a:t>Test Set Size</a:t>
+            </a:r>
+          </a:p>
+          <a:p>
+            <a:pPr>
+              <a:spcBef>
+                <a:spcPts val="200"/>
+              </a:spcBef>
+              <a:defRPr sz="1100">
+                <a:solidFill>
+                  <a:srgbClr val="64748B"/>
+                </a:solidFill>
+                <a:latin typeface="Calibri"/>
+              </a:defRPr>
+            </a:pPr>
+            <a:r>
+              <a:t>Locked 20% partition tested after all training</a:t>
+            </a:r>
+          </a:p>
+        </p:txBody>
+      </p:sp>
+      <p:sp>
+        <p:nvSpPr>
+          <p:cNvPr id="14" name="Rounded Rectangle 13"/>
+          <p:cNvSpPr/>
+          <p:nvPr/>
+        </p:nvSpPr>
+        <p:spPr>
+          <a:xfrm>
+            <a:off x="731520" y="3108960"/>
+            <a:ext cx="6217920" cy="3017520"/>
+          </a:xfrm>
+          <a:prstGeom prst="roundRect">
+            <a:avLst/>
+          </a:prstGeom>
+          <a:solidFill>
+            <a:srgbClr val="FFFFFF"/>
+          </a:solidFill>
+          <a:ln w="12700">
+            <a:solidFill>
+              <a:srgbClr val="E2E8F0"/>
+            </a:solidFill>
+          </a:ln>
+        </p:spPr>
+        <p:style>
+          <a:lnRef idx="1">
+            <a:schemeClr val="accent1"/>
+          </a:lnRef>
+          <a:fillRef idx="3">
+            <a:schemeClr val="accent1"/>
+          </a:fillRef>
+          <a:effectRef idx="2">
+            <a:schemeClr val="accent1"/>
+          </a:effectRef>
+          <a:fontRef idx="minor">
+            <a:schemeClr val="lt1"/>
+          </a:fontRef>
+        </p:style>
+        <p:txBody>
+          <a:bodyPr rtlCol="0" anchor="ctr"/>
+          <a:lstStyle/>
+          <a:p>
+            <a:pPr algn="ctr"/>
+          </a:p>
+        </p:txBody>
+      </p:sp>
+      <p:pic>
+        <p:nvPicPr>
+          <p:cNvPr id="15" name="Picture 14" descr="evaluation_residual_diagnostics.png"/>
+          <p:cNvPicPr>
+            <a:picLocks noChangeAspect="1"/>
+          </p:cNvPicPr>
+          <p:nvPr/>
+        </p:nvPicPr>
+        <p:blipFill>
+          <a:blip r:embed="rId2"/>
+          <a:stretch>
+            <a:fillRect/>
+          </a:stretch>
+        </p:blipFill>
+        <p:spPr>
+          <a:xfrm>
+            <a:off x="822960" y="3154680"/>
+            <a:ext cx="6035040" cy="2880360"/>
+          </a:xfrm>
+          <a:prstGeom prst="rect">
+            <a:avLst/>
+          </a:prstGeom>
+        </p:spPr>
+      </p:pic>
+      <p:sp>
+        <p:nvSpPr>
+          <p:cNvPr id="16" name="Rounded Rectangle 15"/>
+          <p:cNvSpPr/>
+          <p:nvPr/>
+        </p:nvSpPr>
+        <p:spPr>
+          <a:xfrm>
+            <a:off x="7132320" y="3108960"/>
+            <a:ext cx="4297680" cy="3017520"/>
+          </a:xfrm>
+          <a:prstGeom prst="roundRect">
+            <a:avLst/>
+          </a:prstGeom>
+          <a:solidFill>
+            <a:srgbClr val="FFFFFF"/>
+          </a:solidFill>
+          <a:ln w="12700">
+            <a:solidFill>
+              <a:srgbClr val="E2E8F0"/>
+            </a:solidFill>
+          </a:ln>
+        </p:spPr>
+        <p:style>
+          <a:lnRef idx="1">
+            <a:schemeClr val="accent1"/>
+          </a:lnRef>
+          <a:fillRef idx="3">
+            <a:schemeClr val="accent1"/>
+          </a:fillRef>
+          <a:effectRef idx="2">
+            <a:schemeClr val="accent1"/>
+          </a:effectRef>
+          <a:fontRef idx="minor">
+            <a:schemeClr val="lt1"/>
+          </a:fontRef>
+        </p:style>
+        <p:txBody>
+          <a:bodyPr rtlCol="0" anchor="ctr"/>
+          <a:lstStyle/>
+          <a:p>
+            <a:pPr algn="ctr"/>
+          </a:p>
+        </p:txBody>
+      </p:sp>
+      <p:sp>
+        <p:nvSpPr>
+          <p:cNvPr id="17" name="TextBox 16"/>
+          <p:cNvSpPr txBox="1"/>
+          <p:nvPr/>
+        </p:nvSpPr>
+        <p:spPr>
+          <a:xfrm>
+            <a:off x="7315200" y="3246120"/>
+            <a:ext cx="3931920" cy="2743200"/>
+          </a:xfrm>
+          <a:prstGeom prst="rect">
+            <a:avLst/>
+          </a:prstGeom>
+          <a:noFill/>
+        </p:spPr>
+        <p:txBody>
+          <a:bodyPr wrap="square" lIns="0" tIns="0" rIns="0" bIns="0">
+            <a:spAutoFit/>
+          </a:bodyPr>
+          <a:lstStyle/>
+          <a:p>
+            <a:pPr>
+              <a:defRPr sz="1600" b="1">
+                <a:solidFill>
+                  <a:srgbClr val="1E3A8A"/>
+                </a:solidFill>
+                <a:latin typeface="Calibri"/>
+              </a:defRPr>
+            </a:pPr>
+            <a:r>
+              <a:t>What the Diagnostics Tell Us:</a:t>
+            </a:r>
+          </a:p>
+          <a:p>
+            <a:pPr>
+              <a:spcBef>
+                <a:spcPts val="600"/>
+              </a:spcBef>
+              <a:defRPr sz="1200">
                 <a:latin typeface="Calibri"/>
               </a:defRPr>
             </a:pPr>
             <a:r>
               <a:rPr b="1">
                 <a:solidFill>
-                  <a:srgbClr val="1E3A8A"/>
+                  <a:srgbClr val="1E293B"/>
                 </a:solidFill>
               </a:rPr>
-              <a:t>• The Living Area &amp; Quality Synergy: </a:t>
+              <a:t>• No Systematic Bias: </a:t>
             </a:r>
             <a:r>
               <a:rPr>
@@ -10367,25 +10819,25 @@
                   <a:srgbClr val="1E293B"/>
                 </a:solidFill>
               </a:rPr>
-              <a:t>Qual_x_LivingArea and Total_Living_Area drive over 50% of the entire model's predictive power. Size matters most when paired with high build quality.</a:t>
+              <a:t>Errors balance equally above and below $0. The model doesn't consistently over-value or under-value homes.</a:t>
             </a:r>
           </a:p>
           <a:p>
             <a:pPr>
               <a:spcBef>
-                <a:spcPts val="800"/>
+                <a:spcPts val="600"/>
               </a:spcBef>
-              <a:defRPr sz="1300">
+              <a:defRPr sz="1200">
                 <a:latin typeface="Calibri"/>
               </a:defRPr>
             </a:pPr>
             <a:r>
               <a:rPr b="1">
                 <a:solidFill>
-                  <a:srgbClr val="1E3A8A"/>
+                  <a:srgbClr val="1E293B"/>
                 </a:solidFill>
               </a:rPr>
-              <a:t>• Neighborhood Location as a Baseline: </a:t>
+              <a:t>• Tight Middle Range: </a:t>
             </a:r>
             <a:r>
               <a:rPr>
@@ -10393,25 +10845,25 @@
                   <a:srgbClr val="1E293B"/>
                 </a:solidFill>
               </a:rPr>
-              <a:t>Neighborhood is the primary categorical modifier. Locations like Northridge Heights establish higher baseline appraisals than older urban pockets.</a:t>
+              <a:t>For normal family homes ($130k to $250k), errors are small—typically within 5% to 8%.</a:t>
             </a:r>
           </a:p>
           <a:p>
             <a:pPr>
               <a:spcBef>
-                <a:spcPts val="800"/>
+                <a:spcPts val="600"/>
               </a:spcBef>
-              <a:defRPr sz="1300">
+              <a:defRPr sz="1200">
                 <a:latin typeface="Calibri"/>
               </a:defRPr>
             </a:pPr>
             <a:r>
               <a:rPr b="1">
                 <a:solidFill>
-                  <a:srgbClr val="1E3A8A"/>
+                  <a:srgbClr val="1E293B"/>
                 </a:solidFill>
               </a:rPr>
-              <a:t>• The Price of Chronological Aging: </a:t>
+              <a:t>• Why Errors Grow on Mansions: </a:t>
             </a:r>
             <a:r>
               <a:rPr>
@@ -10419,33 +10871,7 @@
                   <a:srgbClr val="1E293B"/>
                 </a:solidFill>
               </a:rPr>
-              <a:t>Age_At_Sale exerts a consistent depreciation drag unless offset by comprehensive, recent remodel investments.</a:t>
-            </a:r>
-          </a:p>
-          <a:p>
-            <a:pPr>
-              <a:spcBef>
-                <a:spcPts val="800"/>
-              </a:spcBef>
-              <a:defRPr sz="1300">
-                <a:latin typeface="Calibri"/>
-              </a:defRPr>
-            </a:pPr>
-            <a:r>
-              <a:rPr b="1">
-                <a:solidFill>
-                  <a:srgbClr val="1E3A8A"/>
-                </a:solidFill>
-              </a:rPr>
-              <a:t>• Basement Utility Disparity: </a:t>
-            </a:r>
-            <a:r>
-              <a:rPr>
-                <a:solidFill>
-                  <a:srgbClr val="1E293B"/>
-                </a:solidFill>
-              </a:rPr>
-              <a:t>Finished basement square footage contributes substantially to valuation, whereas unfinished space adds near-zero dollar value.</a:t>
+              <a:t>On houses above $450k, errors are larger because luxury homes have custom architectural details (like heated pools or wine cellars) that standard data cannot capture.</a:t>
             </a:r>
           </a:p>
         </p:txBody>

--- a/reports/Explainable_House_Price_Prediction_Presentation.pptx
+++ b/reports/Explainable_House_Price_Prediction_Presentation.pptx
@@ -9286,7 +9286,7 @@
                   <a:srgbClr val="1E293B"/>
                 </a:solidFill>
               </a:rPr>
-              <a:t>$15,321 average error (&lt;pptx.text.text._Run object at 0x000001C71D10A350&gt;)</a:t>
+              <a:t>$15,321 average error (&lt;pptx.text.text._Run object at 0x00000170A5462510&gt;)</a:t>
             </a:r>
           </a:p>
           <a:p>
@@ -9312,7 +9312,7 @@
                   <a:srgbClr val="1E293B"/>
                 </a:solidFill>
               </a:rPr>
-              <a:t>$15,858 average error (&lt;pptx.text.text._Run object at 0x000001C71BE8B950&gt;)</a:t>
+              <a:t>$15,858 average error (&lt;pptx.text.text._Run object at 0x00000170A528F950&gt;)</a:t>
             </a:r>
           </a:p>
           <a:p>
@@ -9338,7 +9338,7 @@
                   <a:srgbClr val="1E293B"/>
                 </a:solidFill>
               </a:rPr>
-              <a:t>$16,749 average error (&lt;pptx.text.text._Run object at 0x000001C71D16C5D0&gt;)</a:t>
+              <a:t>$16,749 average error (&lt;pptx.text.text._Run object at 0x00000170A54C0680&gt;)</a:t>
             </a:r>
           </a:p>
           <a:p>
@@ -9364,7 +9364,7 @@
                   <a:srgbClr val="1E293B"/>
                 </a:solidFill>
               </a:rPr>
-              <a:t>$21,093 average error (&lt;pptx.text.text._Run object at 0x000001C71D1B6030&gt;)</a:t>
+              <a:t>$21,093 average error (&lt;pptx.text.text._Run object at 0x00000170A5512530&gt;)</a:t>
             </a:r>
           </a:p>
           <a:p>
@@ -9390,7 +9390,7 @@
                   <a:srgbClr val="1E293B"/>
                 </a:solidFill>
               </a:rPr>
-              <a:t>$27,458 average error (&lt;pptx.text.text._Run object at 0x000001C71D05B890&gt;)</a:t>
+              <a:t>$27,458 average error (&lt;pptx.text.text._Run object at 0x00000170A53AF920&gt;)</a:t>
             </a:r>
           </a:p>
           <a:p>
@@ -9416,7 +9416,7 @@
                   <a:srgbClr val="1E293B"/>
                 </a:solidFill>
               </a:rPr>
-              <a:t>$58,761 average error (&lt;pptx.text.text._Run object at 0x000001C71D1B0BD0&gt;)</a:t>
+              <a:t>$58,761 average error (&lt;pptx.text.text._Run object at 0x00000170A54F1350&gt;)</a:t>
             </a:r>
           </a:p>
           <a:p>
